--- a/docs/pitch/Ghostkeys-pitch.pptx
+++ b/docs/pitch/Ghostkeys-pitch.pptx
@@ -112,6 +112,916 @@
     </a:lvl9pPr>
   </p:defaultTextStyle>
 </p:presentation>
+</file>
+
+<file path=ppt/notesMasters/notesMaster1.xml><?xml version="1.0" encoding="utf-8"?>
+<p:notesMaster xmlns:a="http://schemas.openxmlformats.org/drawingml/2006/main" xmlns:p="http://schemas.openxmlformats.org/presentationml/2006/main" xmlns:r="http://schemas.openxmlformats.org/officeDocument/2006/relationships">
+  <p:cSld>
+    <p:bg>
+      <p:bgRef idx="1001">
+        <a:schemeClr val="bg1"/>
+      </p:bgRef>
+    </p:bg>
+    <p:spTree>
+      <p:nvGrpSpPr>
+        <p:cNvPr id="1" name=""/>
+        <p:cNvGrpSpPr/>
+        <p:nvPr/>
+      </p:nvGrpSpPr>
+      <p:grpSpPr>
+        <a:xfrm>
+          <a:off x="0" y="0"/>
+          <a:ext cx="0" cy="0"/>
+          <a:chOff x="0" y="0"/>
+          <a:chExt cx="0" cy="0"/>
+        </a:xfrm>
+      </p:grpSpPr>
+      <p:sp>
+        <p:nvSpPr>
+          <p:cNvPr id="2" name="Header Placeholder 1"/>
+          <p:cNvSpPr>
+            <a:spLocks noGrp="1"/>
+          </p:cNvSpPr>
+          <p:nvPr>
+            <p:ph type="hdr" sz="quarter"/>
+          </p:nvPr>
+        </p:nvSpPr>
+        <p:spPr>
+          <a:xfrm>
+            <a:off x="0" y="0"/>
+            <a:ext cx="2971800" cy="457200"/>
+          </a:xfrm>
+          <a:prstGeom prst="rect">
+            <a:avLst/>
+          </a:prstGeom>
+        </p:spPr>
+        <p:txBody>
+          <a:bodyPr vert="horz" lIns="91440" tIns="45720" rIns="91440" bIns="45720" rtlCol="0"/>
+          <a:lstStyle>
+            <a:lvl1pPr algn="l">
+              <a:defRPr sz="1200"/>
+            </a:lvl1pPr>
+          </a:lstStyle>
+          <a:p>
+            <a:endParaRPr lang="en-US"/>
+          </a:p>
+        </p:txBody>
+      </p:sp>
+      <p:sp>
+        <p:nvSpPr>
+          <p:cNvPr id="3" name="Date Placeholder 2"/>
+          <p:cNvSpPr>
+            <a:spLocks noGrp="1"/>
+          </p:cNvSpPr>
+          <p:nvPr>
+            <p:ph type="dt" idx="1"/>
+          </p:nvPr>
+        </p:nvSpPr>
+        <p:spPr>
+          <a:xfrm>
+            <a:off x="3884613" y="0"/>
+            <a:ext cx="2971800" cy="457200"/>
+          </a:xfrm>
+          <a:prstGeom prst="rect">
+            <a:avLst/>
+          </a:prstGeom>
+        </p:spPr>
+        <p:txBody>
+          <a:bodyPr vert="horz" lIns="91440" tIns="45720" rIns="91440" bIns="45720" rtlCol="0"/>
+          <a:lstStyle>
+            <a:lvl1pPr algn="r">
+              <a:defRPr sz="1200"/>
+            </a:lvl1pPr>
+          </a:lstStyle>
+          <a:p>
+            <a:fld id="{0F89C1C7-3DCD-1040-A9CF-14679D8B5DDD}" type="datetimeFigureOut">
+              <a:rPr lang="en-US" smtClean="0"/>
+              <a:t>10/17/16</a:t>
+            </a:fld>
+            <a:endParaRPr lang="en-US"/>
+          </a:p>
+        </p:txBody>
+      </p:sp>
+      <p:sp>
+        <p:nvSpPr>
+          <p:cNvPr id="4" name="Slide Image Placeholder 3"/>
+          <p:cNvSpPr>
+            <a:spLocks noGrp="1" noRot="1" noChangeAspect="1"/>
+          </p:cNvSpPr>
+          <p:nvPr>
+            <p:ph type="sldImg" idx="2"/>
+          </p:nvPr>
+        </p:nvSpPr>
+        <p:spPr>
+          <a:xfrm>
+            <a:off x="1143000" y="685800"/>
+            <a:ext cx="4572000" cy="3429000"/>
+          </a:xfrm>
+          <a:prstGeom prst="rect">
+            <a:avLst/>
+          </a:prstGeom>
+          <a:noFill/>
+          <a:ln w="12700">
+            <a:solidFill>
+              <a:prstClr val="black"/>
+            </a:solidFill>
+          </a:ln>
+        </p:spPr>
+        <p:txBody>
+          <a:bodyPr vert="horz" lIns="91440" tIns="45720" rIns="91440" bIns="45720" rtlCol="0" anchor="ctr"/>
+          <a:lstStyle/>
+          <a:p>
+            <a:endParaRPr lang="en-US"/>
+          </a:p>
+        </p:txBody>
+      </p:sp>
+      <p:sp>
+        <p:nvSpPr>
+          <p:cNvPr id="5" name="Notes Placeholder 4"/>
+          <p:cNvSpPr>
+            <a:spLocks noGrp="1"/>
+          </p:cNvSpPr>
+          <p:nvPr>
+            <p:ph type="body" sz="quarter" idx="3"/>
+          </p:nvPr>
+        </p:nvSpPr>
+        <p:spPr>
+          <a:xfrm>
+            <a:off x="685800" y="4343400"/>
+            <a:ext cx="5486400" cy="4114800"/>
+          </a:xfrm>
+          <a:prstGeom prst="rect">
+            <a:avLst/>
+          </a:prstGeom>
+        </p:spPr>
+        <p:txBody>
+          <a:bodyPr vert="horz" lIns="91440" tIns="45720" rIns="91440" bIns="45720" rtlCol="0"/>
+          <a:lstStyle/>
+          <a:p>
+            <a:pPr lvl="0"/>
+            <a:r>
+              <a:rPr lang="en-US" smtClean="0"/>
+              <a:t>Click to edit Master text styles</a:t>
+            </a:r>
+          </a:p>
+          <a:p>
+            <a:pPr lvl="1"/>
+            <a:r>
+              <a:rPr lang="en-US" smtClean="0"/>
+              <a:t>Second level</a:t>
+            </a:r>
+          </a:p>
+          <a:p>
+            <a:pPr lvl="2"/>
+            <a:r>
+              <a:rPr lang="en-US" smtClean="0"/>
+              <a:t>Third level</a:t>
+            </a:r>
+          </a:p>
+          <a:p>
+            <a:pPr lvl="3"/>
+            <a:r>
+              <a:rPr lang="en-US" smtClean="0"/>
+              <a:t>Fourth level</a:t>
+            </a:r>
+          </a:p>
+          <a:p>
+            <a:pPr lvl="4"/>
+            <a:r>
+              <a:rPr lang="en-US" smtClean="0"/>
+              <a:t>Fifth level</a:t>
+            </a:r>
+            <a:endParaRPr lang="en-US"/>
+          </a:p>
+        </p:txBody>
+      </p:sp>
+      <p:sp>
+        <p:nvSpPr>
+          <p:cNvPr id="6" name="Footer Placeholder 5"/>
+          <p:cNvSpPr>
+            <a:spLocks noGrp="1"/>
+          </p:cNvSpPr>
+          <p:nvPr>
+            <p:ph type="ftr" sz="quarter" idx="4"/>
+          </p:nvPr>
+        </p:nvSpPr>
+        <p:spPr>
+          <a:xfrm>
+            <a:off x="0" y="8685213"/>
+            <a:ext cx="2971800" cy="457200"/>
+          </a:xfrm>
+          <a:prstGeom prst="rect">
+            <a:avLst/>
+          </a:prstGeom>
+        </p:spPr>
+        <p:txBody>
+          <a:bodyPr vert="horz" lIns="91440" tIns="45720" rIns="91440" bIns="45720" rtlCol="0" anchor="b"/>
+          <a:lstStyle>
+            <a:lvl1pPr algn="l">
+              <a:defRPr sz="1200"/>
+            </a:lvl1pPr>
+          </a:lstStyle>
+          <a:p>
+            <a:endParaRPr lang="en-US"/>
+          </a:p>
+        </p:txBody>
+      </p:sp>
+      <p:sp>
+        <p:nvSpPr>
+          <p:cNvPr id="7" name="Slide Number Placeholder 6"/>
+          <p:cNvSpPr>
+            <a:spLocks noGrp="1"/>
+          </p:cNvSpPr>
+          <p:nvPr>
+            <p:ph type="sldNum" sz="quarter" idx="5"/>
+          </p:nvPr>
+        </p:nvSpPr>
+        <p:spPr>
+          <a:xfrm>
+            <a:off x="3884613" y="8685213"/>
+            <a:ext cx="2971800" cy="457200"/>
+          </a:xfrm>
+          <a:prstGeom prst="rect">
+            <a:avLst/>
+          </a:prstGeom>
+        </p:spPr>
+        <p:txBody>
+          <a:bodyPr vert="horz" lIns="91440" tIns="45720" rIns="91440" bIns="45720" rtlCol="0" anchor="b"/>
+          <a:lstStyle>
+            <a:lvl1pPr algn="r">
+              <a:defRPr sz="1200"/>
+            </a:lvl1pPr>
+          </a:lstStyle>
+          <a:p>
+            <a:fld id="{BB5E49A5-4136-284D-997B-48E1D791AD67}" type="slidenum">
+              <a:rPr lang="en-US" smtClean="0"/>
+              <a:t>‹#›</a:t>
+            </a:fld>
+            <a:endParaRPr lang="en-US"/>
+          </a:p>
+        </p:txBody>
+      </p:sp>
+    </p:spTree>
+    <p:extLst>
+      <p:ext uri="{BB962C8B-B14F-4D97-AF65-F5344CB8AC3E}">
+        <p14:creationId xmlns:p14="http://schemas.microsoft.com/office/powerpoint/2010/main" val="2623252185"/>
+      </p:ext>
+    </p:extLst>
+  </p:cSld>
+  <p:clrMap bg1="lt1" tx1="dk1" bg2="lt2" tx2="dk2" accent1="accent1" accent2="accent2" accent3="accent3" accent4="accent4" accent5="accent5" accent6="accent6" hlink="hlink" folHlink="folHlink"/>
+  <p:notesStyle>
+    <a:lvl1pPr marL="0" algn="l" defTabSz="457200" rtl="0" eaLnBrk="1" latinLnBrk="0" hangingPunct="1">
+      <a:defRPr sz="1200" kern="1200">
+        <a:solidFill>
+          <a:schemeClr val="tx1"/>
+        </a:solidFill>
+        <a:latin typeface="+mn-lt"/>
+        <a:ea typeface="+mn-ea"/>
+        <a:cs typeface="+mn-cs"/>
+      </a:defRPr>
+    </a:lvl1pPr>
+    <a:lvl2pPr marL="457200" algn="l" defTabSz="457200" rtl="0" eaLnBrk="1" latinLnBrk="0" hangingPunct="1">
+      <a:defRPr sz="1200" kern="1200">
+        <a:solidFill>
+          <a:schemeClr val="tx1"/>
+        </a:solidFill>
+        <a:latin typeface="+mn-lt"/>
+        <a:ea typeface="+mn-ea"/>
+        <a:cs typeface="+mn-cs"/>
+      </a:defRPr>
+    </a:lvl2pPr>
+    <a:lvl3pPr marL="914400" algn="l" defTabSz="457200" rtl="0" eaLnBrk="1" latinLnBrk="0" hangingPunct="1">
+      <a:defRPr sz="1200" kern="1200">
+        <a:solidFill>
+          <a:schemeClr val="tx1"/>
+        </a:solidFill>
+        <a:latin typeface="+mn-lt"/>
+        <a:ea typeface="+mn-ea"/>
+        <a:cs typeface="+mn-cs"/>
+      </a:defRPr>
+    </a:lvl3pPr>
+    <a:lvl4pPr marL="1371600" algn="l" defTabSz="457200" rtl="0" eaLnBrk="1" latinLnBrk="0" hangingPunct="1">
+      <a:defRPr sz="1200" kern="1200">
+        <a:solidFill>
+          <a:schemeClr val="tx1"/>
+        </a:solidFill>
+        <a:latin typeface="+mn-lt"/>
+        <a:ea typeface="+mn-ea"/>
+        <a:cs typeface="+mn-cs"/>
+      </a:defRPr>
+    </a:lvl4pPr>
+    <a:lvl5pPr marL="1828800" algn="l" defTabSz="457200" rtl="0" eaLnBrk="1" latinLnBrk="0" hangingPunct="1">
+      <a:defRPr sz="1200" kern="1200">
+        <a:solidFill>
+          <a:schemeClr val="tx1"/>
+        </a:solidFill>
+        <a:latin typeface="+mn-lt"/>
+        <a:ea typeface="+mn-ea"/>
+        <a:cs typeface="+mn-cs"/>
+      </a:defRPr>
+    </a:lvl5pPr>
+    <a:lvl6pPr marL="2286000" algn="l" defTabSz="457200" rtl="0" eaLnBrk="1" latinLnBrk="0" hangingPunct="1">
+      <a:defRPr sz="1200" kern="1200">
+        <a:solidFill>
+          <a:schemeClr val="tx1"/>
+        </a:solidFill>
+        <a:latin typeface="+mn-lt"/>
+        <a:ea typeface="+mn-ea"/>
+        <a:cs typeface="+mn-cs"/>
+      </a:defRPr>
+    </a:lvl6pPr>
+    <a:lvl7pPr marL="2743200" algn="l" defTabSz="457200" rtl="0" eaLnBrk="1" latinLnBrk="0" hangingPunct="1">
+      <a:defRPr sz="1200" kern="1200">
+        <a:solidFill>
+          <a:schemeClr val="tx1"/>
+        </a:solidFill>
+        <a:latin typeface="+mn-lt"/>
+        <a:ea typeface="+mn-ea"/>
+        <a:cs typeface="+mn-cs"/>
+      </a:defRPr>
+    </a:lvl7pPr>
+    <a:lvl8pPr marL="3200400" algn="l" defTabSz="457200" rtl="0" eaLnBrk="1" latinLnBrk="0" hangingPunct="1">
+      <a:defRPr sz="1200" kern="1200">
+        <a:solidFill>
+          <a:schemeClr val="tx1"/>
+        </a:solidFill>
+        <a:latin typeface="+mn-lt"/>
+        <a:ea typeface="+mn-ea"/>
+        <a:cs typeface="+mn-cs"/>
+      </a:defRPr>
+    </a:lvl8pPr>
+    <a:lvl9pPr marL="3657600" algn="l" defTabSz="457200" rtl="0" eaLnBrk="1" latinLnBrk="0" hangingPunct="1">
+      <a:defRPr sz="1200" kern="1200">
+        <a:solidFill>
+          <a:schemeClr val="tx1"/>
+        </a:solidFill>
+        <a:latin typeface="+mn-lt"/>
+        <a:ea typeface="+mn-ea"/>
+        <a:cs typeface="+mn-cs"/>
+      </a:defRPr>
+    </a:lvl9pPr>
+  </p:notesStyle>
+</p:notesMaster>
+</file>
+
+<file path=ppt/notesSlides/notesSlide1.xml><?xml version="1.0" encoding="utf-8"?>
+<p:notes xmlns:a="http://schemas.openxmlformats.org/drawingml/2006/main" xmlns:p="http://schemas.openxmlformats.org/presentationml/2006/main" xmlns:r="http://schemas.openxmlformats.org/officeDocument/2006/relationships">
+  <p:cSld>
+    <p:spTree>
+      <p:nvGrpSpPr>
+        <p:cNvPr id="1" name=""/>
+        <p:cNvGrpSpPr/>
+        <p:nvPr/>
+      </p:nvGrpSpPr>
+      <p:grpSpPr>
+        <a:xfrm>
+          <a:off x="0" y="0"/>
+          <a:ext cx="0" cy="0"/>
+          <a:chOff x="0" y="0"/>
+          <a:chExt cx="0" cy="0"/>
+        </a:xfrm>
+      </p:grpSpPr>
+      <p:sp>
+        <p:nvSpPr>
+          <p:cNvPr id="2" name="Slide Image Placeholder 1"/>
+          <p:cNvSpPr>
+            <a:spLocks noGrp="1"/>
+          </p:cNvSpPr>
+          <p:nvPr>
+            <p:ph type="sldImg" idx="2"/>
+          </p:nvPr>
+        </p:nvSpPr>
+        <p:spPr/>
+      </p:sp>
+      <p:sp>
+        <p:nvSpPr>
+          <p:cNvPr id="3" name="Notes Placeholder 2"/>
+          <p:cNvSpPr>
+            <a:spLocks noGrp="1"/>
+          </p:cNvSpPr>
+          <p:nvPr>
+            <p:ph type="body" idx="3" sz="quarter"/>
+          </p:nvPr>
+        </p:nvSpPr>
+        <p:spPr/>
+        <p:txBody>
+          <a:bodyPr/>
+          <a:lstStyle/>
+          <a:p>
+            <a:r>
+              <a:t>This is Ghostkeys. It turns the blank parts of your MacBook, the palm rests, the speaker grilles and the strip above the keys, into buttons. No new hardware, nothing to plug in.</a:t>
+            </a:r>
+          </a:p>
+        </p:txBody>
+      </p:sp>
+      <p:sp>
+        <p:nvSpPr>
+          <p:cNvPr id="4" name="Slide Number Placeholder 3"/>
+          <p:cNvSpPr>
+            <a:spLocks noGrp="1"/>
+          </p:cNvSpPr>
+          <p:nvPr>
+            <p:ph type="sldNum" idx="5" sz="quarter"/>
+          </p:nvPr>
+        </p:nvSpPr>
+        <p:spPr/>
+      </p:sp>
+    </p:spTree>
+  </p:cSld>
+  <p:clrMapOvr>
+    <a:masterClrMapping/>
+  </p:clrMapOvr>
+</p:notes>
+</file>
+
+<file path=ppt/notesSlides/notesSlide2.xml><?xml version="1.0" encoding="utf-8"?>
+<p:notes xmlns:a="http://schemas.openxmlformats.org/drawingml/2006/main" xmlns:p="http://schemas.openxmlformats.org/presentationml/2006/main" xmlns:r="http://schemas.openxmlformats.org/officeDocument/2006/relationships">
+  <p:cSld>
+    <p:spTree>
+      <p:nvGrpSpPr>
+        <p:cNvPr id="1" name=""/>
+        <p:cNvGrpSpPr/>
+        <p:nvPr/>
+      </p:nvGrpSpPr>
+      <p:grpSpPr>
+        <a:xfrm>
+          <a:off x="0" y="0"/>
+          <a:ext cx="0" cy="0"/>
+          <a:chOff x="0" y="0"/>
+          <a:chExt cx="0" cy="0"/>
+        </a:xfrm>
+      </p:grpSpPr>
+      <p:sp>
+        <p:nvSpPr>
+          <p:cNvPr id="2" name="Slide Image Placeholder 1"/>
+          <p:cNvSpPr>
+            <a:spLocks noGrp="1"/>
+          </p:cNvSpPr>
+          <p:nvPr>
+            <p:ph type="sldImg" idx="2"/>
+          </p:nvPr>
+        </p:nvSpPr>
+        <p:spPr/>
+      </p:sp>
+      <p:sp>
+        <p:nvSpPr>
+          <p:cNvPr id="3" name="Notes Placeholder 2"/>
+          <p:cNvSpPr>
+            <a:spLocks noGrp="1"/>
+          </p:cNvSpPr>
+          <p:nvPr>
+            <p:ph type="body" idx="3" sz="quarter"/>
+          </p:nvPr>
+        </p:nvSpPr>
+        <p:spPr/>
+        <p:txBody>
+          <a:bodyPr/>
+          <a:lstStyle/>
+          <a:p>
+            <a:r>
+              <a:t>Look at a MacBook: a lot of the top is dead space. With Ghostkeys you tap it. Tap the top strip to jump back to your last app, double tap the right grille for a screenshot, tap the left palm rest to mute a call. You choose what each spot does.</a:t>
+            </a:r>
+          </a:p>
+        </p:txBody>
+      </p:sp>
+      <p:sp>
+        <p:nvSpPr>
+          <p:cNvPr id="4" name="Slide Number Placeholder 3"/>
+          <p:cNvSpPr>
+            <a:spLocks noGrp="1"/>
+          </p:cNvSpPr>
+          <p:nvPr>
+            <p:ph type="sldNum" idx="5" sz="quarter"/>
+          </p:nvPr>
+        </p:nvSpPr>
+        <p:spPr/>
+      </p:sp>
+    </p:spTree>
+  </p:cSld>
+  <p:clrMapOvr>
+    <a:masterClrMapping/>
+  </p:clrMapOvr>
+</p:notes>
+</file>
+
+<file path=ppt/notesSlides/notesSlide3.xml><?xml version="1.0" encoding="utf-8"?>
+<p:notes xmlns:a="http://schemas.openxmlformats.org/drawingml/2006/main" xmlns:p="http://schemas.openxmlformats.org/presentationml/2006/main" xmlns:r="http://schemas.openxmlformats.org/officeDocument/2006/relationships">
+  <p:cSld>
+    <p:spTree>
+      <p:nvGrpSpPr>
+        <p:cNvPr id="1" name=""/>
+        <p:cNvGrpSpPr/>
+        <p:nvPr/>
+      </p:nvGrpSpPr>
+      <p:grpSpPr>
+        <a:xfrm>
+          <a:off x="0" y="0"/>
+          <a:ext cx="0" cy="0"/>
+          <a:chOff x="0" y="0"/>
+          <a:chExt cx="0" cy="0"/>
+        </a:xfrm>
+      </p:grpSpPr>
+      <p:sp>
+        <p:nvSpPr>
+          <p:cNvPr id="2" name="Slide Image Placeholder 1"/>
+          <p:cNvSpPr>
+            <a:spLocks noGrp="1"/>
+          </p:cNvSpPr>
+          <p:nvPr>
+            <p:ph type="sldImg" idx="2"/>
+          </p:nvPr>
+        </p:nvSpPr>
+        <p:spPr/>
+      </p:sp>
+      <p:sp>
+        <p:nvSpPr>
+          <p:cNvPr id="3" name="Notes Placeholder 2"/>
+          <p:cNvSpPr>
+            <a:spLocks noGrp="1"/>
+          </p:cNvSpPr>
+          <p:nvPr>
+            <p:ph type="body" idx="3" sz="quarter"/>
+          </p:nvPr>
+        </p:nvSpPr>
+        <p:spPr/>
+        <p:txBody>
+          <a:bodyPr/>
+          <a:lstStyle/>
+          <a:p>
+            <a:r>
+              <a:t>The hard part: every Apple silicon MacBook has a motion sensor inside that reads 800 times a second, and a tap barely shows up on it. Typing looks almost the same, as you can see. So every bump goes through four checks: did something hit, were you typing or on the trackpad, which spot was it, and are we sure. If we are not sure, we do nothing. A missed tap costs a second try. A wrong action costs trust.</a:t>
+            </a:r>
+          </a:p>
+        </p:txBody>
+      </p:sp>
+      <p:sp>
+        <p:nvSpPr>
+          <p:cNvPr id="4" name="Slide Number Placeholder 3"/>
+          <p:cNvSpPr>
+            <a:spLocks noGrp="1"/>
+          </p:cNvSpPr>
+          <p:nvPr>
+            <p:ph type="sldNum" idx="5" sz="quarter"/>
+          </p:nvPr>
+        </p:nvSpPr>
+        <p:spPr/>
+      </p:sp>
+    </p:spTree>
+  </p:cSld>
+  <p:clrMapOvr>
+    <a:masterClrMapping/>
+  </p:clrMapOvr>
+</p:notes>
+</file>
+
+<file path=ppt/notesSlides/notesSlide4.xml><?xml version="1.0" encoding="utf-8"?>
+<p:notes xmlns:a="http://schemas.openxmlformats.org/drawingml/2006/main" xmlns:p="http://schemas.openxmlformats.org/presentationml/2006/main" xmlns:r="http://schemas.openxmlformats.org/officeDocument/2006/relationships">
+  <p:cSld>
+    <p:spTree>
+      <p:nvGrpSpPr>
+        <p:cNvPr id="1" name=""/>
+        <p:cNvGrpSpPr/>
+        <p:nvPr/>
+      </p:nvGrpSpPr>
+      <p:grpSpPr>
+        <a:xfrm>
+          <a:off x="0" y="0"/>
+          <a:ext cx="0" cy="0"/>
+          <a:chOff x="0" y="0"/>
+          <a:chExt cx="0" cy="0"/>
+        </a:xfrm>
+      </p:grpSpPr>
+      <p:sp>
+        <p:nvSpPr>
+          <p:cNvPr id="2" name="Slide Image Placeholder 1"/>
+          <p:cNvSpPr>
+            <a:spLocks noGrp="1"/>
+          </p:cNvSpPr>
+          <p:nvPr>
+            <p:ph type="sldImg" idx="2"/>
+          </p:nvPr>
+        </p:nvSpPr>
+        <p:spPr/>
+      </p:sp>
+      <p:sp>
+        <p:nvSpPr>
+          <p:cNvPr id="3" name="Notes Placeholder 2"/>
+          <p:cNvSpPr>
+            <a:spLocks noGrp="1"/>
+          </p:cNvSpPr>
+          <p:nvPr>
+            <p:ph type="body" idx="3" sz="quarter"/>
+          </p:nvPr>
+        </p:nvSpPr>
+        <p:spPr/>
+        <p:txBody>
+          <a:bodyPr/>
+          <a:lstStyle/>
+          <a:p>
+            <a:r>
+              <a:t>It also works without touching. The speakers play two tones too high for people to hear, and the mic listens to how your hand changes them. Raise or lower your hand to change the volume. It is early, and it needs the Mac's own speakers.</a:t>
+            </a:r>
+          </a:p>
+        </p:txBody>
+      </p:sp>
+      <p:sp>
+        <p:nvSpPr>
+          <p:cNvPr id="4" name="Slide Number Placeholder 3"/>
+          <p:cNvSpPr>
+            <a:spLocks noGrp="1"/>
+          </p:cNvSpPr>
+          <p:nvPr>
+            <p:ph type="sldNum" idx="5" sz="quarter"/>
+          </p:nvPr>
+        </p:nvSpPr>
+        <p:spPr/>
+      </p:sp>
+    </p:spTree>
+  </p:cSld>
+  <p:clrMapOvr>
+    <a:masterClrMapping/>
+  </p:clrMapOvr>
+</p:notes>
+</file>
+
+<file path=ppt/notesSlides/notesSlide5.xml><?xml version="1.0" encoding="utf-8"?>
+<p:notes xmlns:a="http://schemas.openxmlformats.org/drawingml/2006/main" xmlns:p="http://schemas.openxmlformats.org/presentationml/2006/main" xmlns:r="http://schemas.openxmlformats.org/officeDocument/2006/relationships">
+  <p:cSld>
+    <p:spTree>
+      <p:nvGrpSpPr>
+        <p:cNvPr id="1" name=""/>
+        <p:cNvGrpSpPr/>
+        <p:nvPr/>
+      </p:nvGrpSpPr>
+      <p:grpSpPr>
+        <a:xfrm>
+          <a:off x="0" y="0"/>
+          <a:ext cx="0" cy="0"/>
+          <a:chOff x="0" y="0"/>
+          <a:chExt cx="0" cy="0"/>
+        </a:xfrm>
+      </p:grpSpPr>
+      <p:sp>
+        <p:nvSpPr>
+          <p:cNvPr id="2" name="Slide Image Placeholder 1"/>
+          <p:cNvSpPr>
+            <a:spLocks noGrp="1"/>
+          </p:cNvSpPr>
+          <p:nvPr>
+            <p:ph type="sldImg" idx="2"/>
+          </p:nvPr>
+        </p:nvSpPr>
+        <p:spPr/>
+      </p:sp>
+      <p:sp>
+        <p:nvSpPr>
+          <p:cNvPr id="3" name="Notes Placeholder 2"/>
+          <p:cNvSpPr>
+            <a:spLocks noGrp="1"/>
+          </p:cNvSpPr>
+          <p:nvPr>
+            <p:ph type="body" idx="3" sz="quarter"/>
+          </p:nvPr>
+        </p:nvSpPr>
+        <p:spPr/>
+        <p:txBody>
+          <a:bodyPr/>
+          <a:lstStyle/>
+          <a:p>
+            <a:r>
+              <a:t>If you have a camera, you can pinch in the air in front of the screen, like turning a dial. It is optional and off by default, and the video never leaves the Mac.</a:t>
+            </a:r>
+          </a:p>
+        </p:txBody>
+      </p:sp>
+      <p:sp>
+        <p:nvSpPr>
+          <p:cNvPr id="4" name="Slide Number Placeholder 3"/>
+          <p:cNvSpPr>
+            <a:spLocks noGrp="1"/>
+          </p:cNvSpPr>
+          <p:nvPr>
+            <p:ph type="sldNum" idx="5" sz="quarter"/>
+          </p:nvPr>
+        </p:nvSpPr>
+        <p:spPr/>
+      </p:sp>
+    </p:spTree>
+  </p:cSld>
+  <p:clrMapOvr>
+    <a:masterClrMapping/>
+  </p:clrMapOvr>
+</p:notes>
+</file>
+
+<file path=ppt/notesSlides/notesSlide6.xml><?xml version="1.0" encoding="utf-8"?>
+<p:notes xmlns:a="http://schemas.openxmlformats.org/drawingml/2006/main" xmlns:p="http://schemas.openxmlformats.org/presentationml/2006/main" xmlns:r="http://schemas.openxmlformats.org/officeDocument/2006/relationships">
+  <p:cSld>
+    <p:spTree>
+      <p:nvGrpSpPr>
+        <p:cNvPr id="1" name=""/>
+        <p:cNvGrpSpPr/>
+        <p:nvPr/>
+      </p:nvGrpSpPr>
+      <p:grpSpPr>
+        <a:xfrm>
+          <a:off x="0" y="0"/>
+          <a:ext cx="0" cy="0"/>
+          <a:chOff x="0" y="0"/>
+          <a:chExt cx="0" cy="0"/>
+        </a:xfrm>
+      </p:grpSpPr>
+      <p:sp>
+        <p:nvSpPr>
+          <p:cNvPr id="2" name="Slide Image Placeholder 1"/>
+          <p:cNvSpPr>
+            <a:spLocks noGrp="1"/>
+          </p:cNvSpPr>
+          <p:nvPr>
+            <p:ph type="sldImg" idx="2"/>
+          </p:nvPr>
+        </p:nvSpPr>
+        <p:spPr/>
+      </p:sp>
+      <p:sp>
+        <p:nvSpPr>
+          <p:cNvPr id="3" name="Notes Placeholder 2"/>
+          <p:cNvSpPr>
+            <a:spLocks noGrp="1"/>
+          </p:cNvSpPr>
+          <p:nvPr>
+            <p:ph type="body" idx="3" sz="quarter"/>
+          </p:nvPr>
+        </p:nvSpPr>
+        <p:spPr/>
+        <p:txBody>
+          <a:bodyPr/>
+          <a:lstStyle/>
+          <a:p>
+            <a:r>
+              <a:t>We measured it on our own recordings, and someone who did not write the code re-checked every number. Wrong taps went from 16.5 percent to 1.4. Picking up the laptop used to set off about two false taps a minute, now none. And after calibrating on your lap, it catches 84 percent of lap taps, up from zero.</a:t>
+            </a:r>
+          </a:p>
+        </p:txBody>
+      </p:sp>
+      <p:sp>
+        <p:nvSpPr>
+          <p:cNvPr id="4" name="Slide Number Placeholder 3"/>
+          <p:cNvSpPr>
+            <a:spLocks noGrp="1"/>
+          </p:cNvSpPr>
+          <p:nvPr>
+            <p:ph type="sldNum" idx="5" sz="quarter"/>
+          </p:nvPr>
+        </p:nvSpPr>
+        <p:spPr/>
+      </p:sp>
+    </p:spTree>
+  </p:cSld>
+  <p:clrMapOvr>
+    <a:masterClrMapping/>
+  </p:clrMapOvr>
+</p:notes>
+</file>
+
+<file path=ppt/notesSlides/notesSlide7.xml><?xml version="1.0" encoding="utf-8"?>
+<p:notes xmlns:a="http://schemas.openxmlformats.org/drawingml/2006/main" xmlns:p="http://schemas.openxmlformats.org/presentationml/2006/main" xmlns:r="http://schemas.openxmlformats.org/officeDocument/2006/relationships">
+  <p:cSld>
+    <p:spTree>
+      <p:nvGrpSpPr>
+        <p:cNvPr id="1" name=""/>
+        <p:cNvGrpSpPr/>
+        <p:nvPr/>
+      </p:nvGrpSpPr>
+      <p:grpSpPr>
+        <a:xfrm>
+          <a:off x="0" y="0"/>
+          <a:ext cx="0" cy="0"/>
+          <a:chOff x="0" y="0"/>
+          <a:chExt cx="0" cy="0"/>
+        </a:xfrm>
+      </p:grpSpPr>
+      <p:sp>
+        <p:nvSpPr>
+          <p:cNvPr id="2" name="Slide Image Placeholder 1"/>
+          <p:cNvSpPr>
+            <a:spLocks noGrp="1"/>
+          </p:cNvSpPr>
+          <p:nvPr>
+            <p:ph type="sldImg" idx="2"/>
+          </p:nvPr>
+        </p:nvSpPr>
+        <p:spPr/>
+      </p:sp>
+      <p:sp>
+        <p:nvSpPr>
+          <p:cNvPr id="3" name="Notes Placeholder 2"/>
+          <p:cNvSpPr>
+            <a:spLocks noGrp="1"/>
+          </p:cNvSpPr>
+          <p:nvPr>
+            <p:ph type="body" idx="3" sz="quarter"/>
+          </p:nvPr>
+        </p:nvSpPr>
+        <p:spPr/>
+        <p:txBody>
+          <a:bodyPr/>
+          <a:lstStyle/>
+          <a:p>
+            <a:r>
+              <a:t>The business is simple. Free gets you two palm buttons. Pro is 29 dollars once for everything. Teams is 49 dollars per seat per year. There is nothing to buy, because every Apple silicon MacBook already has the sensor. It is free while we are in beta.</a:t>
+            </a:r>
+          </a:p>
+        </p:txBody>
+      </p:sp>
+      <p:sp>
+        <p:nvSpPr>
+          <p:cNvPr id="4" name="Slide Number Placeholder 3"/>
+          <p:cNvSpPr>
+            <a:spLocks noGrp="1"/>
+          </p:cNvSpPr>
+          <p:nvPr>
+            <p:ph type="sldNum" idx="5" sz="quarter"/>
+          </p:nvPr>
+        </p:nvSpPr>
+        <p:spPr/>
+      </p:sp>
+    </p:spTree>
+  </p:cSld>
+  <p:clrMapOvr>
+    <a:masterClrMapping/>
+  </p:clrMapOvr>
+</p:notes>
+</file>
+
+<file path=ppt/notesSlides/notesSlide8.xml><?xml version="1.0" encoding="utf-8"?>
+<p:notes xmlns:a="http://schemas.openxmlformats.org/drawingml/2006/main" xmlns:p="http://schemas.openxmlformats.org/presentationml/2006/main" xmlns:r="http://schemas.openxmlformats.org/officeDocument/2006/relationships">
+  <p:cSld>
+    <p:spTree>
+      <p:nvGrpSpPr>
+        <p:cNvPr id="1" name=""/>
+        <p:cNvGrpSpPr/>
+        <p:nvPr/>
+      </p:nvGrpSpPr>
+      <p:grpSpPr>
+        <a:xfrm>
+          <a:off x="0" y="0"/>
+          <a:ext cx="0" cy="0"/>
+          <a:chOff x="0" y="0"/>
+          <a:chExt cx="0" cy="0"/>
+        </a:xfrm>
+      </p:grpSpPr>
+      <p:sp>
+        <p:nvSpPr>
+          <p:cNvPr id="2" name="Slide Image Placeholder 1"/>
+          <p:cNvSpPr>
+            <a:spLocks noGrp="1"/>
+          </p:cNvSpPr>
+          <p:nvPr>
+            <p:ph type="sldImg" idx="2"/>
+          </p:nvPr>
+        </p:nvSpPr>
+        <p:spPr/>
+      </p:sp>
+      <p:sp>
+        <p:nvSpPr>
+          <p:cNvPr id="3" name="Notes Placeholder 2"/>
+          <p:cNvSpPr>
+            <a:spLocks noGrp="1"/>
+          </p:cNvSpPr>
+          <p:nvPr>
+            <p:ph type="body" idx="3" sz="quarter"/>
+          </p:nvPr>
+        </p:nvSpPr>
+        <p:spPr/>
+        <p:txBody>
+          <a:bodyPr/>
+          <a:lstStyle/>
+          <a:p>
+            <a:r>
+              <a:t>It is live now. Try it on the laptop in front of you. Thank you.</a:t>
+            </a:r>
+          </a:p>
+        </p:txBody>
+      </p:sp>
+      <p:sp>
+        <p:nvSpPr>
+          <p:cNvPr id="4" name="Slide Number Placeholder 3"/>
+          <p:cNvSpPr>
+            <a:spLocks noGrp="1"/>
+          </p:cNvSpPr>
+          <p:nvPr>
+            <p:ph type="sldNum" idx="5" sz="quarter"/>
+          </p:nvPr>
+        </p:nvSpPr>
+        <p:spPr/>
+      </p:sp>
+    </p:spTree>
+  </p:cSld>
+  <p:clrMapOvr>
+    <a:masterClrMapping/>
+  </p:clrMapOvr>
+</p:notes>
 </file>
 
 <file path=ppt/slideLayouts/slideLayout1.xml><?xml version="1.0" encoding="utf-8"?>
@@ -14952,7 +15862,7 @@
                 </a:solidFill>
                 <a:latin typeface="Switzer Extralight"/>
               </a:rPr>
-              <a:t>Nothing to buy. Pay once.</a:t>
+              <a:t>Free to try. Pay once to unlock everything.</a:t>
             </a:r>
           </a:p>
         </p:txBody>
@@ -15995,4 +16905,324 @@
   </a:objectDefaults>
   <a:extraClrSchemeLst/>
 </a:theme>
+</file>
+
+<file path=ppt/theme/theme2.xml><?xml version="1.0" encoding="utf-8"?>
+<a:theme xmlns:a="http://schemas.openxmlformats.org/drawingml/2006/main" name="Office Theme">
+  <a:themeElements>
+    <a:clrScheme name="Office">
+      <a:dk1>
+        <a:sysClr val="windowText" lastClr="000000"/>
+      </a:dk1>
+      <a:lt1>
+        <a:sysClr val="window" lastClr="FFFFFF"/>
+      </a:lt1>
+      <a:dk2>
+        <a:srgbClr val="1F497D"/>
+      </a:dk2>
+      <a:lt2>
+        <a:srgbClr val="EEECE1"/>
+      </a:lt2>
+      <a:accent1>
+        <a:srgbClr val="4F81BD"/>
+      </a:accent1>
+      <a:accent2>
+        <a:srgbClr val="C0504D"/>
+      </a:accent2>
+      <a:accent3>
+        <a:srgbClr val="9BBB59"/>
+      </a:accent3>
+      <a:accent4>
+        <a:srgbClr val="8064A2"/>
+      </a:accent4>
+      <a:accent5>
+        <a:srgbClr val="4BACC6"/>
+      </a:accent5>
+      <a:accent6>
+        <a:srgbClr val="F79646"/>
+      </a:accent6>
+      <a:hlink>
+        <a:srgbClr val="0000FF"/>
+      </a:hlink>
+      <a:folHlink>
+        <a:srgbClr val="800080"/>
+      </a:folHlink>
+    </a:clrScheme>
+    <a:fontScheme name="Office">
+      <a:majorFont>
+        <a:latin typeface="Calibri"/>
+        <a:ea typeface=""/>
+        <a:cs typeface=""/>
+        <a:font script="Jpan" typeface="ＭＳ Ｐゴシック"/>
+        <a:font script="Hang" typeface="맑은 고딕"/>
+        <a:font script="Hans" typeface="宋体"/>
+        <a:font script="Hant" typeface="新細明體"/>
+        <a:font script="Arab" typeface="Times New Roman"/>
+        <a:font script="Hebr" typeface="Times New Roman"/>
+        <a:font script="Thai" typeface="Angsana New"/>
+        <a:font script="Ethi" typeface="Nyala"/>
+        <a:font script="Beng" typeface="Vrinda"/>
+        <a:font script="Gujr" typeface="Shruti"/>
+        <a:font script="Khmr" typeface="MoolBoran"/>
+        <a:font script="Knda" typeface="Tunga"/>
+        <a:font script="Guru" typeface="Raavi"/>
+        <a:font script="Cans" typeface="Euphemia"/>
+        <a:font script="Cher" typeface="Plantagenet Cherokee"/>
+        <a:font script="Yiii" typeface="Microsoft Yi Baiti"/>
+        <a:font script="Tibt" typeface="Microsoft Himalaya"/>
+        <a:font script="Thaa" typeface="MV Boli"/>
+        <a:font script="Deva" typeface="Mangal"/>
+        <a:font script="Telu" typeface="Gautami"/>
+        <a:font script="Taml" typeface="Latha"/>
+        <a:font script="Syrc" typeface="Estrangelo Edessa"/>
+        <a:font script="Orya" typeface="Kalinga"/>
+        <a:font script="Mlym" typeface="Kartika"/>
+        <a:font script="Laoo" typeface="DokChampa"/>
+        <a:font script="Sinh" typeface="Iskoola Pota"/>
+        <a:font script="Mong" typeface="Mongolian Baiti"/>
+        <a:font script="Viet" typeface="Times New Roman"/>
+        <a:font script="Uigh" typeface="Microsoft Uighur"/>
+        <a:font script="Geor" typeface="Sylfaen"/>
+      </a:majorFont>
+      <a:minorFont>
+        <a:latin typeface="Calibri"/>
+        <a:ea typeface=""/>
+        <a:cs typeface=""/>
+        <a:font script="Jpan" typeface="ＭＳ Ｐゴシック"/>
+        <a:font script="Hang" typeface="맑은 고딕"/>
+        <a:font script="Hans" typeface="宋体"/>
+        <a:font script="Hant" typeface="新細明體"/>
+        <a:font script="Arab" typeface="Arial"/>
+        <a:font script="Hebr" typeface="Arial"/>
+        <a:font script="Thai" typeface="Cordia New"/>
+        <a:font script="Ethi" typeface="Nyala"/>
+        <a:font script="Beng" typeface="Vrinda"/>
+        <a:font script="Gujr" typeface="Shruti"/>
+        <a:font script="Khmr" typeface="DaunPenh"/>
+        <a:font script="Knda" typeface="Tunga"/>
+        <a:font script="Guru" typeface="Raavi"/>
+        <a:font script="Cans" typeface="Euphemia"/>
+        <a:font script="Cher" typeface="Plantagenet Cherokee"/>
+        <a:font script="Yiii" typeface="Microsoft Yi Baiti"/>
+        <a:font script="Tibt" typeface="Microsoft Himalaya"/>
+        <a:font script="Thaa" typeface="MV Boli"/>
+        <a:font script="Deva" typeface="Mangal"/>
+        <a:font script="Telu" typeface="Gautami"/>
+        <a:font script="Taml" typeface="Latha"/>
+        <a:font script="Syrc" typeface="Estrangelo Edessa"/>
+        <a:font script="Orya" typeface="Kalinga"/>
+        <a:font script="Mlym" typeface="Kartika"/>
+        <a:font script="Laoo" typeface="DokChampa"/>
+        <a:font script="Sinh" typeface="Iskoola Pota"/>
+        <a:font script="Mong" typeface="Mongolian Baiti"/>
+        <a:font script="Viet" typeface="Arial"/>
+        <a:font script="Uigh" typeface="Microsoft Uighur"/>
+        <a:font script="Geor" typeface="Sylfaen"/>
+      </a:minorFont>
+    </a:fontScheme>
+    <a:fmtScheme name="Office">
+      <a:fillStyleLst>
+        <a:solidFill>
+          <a:schemeClr val="phClr"/>
+        </a:solidFill>
+        <a:gradFill rotWithShape="1">
+          <a:gsLst>
+            <a:gs pos="0">
+              <a:schemeClr val="phClr">
+                <a:tint val="50000"/>
+                <a:satMod val="300000"/>
+              </a:schemeClr>
+            </a:gs>
+            <a:gs pos="35000">
+              <a:schemeClr val="phClr">
+                <a:tint val="37000"/>
+                <a:satMod val="300000"/>
+              </a:schemeClr>
+            </a:gs>
+            <a:gs pos="100000">
+              <a:schemeClr val="phClr">
+                <a:tint val="15000"/>
+                <a:satMod val="350000"/>
+              </a:schemeClr>
+            </a:gs>
+          </a:gsLst>
+          <a:lin ang="16200000" scaled="1"/>
+        </a:gradFill>
+        <a:gradFill rotWithShape="1">
+          <a:gsLst>
+            <a:gs pos="0">
+              <a:schemeClr val="phClr">
+                <a:tint val="100000"/>
+                <a:shade val="100000"/>
+                <a:satMod val="130000"/>
+              </a:schemeClr>
+            </a:gs>
+            <a:gs pos="100000">
+              <a:schemeClr val="phClr">
+                <a:tint val="50000"/>
+                <a:shade val="100000"/>
+                <a:satMod val="350000"/>
+              </a:schemeClr>
+            </a:gs>
+          </a:gsLst>
+          <a:lin ang="16200000" scaled="0"/>
+        </a:gradFill>
+      </a:fillStyleLst>
+      <a:lnStyleLst>
+        <a:ln w="9525" cap="flat" cmpd="sng" algn="ctr">
+          <a:solidFill>
+            <a:schemeClr val="phClr">
+              <a:shade val="95000"/>
+              <a:satMod val="105000"/>
+            </a:schemeClr>
+          </a:solidFill>
+          <a:prstDash val="solid"/>
+        </a:ln>
+        <a:ln w="25400" cap="flat" cmpd="sng" algn="ctr">
+          <a:solidFill>
+            <a:schemeClr val="phClr"/>
+          </a:solidFill>
+          <a:prstDash val="solid"/>
+        </a:ln>
+        <a:ln w="38100" cap="flat" cmpd="sng" algn="ctr">
+          <a:solidFill>
+            <a:schemeClr val="phClr"/>
+          </a:solidFill>
+          <a:prstDash val="solid"/>
+        </a:ln>
+      </a:lnStyleLst>
+      <a:effectStyleLst>
+        <a:effectStyle>
+          <a:effectLst>
+            <a:outerShdw blurRad="40000" dist="20000" dir="5400000" rotWithShape="0">
+              <a:srgbClr val="000000">
+                <a:alpha val="38000"/>
+              </a:srgbClr>
+            </a:outerShdw>
+          </a:effectLst>
+        </a:effectStyle>
+        <a:effectStyle>
+          <a:effectLst>
+            <a:outerShdw blurRad="40000" dist="23000" dir="5400000" rotWithShape="0">
+              <a:srgbClr val="000000">
+                <a:alpha val="35000"/>
+              </a:srgbClr>
+            </a:outerShdw>
+          </a:effectLst>
+        </a:effectStyle>
+        <a:effectStyle>
+          <a:effectLst>
+            <a:outerShdw blurRad="40000" dist="23000" dir="5400000" rotWithShape="0">
+              <a:srgbClr val="000000">
+                <a:alpha val="35000"/>
+              </a:srgbClr>
+            </a:outerShdw>
+          </a:effectLst>
+          <a:scene3d>
+            <a:camera prst="orthographicFront">
+              <a:rot lat="0" lon="0" rev="0"/>
+            </a:camera>
+            <a:lightRig rig="threePt" dir="t">
+              <a:rot lat="0" lon="0" rev="1200000"/>
+            </a:lightRig>
+          </a:scene3d>
+          <a:sp3d>
+            <a:bevelT w="63500" h="25400"/>
+          </a:sp3d>
+        </a:effectStyle>
+      </a:effectStyleLst>
+      <a:bgFillStyleLst>
+        <a:solidFill>
+          <a:schemeClr val="phClr"/>
+        </a:solidFill>
+        <a:gradFill rotWithShape="1">
+          <a:gsLst>
+            <a:gs pos="0">
+              <a:schemeClr val="phClr">
+                <a:tint val="40000"/>
+                <a:satMod val="350000"/>
+              </a:schemeClr>
+            </a:gs>
+            <a:gs pos="40000">
+              <a:schemeClr val="phClr">
+                <a:tint val="45000"/>
+                <a:shade val="99000"/>
+                <a:satMod val="350000"/>
+              </a:schemeClr>
+            </a:gs>
+            <a:gs pos="100000">
+              <a:schemeClr val="phClr">
+                <a:shade val="20000"/>
+                <a:satMod val="255000"/>
+              </a:schemeClr>
+            </a:gs>
+          </a:gsLst>
+          <a:path path="circle">
+            <a:fillToRect l="50000" t="-80000" r="50000" b="180000"/>
+          </a:path>
+        </a:gradFill>
+        <a:gradFill rotWithShape="1">
+          <a:gsLst>
+            <a:gs pos="0">
+              <a:schemeClr val="phClr">
+                <a:tint val="80000"/>
+                <a:satMod val="300000"/>
+              </a:schemeClr>
+            </a:gs>
+            <a:gs pos="100000">
+              <a:schemeClr val="phClr">
+                <a:shade val="30000"/>
+                <a:satMod val="200000"/>
+              </a:schemeClr>
+            </a:gs>
+          </a:gsLst>
+          <a:path path="circle">
+            <a:fillToRect l="50000" t="50000" r="50000" b="50000"/>
+          </a:path>
+        </a:gradFill>
+      </a:bgFillStyleLst>
+    </a:fmtScheme>
+  </a:themeElements>
+  <a:objectDefaults>
+    <a:spDef>
+      <a:spPr/>
+      <a:bodyPr/>
+      <a:lstStyle/>
+      <a:style>
+        <a:lnRef idx="1">
+          <a:schemeClr val="accent1"/>
+        </a:lnRef>
+        <a:fillRef idx="3">
+          <a:schemeClr val="accent1"/>
+        </a:fillRef>
+        <a:effectRef idx="2">
+          <a:schemeClr val="accent1"/>
+        </a:effectRef>
+        <a:fontRef idx="minor">
+          <a:schemeClr val="lt1"/>
+        </a:fontRef>
+      </a:style>
+    </a:spDef>
+    <a:lnDef>
+      <a:spPr/>
+      <a:bodyPr/>
+      <a:lstStyle/>
+      <a:style>
+        <a:lnRef idx="2">
+          <a:schemeClr val="accent1"/>
+        </a:lnRef>
+        <a:fillRef idx="0">
+          <a:schemeClr val="accent1"/>
+        </a:fillRef>
+        <a:effectRef idx="1">
+          <a:schemeClr val="accent1"/>
+        </a:effectRef>
+        <a:fontRef idx="minor">
+          <a:schemeClr val="tx1"/>
+        </a:fontRef>
+      </a:style>
+    </a:lnDef>
+  </a:objectDefaults>
+  <a:extraClrSchemeLst/>
+</a:theme>
 </file>
--- a/docs/pitch/Ghostkeys-pitch.pptx
+++ b/docs/pitch/Ghostkeys-pitch.pptx
@@ -13,6 +13,7 @@
     <p:sldId id="261" r:id="rId12"/>
     <p:sldId id="262" r:id="rId13"/>
     <p:sldId id="263" r:id="rId14"/>
+    <p:sldId id="264" r:id="rId15"/>
   </p:sldIdLst>
   <p:sldSz cx="12191695" cy="6858000" type="screen4x3"/>
   <p:notesSz cx="6858000" cy="9144000"/>
@@ -649,7 +650,7 @@
           <a:lstStyle/>
           <a:p>
             <a:r>
-              <a:t>The hard part: every Apple silicon MacBook has a motion sensor inside that reads 800 times a second, and a tap barely shows up on it. Typing looks almost the same, as you can see. So every bump goes through four checks: did something hit, were you typing or on the trackpad, which spot was it, and are we sure. If we are not sure, we do nothing. A missed tap costs a second try. A wrong action costs trust.</a:t>
+              <a:t>The hard part: every Apple silicon MacBook has a motion sensor inside that reads 800 times a second. A tap barely shows up, and typing looks almost the same, as you can see here. So every bump goes through four checks. One: did something actually hit, above the normal shake of the laptop. Two: were you typing or using the trackpad at that moment; if so, ignore it. Three: which spot was it; we take 33 measurements of the bump, like how strong, how long and which direction, and two small models compare it with the taps you gave during setup. Four: are we sure; if it does not look like your taps, we do nothing. A missed tap costs a second try. A wrong action costs trust. It also keeps separate models for desk and lap, because a laptop on your lap wobbles differently.</a:t>
             </a:r>
           </a:p>
         </p:txBody>
@@ -929,7 +930,7 @@
           <a:lstStyle/>
           <a:p>
             <a:r>
-              <a:t>The business is simple. Free gets you two palm buttons. Pro is 29 dollars once for everything. Teams is 49 dollars per seat per year. There is nothing to buy, because every Apple silicon MacBook already has the sensor. It is free while we are in beta.</a:t>
+              <a:t>Who is it for? Anyone who lives on a MacBook and repeats the same few actions all day. Spreadsheet people running macros, designers who want undo without leaving the canvas, developers building and switching windows, and anyone on calls who wants mute on a spot they can find without looking.</a:t>
             </a:r>
           </a:p>
         </p:txBody>
@@ -955,6 +956,76 @@
 </file>
 
 <file path=ppt/notesSlides/notesSlide8.xml><?xml version="1.0" encoding="utf-8"?>
+<p:notes xmlns:a="http://schemas.openxmlformats.org/drawingml/2006/main" xmlns:p="http://schemas.openxmlformats.org/presentationml/2006/main" xmlns:r="http://schemas.openxmlformats.org/officeDocument/2006/relationships">
+  <p:cSld>
+    <p:spTree>
+      <p:nvGrpSpPr>
+        <p:cNvPr id="1" name=""/>
+        <p:cNvGrpSpPr/>
+        <p:nvPr/>
+      </p:nvGrpSpPr>
+      <p:grpSpPr>
+        <a:xfrm>
+          <a:off x="0" y="0"/>
+          <a:ext cx="0" cy="0"/>
+          <a:chOff x="0" y="0"/>
+          <a:chExt cx="0" cy="0"/>
+        </a:xfrm>
+      </p:grpSpPr>
+      <p:sp>
+        <p:nvSpPr>
+          <p:cNvPr id="2" name="Slide Image Placeholder 1"/>
+          <p:cNvSpPr>
+            <a:spLocks noGrp="1"/>
+          </p:cNvSpPr>
+          <p:nvPr>
+            <p:ph type="sldImg" idx="2"/>
+          </p:nvPr>
+        </p:nvSpPr>
+        <p:spPr/>
+      </p:sp>
+      <p:sp>
+        <p:nvSpPr>
+          <p:cNvPr id="3" name="Notes Placeholder 2"/>
+          <p:cNvSpPr>
+            <a:spLocks noGrp="1"/>
+          </p:cNvSpPr>
+          <p:nvPr>
+            <p:ph type="body" idx="3" sz="quarter"/>
+          </p:nvPr>
+        </p:nvSpPr>
+        <p:spPr/>
+        <p:txBody>
+          <a:bodyPr/>
+          <a:lstStyle/>
+          <a:p>
+            <a:r>
+              <a:t>The business is simple. Free gets you two palm buttons. Pro is 29 dollars once for everything. Teams is 49 dollars per seat per year. There is nothing to buy, because every Apple silicon MacBook already has the sensor. It is free while we are in beta.</a:t>
+            </a:r>
+          </a:p>
+        </p:txBody>
+      </p:sp>
+      <p:sp>
+        <p:nvSpPr>
+          <p:cNvPr id="4" name="Slide Number Placeholder 3"/>
+          <p:cNvSpPr>
+            <a:spLocks noGrp="1"/>
+          </p:cNvSpPr>
+          <p:nvPr>
+            <p:ph type="sldNum" idx="5" sz="quarter"/>
+          </p:nvPr>
+        </p:nvSpPr>
+        <p:spPr/>
+      </p:sp>
+    </p:spTree>
+  </p:cSld>
+  <p:clrMapOvr>
+    <a:masterClrMapping/>
+  </p:clrMapOvr>
+</p:notes>
+</file>
+
+<file path=ppt/notesSlides/notesSlide9.xml><?xml version="1.0" encoding="utf-8"?>
 <p:notes xmlns:a="http://schemas.openxmlformats.org/drawingml/2006/main" xmlns:p="http://schemas.openxmlformats.org/presentationml/2006/main" xmlns:r="http://schemas.openxmlformats.org/officeDocument/2006/relationships">
   <p:cSld>
     <p:spTree>
@@ -8772,7 +8843,7 @@
         </p:nvCxnSpPr>
         <p:spPr>
           <a:xfrm>
-            <a:off x="822960" y="2926080"/>
+            <a:off x="822960" y="2651760"/>
             <a:ext cx="10545775" cy="0"/>
           </a:xfrm>
           <a:prstGeom prst="line">
@@ -8807,8 +8878,8 @@
         </p:nvSpPr>
         <p:spPr>
           <a:xfrm>
-            <a:off x="831523" y="1783080"/>
-            <a:ext cx="10537212" cy="1137732"/>
+            <a:off x="831523" y="1645920"/>
+            <a:ext cx="10537212" cy="1001204"/>
           </a:xfrm>
           <a:custGeom>
             <a:avLst/>
@@ -8817,1806 +8888,1806 @@
             <a:cxnLst/>
             <a:rect l="l" t="t" r="r" b="b"/>
             <a:pathLst>
-              <a:path w="10537212" h="1137732">
+              <a:path w="10537212" h="1001204">
                 <a:moveTo>
-                  <a:pt x="0" y="175242"/>
+                  <a:pt x="0" y="154213"/>
                 </a:moveTo>
                 <a:lnTo>
-                  <a:pt x="19887" y="230658"/>
-                </a:lnTo>
-                <a:lnTo>
-                  <a:pt x="39756" y="564782"/>
-                </a:lnTo>
-                <a:lnTo>
-                  <a:pt x="59643" y="854332"/>
-                </a:lnTo>
-                <a:lnTo>
-                  <a:pt x="79513" y="555556"/>
-                </a:lnTo>
-                <a:lnTo>
-                  <a:pt x="99402" y="401905"/>
-                </a:lnTo>
-                <a:lnTo>
-                  <a:pt x="119270" y="390618"/>
-                </a:lnTo>
-                <a:lnTo>
-                  <a:pt x="139157" y="446753"/>
-                </a:lnTo>
-                <a:lnTo>
-                  <a:pt x="159026" y="623770"/>
-                </a:lnTo>
-                <a:lnTo>
-                  <a:pt x="178914" y="850029"/>
-                </a:lnTo>
-                <a:lnTo>
-                  <a:pt x="198784" y="873695"/>
-                </a:lnTo>
-                <a:lnTo>
-                  <a:pt x="218671" y="745028"/>
-                </a:lnTo>
-                <a:lnTo>
-                  <a:pt x="238540" y="711869"/>
-                </a:lnTo>
-                <a:lnTo>
-                  <a:pt x="258429" y="718908"/>
-                </a:lnTo>
-                <a:lnTo>
-                  <a:pt x="278298" y="795616"/>
-                </a:lnTo>
-                <a:lnTo>
-                  <a:pt x="298187" y="911472"/>
-                </a:lnTo>
-                <a:lnTo>
-                  <a:pt x="318056" y="1013731"/>
-                </a:lnTo>
-                <a:lnTo>
-                  <a:pt x="337942" y="1086021"/>
-                </a:lnTo>
-                <a:lnTo>
-                  <a:pt x="357811" y="1123893"/>
-                </a:lnTo>
-                <a:lnTo>
-                  <a:pt x="377699" y="1103568"/>
-                </a:lnTo>
-                <a:lnTo>
-                  <a:pt x="397568" y="1092865"/>
-                </a:lnTo>
-                <a:lnTo>
-                  <a:pt x="417456" y="1072288"/>
-                </a:lnTo>
-                <a:lnTo>
-                  <a:pt x="437326" y="1047769"/>
-                </a:lnTo>
-                <a:lnTo>
-                  <a:pt x="457213" y="1010024"/>
-                </a:lnTo>
-                <a:lnTo>
-                  <a:pt x="477081" y="966402"/>
-                </a:lnTo>
-                <a:lnTo>
-                  <a:pt x="496970" y="946173"/>
-                </a:lnTo>
-                <a:lnTo>
-                  <a:pt x="516840" y="947479"/>
-                </a:lnTo>
-                <a:lnTo>
-                  <a:pt x="536726" y="983866"/>
-                </a:lnTo>
-                <a:lnTo>
-                  <a:pt x="556595" y="1052111"/>
-                </a:lnTo>
-                <a:lnTo>
-                  <a:pt x="576482" y="1070930"/>
-                </a:lnTo>
-                <a:lnTo>
-                  <a:pt x="596352" y="1010939"/>
-                </a:lnTo>
-                <a:lnTo>
-                  <a:pt x="616240" y="988255"/>
-                </a:lnTo>
-                <a:lnTo>
-                  <a:pt x="636109" y="987614"/>
-                </a:lnTo>
-                <a:lnTo>
-                  <a:pt x="655998" y="1001941"/>
-                </a:lnTo>
-                <a:lnTo>
-                  <a:pt x="675866" y="1046025"/>
-                </a:lnTo>
-                <a:lnTo>
-                  <a:pt x="695754" y="1101128"/>
-                </a:lnTo>
-                <a:lnTo>
-                  <a:pt x="715623" y="1130175"/>
-                </a:lnTo>
-                <a:lnTo>
-                  <a:pt x="735511" y="1113981"/>
-                </a:lnTo>
-                <a:lnTo>
-                  <a:pt x="755378" y="1105028"/>
-                </a:lnTo>
-                <a:lnTo>
-                  <a:pt x="775267" y="1096122"/>
-                </a:lnTo>
-                <a:lnTo>
-                  <a:pt x="795138" y="1094490"/>
-                </a:lnTo>
-                <a:lnTo>
-                  <a:pt x="815025" y="1096837"/>
-                </a:lnTo>
-                <a:lnTo>
-                  <a:pt x="834893" y="1103550"/>
-                </a:lnTo>
-                <a:lnTo>
-                  <a:pt x="854781" y="1093776"/>
-                </a:lnTo>
-                <a:lnTo>
-                  <a:pt x="874650" y="1050003"/>
-                </a:lnTo>
-                <a:lnTo>
-                  <a:pt x="894538" y="856480"/>
-                </a:lnTo>
-                <a:lnTo>
-                  <a:pt x="914407" y="671937"/>
-                </a:lnTo>
-                <a:lnTo>
-                  <a:pt x="934294" y="652894"/>
-                </a:lnTo>
-                <a:lnTo>
-                  <a:pt x="954164" y="893556"/>
-                </a:lnTo>
-                <a:lnTo>
-                  <a:pt x="974051" y="629771"/>
-                </a:lnTo>
-                <a:lnTo>
-                  <a:pt x="993920" y="283445"/>
-                </a:lnTo>
-                <a:lnTo>
-                  <a:pt x="1013811" y="248968"/>
-                </a:lnTo>
-                <a:lnTo>
-                  <a:pt x="1033678" y="327858"/>
-                </a:lnTo>
-                <a:lnTo>
-                  <a:pt x="1053567" y="641033"/>
-                </a:lnTo>
-                <a:lnTo>
-                  <a:pt x="1073435" y="705722"/>
-                </a:lnTo>
-                <a:lnTo>
-                  <a:pt x="1093323" y="406584"/>
-                </a:lnTo>
-                <a:lnTo>
-                  <a:pt x="1113191" y="327906"/>
-                </a:lnTo>
-                <a:lnTo>
-                  <a:pt x="1133081" y="333095"/>
-                </a:lnTo>
-                <a:lnTo>
-                  <a:pt x="1152949" y="473564"/>
-                </a:lnTo>
-                <a:lnTo>
-                  <a:pt x="1172837" y="764517"/>
-                </a:lnTo>
-                <a:lnTo>
-                  <a:pt x="1192704" y="890977"/>
-                </a:lnTo>
-                <a:lnTo>
-                  <a:pt x="1212594" y="730107"/>
-                </a:lnTo>
-                <a:lnTo>
-                  <a:pt x="1232462" y="705758"/>
-                </a:lnTo>
-                <a:lnTo>
-                  <a:pt x="1252351" y="731211"/>
-                </a:lnTo>
-                <a:lnTo>
-                  <a:pt x="1272219" y="848984"/>
-                </a:lnTo>
-                <a:lnTo>
-                  <a:pt x="1292108" y="1003143"/>
-                </a:lnTo>
-                <a:lnTo>
-                  <a:pt x="1311976" y="1085329"/>
-                </a:lnTo>
-                <a:lnTo>
-                  <a:pt x="1331863" y="1081488"/>
-                </a:lnTo>
-                <a:lnTo>
-                  <a:pt x="1351732" y="1104301"/>
-                </a:lnTo>
-                <a:lnTo>
-                  <a:pt x="1371623" y="1034870"/>
-                </a:lnTo>
-                <a:lnTo>
-                  <a:pt x="1391490" y="1012936"/>
-                </a:lnTo>
-                <a:lnTo>
-                  <a:pt x="1411378" y="1018638"/>
-                </a:lnTo>
-                <a:lnTo>
-                  <a:pt x="1431247" y="1075639"/>
-                </a:lnTo>
-                <a:lnTo>
-                  <a:pt x="1451135" y="1033580"/>
-                </a:lnTo>
-                <a:lnTo>
-                  <a:pt x="1471003" y="973503"/>
-                </a:lnTo>
-                <a:lnTo>
-                  <a:pt x="1490893" y="965481"/>
-                </a:lnTo>
-                <a:lnTo>
-                  <a:pt x="1510760" y="975016"/>
-                </a:lnTo>
-                <a:lnTo>
-                  <a:pt x="1530649" y="1018918"/>
-                </a:lnTo>
-                <a:lnTo>
-                  <a:pt x="1550516" y="1080080"/>
-                </a:lnTo>
-                <a:lnTo>
-                  <a:pt x="1570406" y="1087877"/>
-                </a:lnTo>
-                <a:lnTo>
-                  <a:pt x="1590274" y="1088621"/>
-                </a:lnTo>
-                <a:lnTo>
-                  <a:pt x="1610162" y="1103537"/>
-                </a:lnTo>
-                <a:lnTo>
-                  <a:pt x="1630030" y="1109644"/>
-                </a:lnTo>
-                <a:lnTo>
-                  <a:pt x="1649920" y="1101228"/>
-                </a:lnTo>
-                <a:lnTo>
-                  <a:pt x="1669787" y="1098601"/>
-                </a:lnTo>
-                <a:lnTo>
-                  <a:pt x="1689676" y="1110862"/>
-                </a:lnTo>
-                <a:lnTo>
-                  <a:pt x="1709543" y="1075163"/>
-                </a:lnTo>
-                <a:lnTo>
-                  <a:pt x="1729434" y="1028204"/>
-                </a:lnTo>
-                <a:lnTo>
-                  <a:pt x="1749301" y="1003220"/>
-                </a:lnTo>
-                <a:lnTo>
-                  <a:pt x="1769190" y="1001307"/>
-                </a:lnTo>
-                <a:lnTo>
-                  <a:pt x="1789057" y="1017034"/>
-                </a:lnTo>
-                <a:lnTo>
-                  <a:pt x="1808948" y="1073281"/>
-                </a:lnTo>
-                <a:lnTo>
-                  <a:pt x="1828815" y="1097689"/>
-                </a:lnTo>
-                <a:lnTo>
-                  <a:pt x="1848704" y="1060982"/>
-                </a:lnTo>
-                <a:lnTo>
-                  <a:pt x="1868572" y="1052370"/>
-                </a:lnTo>
-                <a:lnTo>
-                  <a:pt x="1888460" y="1053995"/>
-                </a:lnTo>
-                <a:lnTo>
-                  <a:pt x="1908327" y="1067060"/>
-                </a:lnTo>
-                <a:lnTo>
-                  <a:pt x="1928218" y="1083558"/>
-                </a:lnTo>
-                <a:lnTo>
-                  <a:pt x="1948086" y="1101758"/>
-                </a:lnTo>
-                <a:lnTo>
-                  <a:pt x="1967974" y="1109969"/>
-                </a:lnTo>
-                <a:lnTo>
-                  <a:pt x="1987841" y="1112847"/>
-                </a:lnTo>
-                <a:lnTo>
-                  <a:pt x="2007731" y="1119410"/>
-                </a:lnTo>
-                <a:lnTo>
-                  <a:pt x="2027598" y="1047481"/>
-                </a:lnTo>
-                <a:lnTo>
-                  <a:pt x="2047488" y="850923"/>
-                </a:lnTo>
-                <a:lnTo>
-                  <a:pt x="2067354" y="579708"/>
-                </a:lnTo>
-                <a:lnTo>
-                  <a:pt x="2087245" y="419258"/>
-                </a:lnTo>
-                <a:lnTo>
-                  <a:pt x="2107113" y="664701"/>
-                </a:lnTo>
-                <a:lnTo>
-                  <a:pt x="2127001" y="663333"/>
-                </a:lnTo>
-                <a:lnTo>
-                  <a:pt x="2146869" y="136410"/>
-                </a:lnTo>
-                <a:lnTo>
-                  <a:pt x="2166760" y="49855"/>
-                </a:lnTo>
-                <a:lnTo>
-                  <a:pt x="2186628" y="105366"/>
-                </a:lnTo>
-                <a:lnTo>
-                  <a:pt x="2206515" y="398308"/>
-                </a:lnTo>
-                <a:lnTo>
-                  <a:pt x="2226385" y="762676"/>
-                </a:lnTo>
-                <a:lnTo>
-                  <a:pt x="2246272" y="331515"/>
-                </a:lnTo>
-                <a:lnTo>
-                  <a:pt x="2266141" y="173084"/>
-                </a:lnTo>
-                <a:lnTo>
-                  <a:pt x="2286029" y="167084"/>
-                </a:lnTo>
-                <a:lnTo>
-                  <a:pt x="2305898" y="263460"/>
-                </a:lnTo>
-                <a:lnTo>
-                  <a:pt x="2325786" y="594471"/>
-                </a:lnTo>
-                <a:lnTo>
-                  <a:pt x="2345655" y="877451"/>
-                </a:lnTo>
-                <a:lnTo>
-                  <a:pt x="2365543" y="674476"/>
-                </a:lnTo>
-                <a:lnTo>
-                  <a:pt x="2385412" y="627571"/>
-                </a:lnTo>
-                <a:lnTo>
-                  <a:pt x="2405299" y="641302"/>
-                </a:lnTo>
-                <a:lnTo>
-                  <a:pt x="2425169" y="764017"/>
-                </a:lnTo>
-                <a:lnTo>
-                  <a:pt x="2445057" y="953691"/>
-                </a:lnTo>
-                <a:lnTo>
-                  <a:pt x="2464925" y="1031794"/>
-                </a:lnTo>
-                <a:lnTo>
-                  <a:pt x="2484813" y="1005819"/>
-                </a:lnTo>
-                <a:lnTo>
-                  <a:pt x="2504683" y="1015945"/>
-                </a:lnTo>
-                <a:lnTo>
-                  <a:pt x="2524571" y="1091469"/>
-                </a:lnTo>
-                <a:lnTo>
-                  <a:pt x="2544439" y="1054976"/>
-                </a:lnTo>
-                <a:lnTo>
-                  <a:pt x="2564327" y="1049843"/>
-                </a:lnTo>
-                <a:lnTo>
-                  <a:pt x="2584196" y="1057888"/>
-                </a:lnTo>
-                <a:lnTo>
-                  <a:pt x="2604084" y="1086659"/>
-                </a:lnTo>
-                <a:lnTo>
-                  <a:pt x="2623952" y="1089444"/>
-                </a:lnTo>
-                <a:lnTo>
-                  <a:pt x="2643840" y="1035280"/>
-                </a:lnTo>
-                <a:lnTo>
-                  <a:pt x="2663710" y="983021"/>
-                </a:lnTo>
-                <a:lnTo>
-                  <a:pt x="2683597" y="969744"/>
-                </a:lnTo>
-                <a:lnTo>
-                  <a:pt x="2703466" y="973658"/>
-                </a:lnTo>
-                <a:lnTo>
-                  <a:pt x="2723355" y="1012469"/>
-                </a:lnTo>
-                <a:lnTo>
-                  <a:pt x="2743223" y="1086774"/>
-                </a:lnTo>
-                <a:lnTo>
-                  <a:pt x="2763111" y="1022650"/>
-                </a:lnTo>
-                <a:lnTo>
-                  <a:pt x="2782981" y="972427"/>
-                </a:lnTo>
-                <a:lnTo>
-                  <a:pt x="2802868" y="960162"/>
-                </a:lnTo>
-                <a:lnTo>
-                  <a:pt x="2822737" y="963607"/>
-                </a:lnTo>
-                <a:lnTo>
-                  <a:pt x="2842624" y="994475"/>
-                </a:lnTo>
-                <a:lnTo>
-                  <a:pt x="2862494" y="1037449"/>
-                </a:lnTo>
-                <a:lnTo>
-                  <a:pt x="2882383" y="1088380"/>
-                </a:lnTo>
-                <a:lnTo>
-                  <a:pt x="2902251" y="1081889"/>
-                </a:lnTo>
-                <a:lnTo>
-                  <a:pt x="2922138" y="1053483"/>
-                </a:lnTo>
-                <a:lnTo>
-                  <a:pt x="2942009" y="1050228"/>
-                </a:lnTo>
-                <a:lnTo>
-                  <a:pt x="2961895" y="1052230"/>
-                </a:lnTo>
-                <a:lnTo>
-                  <a:pt x="2981765" y="1047125"/>
-                </a:lnTo>
-                <a:lnTo>
-                  <a:pt x="3001652" y="1004726"/>
-                </a:lnTo>
-                <a:lnTo>
-                  <a:pt x="3021521" y="880375"/>
-                </a:lnTo>
-                <a:lnTo>
-                  <a:pt x="3041408" y="669944"/>
-                </a:lnTo>
-                <a:lnTo>
-                  <a:pt x="3061277" y="500863"/>
-                </a:lnTo>
-                <a:lnTo>
-                  <a:pt x="3081166" y="513515"/>
-                </a:lnTo>
-                <a:lnTo>
-                  <a:pt x="3101034" y="651757"/>
-                </a:lnTo>
-                <a:lnTo>
-                  <a:pt x="3120922" y="171563"/>
+                  <a:pt x="19887" y="202979"/>
+                </a:lnTo>
+                <a:lnTo>
+                  <a:pt x="39756" y="497008"/>
+                </a:lnTo>
+                <a:lnTo>
+                  <a:pt x="59643" y="751812"/>
+                </a:lnTo>
+                <a:lnTo>
+                  <a:pt x="79513" y="488890"/>
+                </a:lnTo>
+                <a:lnTo>
+                  <a:pt x="99402" y="353676"/>
+                </a:lnTo>
+                <a:lnTo>
+                  <a:pt x="119270" y="343744"/>
+                </a:lnTo>
+                <a:lnTo>
+                  <a:pt x="139157" y="393143"/>
+                </a:lnTo>
+                <a:lnTo>
+                  <a:pt x="159026" y="548917"/>
+                </a:lnTo>
+                <a:lnTo>
+                  <a:pt x="178914" y="748026"/>
+                </a:lnTo>
+                <a:lnTo>
+                  <a:pt x="198784" y="768851"/>
+                </a:lnTo>
+                <a:lnTo>
+                  <a:pt x="218671" y="655625"/>
+                </a:lnTo>
+                <a:lnTo>
+                  <a:pt x="238540" y="626444"/>
+                </a:lnTo>
+                <a:lnTo>
+                  <a:pt x="258429" y="632639"/>
+                </a:lnTo>
+                <a:lnTo>
+                  <a:pt x="278298" y="700142"/>
+                </a:lnTo>
+                <a:lnTo>
+                  <a:pt x="298187" y="802095"/>
+                </a:lnTo>
+                <a:lnTo>
+                  <a:pt x="318056" y="892083"/>
+                </a:lnTo>
+                <a:lnTo>
+                  <a:pt x="337942" y="955699"/>
+                </a:lnTo>
+                <a:lnTo>
+                  <a:pt x="357811" y="989026"/>
+                </a:lnTo>
+                <a:lnTo>
+                  <a:pt x="377699" y="971140"/>
+                </a:lnTo>
+                <a:lnTo>
+                  <a:pt x="397568" y="961722"/>
+                </a:lnTo>
+                <a:lnTo>
+                  <a:pt x="417456" y="943613"/>
+                </a:lnTo>
+                <a:lnTo>
+                  <a:pt x="437326" y="922037"/>
+                </a:lnTo>
+                <a:lnTo>
+                  <a:pt x="457213" y="888821"/>
+                </a:lnTo>
+                <a:lnTo>
+                  <a:pt x="477081" y="850434"/>
+                </a:lnTo>
+                <a:lnTo>
+                  <a:pt x="496970" y="832632"/>
+                </a:lnTo>
+                <a:lnTo>
+                  <a:pt x="516840" y="833782"/>
+                </a:lnTo>
+                <a:lnTo>
+                  <a:pt x="536726" y="865802"/>
+                </a:lnTo>
+                <a:lnTo>
+                  <a:pt x="556595" y="925858"/>
+                </a:lnTo>
+                <a:lnTo>
+                  <a:pt x="576482" y="942418"/>
+                </a:lnTo>
+                <a:lnTo>
+                  <a:pt x="596352" y="889627"/>
+                </a:lnTo>
+                <a:lnTo>
+                  <a:pt x="616240" y="869664"/>
+                </a:lnTo>
+                <a:lnTo>
+                  <a:pt x="636109" y="869100"/>
+                </a:lnTo>
+                <a:lnTo>
+                  <a:pt x="655998" y="881708"/>
+                </a:lnTo>
+                <a:lnTo>
+                  <a:pt x="675866" y="920502"/>
+                </a:lnTo>
+                <a:lnTo>
+                  <a:pt x="695754" y="968993"/>
+                </a:lnTo>
+                <a:lnTo>
+                  <a:pt x="715623" y="994554"/>
+                </a:lnTo>
+                <a:lnTo>
+                  <a:pt x="735511" y="980304"/>
+                </a:lnTo>
+                <a:lnTo>
+                  <a:pt x="755378" y="972425"/>
+                </a:lnTo>
+                <a:lnTo>
+                  <a:pt x="775267" y="964587"/>
+                </a:lnTo>
+                <a:lnTo>
+                  <a:pt x="795138" y="963151"/>
+                </a:lnTo>
+                <a:lnTo>
+                  <a:pt x="815025" y="965217"/>
+                </a:lnTo>
+                <a:lnTo>
+                  <a:pt x="834893" y="971124"/>
+                </a:lnTo>
+                <a:lnTo>
+                  <a:pt x="854781" y="962523"/>
+                </a:lnTo>
+                <a:lnTo>
+                  <a:pt x="874650" y="924003"/>
+                </a:lnTo>
+                <a:lnTo>
+                  <a:pt x="894538" y="753702"/>
+                </a:lnTo>
+                <a:lnTo>
+                  <a:pt x="914407" y="591304"/>
+                </a:lnTo>
+                <a:lnTo>
+                  <a:pt x="934294" y="574547"/>
+                </a:lnTo>
+                <a:lnTo>
+                  <a:pt x="954164" y="786330"/>
+                </a:lnTo>
+                <a:lnTo>
+                  <a:pt x="974051" y="554199"/>
+                </a:lnTo>
+                <a:lnTo>
+                  <a:pt x="993920" y="249431"/>
+                </a:lnTo>
+                <a:lnTo>
+                  <a:pt x="1013811" y="219091"/>
+                </a:lnTo>
+                <a:lnTo>
+                  <a:pt x="1033678" y="288515"/>
+                </a:lnTo>
+                <a:lnTo>
+                  <a:pt x="1053567" y="564109"/>
+                </a:lnTo>
+                <a:lnTo>
+                  <a:pt x="1073435" y="621035"/>
+                </a:lnTo>
+                <a:lnTo>
+                  <a:pt x="1093323" y="357794"/>
+                </a:lnTo>
+                <a:lnTo>
+                  <a:pt x="1113191" y="288557"/>
+                </a:lnTo>
+                <a:lnTo>
+                  <a:pt x="1133081" y="293124"/>
+                </a:lnTo>
+                <a:lnTo>
+                  <a:pt x="1152949" y="416736"/>
+                </a:lnTo>
+                <a:lnTo>
+                  <a:pt x="1172837" y="672775"/>
+                </a:lnTo>
+                <a:lnTo>
+                  <a:pt x="1192704" y="784060"/>
+                </a:lnTo>
+                <a:lnTo>
+                  <a:pt x="1212594" y="642494"/>
+                </a:lnTo>
+                <a:lnTo>
+                  <a:pt x="1232462" y="621067"/>
+                </a:lnTo>
+                <a:lnTo>
+                  <a:pt x="1252351" y="643466"/>
+                </a:lnTo>
+                <a:lnTo>
+                  <a:pt x="1272219" y="747106"/>
+                </a:lnTo>
+                <a:lnTo>
+                  <a:pt x="1292108" y="882766"/>
+                </a:lnTo>
+                <a:lnTo>
+                  <a:pt x="1311976" y="955089"/>
+                </a:lnTo>
+                <a:lnTo>
+                  <a:pt x="1331863" y="951710"/>
+                </a:lnTo>
+                <a:lnTo>
+                  <a:pt x="1351732" y="971785"/>
+                </a:lnTo>
+                <a:lnTo>
+                  <a:pt x="1371623" y="910685"/>
+                </a:lnTo>
+                <a:lnTo>
+                  <a:pt x="1391490" y="891383"/>
+                </a:lnTo>
+                <a:lnTo>
+                  <a:pt x="1411378" y="896401"/>
+                </a:lnTo>
+                <a:lnTo>
+                  <a:pt x="1431247" y="946563"/>
+                </a:lnTo>
+                <a:lnTo>
+                  <a:pt x="1451135" y="909550"/>
+                </a:lnTo>
+                <a:lnTo>
+                  <a:pt x="1471003" y="856683"/>
+                </a:lnTo>
+                <a:lnTo>
+                  <a:pt x="1490893" y="849624"/>
+                </a:lnTo>
+                <a:lnTo>
+                  <a:pt x="1510760" y="858014"/>
+                </a:lnTo>
+                <a:lnTo>
+                  <a:pt x="1530649" y="896648"/>
+                </a:lnTo>
+                <a:lnTo>
+                  <a:pt x="1550516" y="950470"/>
+                </a:lnTo>
+                <a:lnTo>
+                  <a:pt x="1570406" y="957331"/>
+                </a:lnTo>
+                <a:lnTo>
+                  <a:pt x="1590274" y="957987"/>
+                </a:lnTo>
+                <a:lnTo>
+                  <a:pt x="1610162" y="971113"/>
+                </a:lnTo>
+                <a:lnTo>
+                  <a:pt x="1630030" y="976487"/>
+                </a:lnTo>
+                <a:lnTo>
+                  <a:pt x="1649920" y="969081"/>
+                </a:lnTo>
+                <a:lnTo>
+                  <a:pt x="1669787" y="966769"/>
+                </a:lnTo>
+                <a:lnTo>
+                  <a:pt x="1689676" y="977558"/>
+                </a:lnTo>
+                <a:lnTo>
+                  <a:pt x="1709543" y="946144"/>
+                </a:lnTo>
+                <a:lnTo>
+                  <a:pt x="1729434" y="904819"/>
+                </a:lnTo>
+                <a:lnTo>
+                  <a:pt x="1749301" y="882833"/>
+                </a:lnTo>
+                <a:lnTo>
+                  <a:pt x="1769190" y="881150"/>
+                </a:lnTo>
+                <a:lnTo>
+                  <a:pt x="1789057" y="894990"/>
+                </a:lnTo>
+                <a:lnTo>
+                  <a:pt x="1808948" y="944487"/>
+                </a:lnTo>
+                <a:lnTo>
+                  <a:pt x="1828815" y="965966"/>
+                </a:lnTo>
+                <a:lnTo>
+                  <a:pt x="1848704" y="933664"/>
+                </a:lnTo>
+                <a:lnTo>
+                  <a:pt x="1868572" y="926085"/>
+                </a:lnTo>
+                <a:lnTo>
+                  <a:pt x="1888460" y="927515"/>
+                </a:lnTo>
+                <a:lnTo>
+                  <a:pt x="1908327" y="939013"/>
+                </a:lnTo>
+                <a:lnTo>
+                  <a:pt x="1928218" y="953531"/>
+                </a:lnTo>
+                <a:lnTo>
+                  <a:pt x="1948086" y="969547"/>
+                </a:lnTo>
+                <a:lnTo>
+                  <a:pt x="1967974" y="976773"/>
+                </a:lnTo>
+                <a:lnTo>
+                  <a:pt x="1987841" y="979305"/>
+                </a:lnTo>
+                <a:lnTo>
+                  <a:pt x="2007731" y="985081"/>
+                </a:lnTo>
+                <a:lnTo>
+                  <a:pt x="2027598" y="921784"/>
+                </a:lnTo>
+                <a:lnTo>
+                  <a:pt x="2047488" y="748812"/>
+                </a:lnTo>
+                <a:lnTo>
+                  <a:pt x="2067354" y="510143"/>
+                </a:lnTo>
+                <a:lnTo>
+                  <a:pt x="2087245" y="368947"/>
+                </a:lnTo>
+                <a:lnTo>
+                  <a:pt x="2107113" y="584937"/>
+                </a:lnTo>
+                <a:lnTo>
+                  <a:pt x="2127001" y="583733"/>
+                </a:lnTo>
+                <a:lnTo>
+                  <a:pt x="2146869" y="120040"/>
+                </a:lnTo>
+                <a:lnTo>
+                  <a:pt x="2166760" y="43872"/>
+                </a:lnTo>
+                <a:lnTo>
+                  <a:pt x="2186628" y="92722"/>
+                </a:lnTo>
+                <a:lnTo>
+                  <a:pt x="2206515" y="350511"/>
+                </a:lnTo>
+                <a:lnTo>
+                  <a:pt x="2226385" y="671155"/>
+                </a:lnTo>
+                <a:lnTo>
+                  <a:pt x="2246272" y="291733"/>
+                </a:lnTo>
+                <a:lnTo>
+                  <a:pt x="2266141" y="152314"/>
+                </a:lnTo>
+                <a:lnTo>
+                  <a:pt x="2286029" y="147034"/>
+                </a:lnTo>
+                <a:lnTo>
+                  <a:pt x="2305898" y="231845"/>
+                </a:lnTo>
+                <a:lnTo>
+                  <a:pt x="2325786" y="523135"/>
+                </a:lnTo>
+                <a:lnTo>
+                  <a:pt x="2345655" y="772157"/>
+                </a:lnTo>
+                <a:lnTo>
+                  <a:pt x="2365543" y="593538"/>
+                </a:lnTo>
+                <a:lnTo>
+                  <a:pt x="2385412" y="552263"/>
+                </a:lnTo>
+                <a:lnTo>
+                  <a:pt x="2405299" y="564345"/>
+                </a:lnTo>
+                <a:lnTo>
+                  <a:pt x="2425169" y="672335"/>
+                </a:lnTo>
+                <a:lnTo>
+                  <a:pt x="2445057" y="839248"/>
+                </a:lnTo>
+                <a:lnTo>
+                  <a:pt x="2464925" y="907978"/>
+                </a:lnTo>
+                <a:lnTo>
+                  <a:pt x="2484813" y="885121"/>
+                </a:lnTo>
+                <a:lnTo>
+                  <a:pt x="2504683" y="894031"/>
+                </a:lnTo>
+                <a:lnTo>
+                  <a:pt x="2524571" y="960493"/>
+                </a:lnTo>
+                <a:lnTo>
+                  <a:pt x="2544439" y="928379"/>
+                </a:lnTo>
+                <a:lnTo>
+                  <a:pt x="2564327" y="923862"/>
+                </a:lnTo>
+                <a:lnTo>
+                  <a:pt x="2584196" y="930941"/>
+                </a:lnTo>
+                <a:lnTo>
+                  <a:pt x="2604084" y="956260"/>
+                </a:lnTo>
+                <a:lnTo>
+                  <a:pt x="2623952" y="958711"/>
+                </a:lnTo>
+                <a:lnTo>
+                  <a:pt x="2643840" y="911047"/>
+                </a:lnTo>
+                <a:lnTo>
+                  <a:pt x="2663710" y="865058"/>
+                </a:lnTo>
+                <a:lnTo>
+                  <a:pt x="2683597" y="853375"/>
+                </a:lnTo>
+                <a:lnTo>
+                  <a:pt x="2703466" y="856819"/>
+                </a:lnTo>
+                <a:lnTo>
+                  <a:pt x="2723355" y="890973"/>
+                </a:lnTo>
+                <a:lnTo>
+                  <a:pt x="2743223" y="956361"/>
+                </a:lnTo>
+                <a:lnTo>
+                  <a:pt x="2763111" y="899932"/>
+                </a:lnTo>
+                <a:lnTo>
+                  <a:pt x="2782981" y="855736"/>
+                </a:lnTo>
+                <a:lnTo>
+                  <a:pt x="2802868" y="844943"/>
+                </a:lnTo>
+                <a:lnTo>
+                  <a:pt x="2822737" y="847974"/>
+                </a:lnTo>
+                <a:lnTo>
+                  <a:pt x="2842624" y="875138"/>
+                </a:lnTo>
+                <a:lnTo>
+                  <a:pt x="2862494" y="912955"/>
+                </a:lnTo>
+                <a:lnTo>
+                  <a:pt x="2882383" y="957775"/>
+                </a:lnTo>
+                <a:lnTo>
+                  <a:pt x="2902251" y="952062"/>
+                </a:lnTo>
+                <a:lnTo>
+                  <a:pt x="2922138" y="927065"/>
+                </a:lnTo>
+                <a:lnTo>
+                  <a:pt x="2942009" y="924201"/>
+                </a:lnTo>
+                <a:lnTo>
+                  <a:pt x="2961895" y="925962"/>
+                </a:lnTo>
+                <a:lnTo>
+                  <a:pt x="2981765" y="921470"/>
+                </a:lnTo>
+                <a:lnTo>
+                  <a:pt x="3001652" y="884159"/>
+                </a:lnTo>
+                <a:lnTo>
+                  <a:pt x="3021521" y="774730"/>
+                </a:lnTo>
+                <a:lnTo>
+                  <a:pt x="3041408" y="589551"/>
+                </a:lnTo>
+                <a:lnTo>
+                  <a:pt x="3061277" y="440760"/>
+                </a:lnTo>
+                <a:lnTo>
+                  <a:pt x="3081166" y="451893"/>
+                </a:lnTo>
+                <a:lnTo>
+                  <a:pt x="3101034" y="573546"/>
+                </a:lnTo>
+                <a:lnTo>
+                  <a:pt x="3120922" y="150975"/>
                 </a:lnTo>
                 <a:lnTo>
                   <a:pt x="3140791" y="0"/>
                 </a:lnTo>
                 <a:lnTo>
-                  <a:pt x="3160680" y="30299"/>
-                </a:lnTo>
-                <a:lnTo>
-                  <a:pt x="3180548" y="387920"/>
-                </a:lnTo>
-                <a:lnTo>
-                  <a:pt x="3200434" y="848179"/>
-                </a:lnTo>
-                <a:lnTo>
-                  <a:pt x="3220305" y="433184"/>
-                </a:lnTo>
-                <a:lnTo>
-                  <a:pt x="3240193" y="275479"/>
-                </a:lnTo>
-                <a:lnTo>
-                  <a:pt x="3260062" y="270549"/>
-                </a:lnTo>
-                <a:lnTo>
-                  <a:pt x="3279949" y="340560"/>
-                </a:lnTo>
-                <a:lnTo>
-                  <a:pt x="3299819" y="566201"/>
-                </a:lnTo>
-                <a:lnTo>
-                  <a:pt x="3319706" y="877075"/>
-                </a:lnTo>
-                <a:lnTo>
-                  <a:pt x="3339575" y="774341"/>
-                </a:lnTo>
-                <a:lnTo>
-                  <a:pt x="3359463" y="661292"/>
-                </a:lnTo>
-                <a:lnTo>
-                  <a:pt x="3379332" y="655254"/>
-                </a:lnTo>
-                <a:lnTo>
-                  <a:pt x="3399219" y="703179"/>
-                </a:lnTo>
-                <a:lnTo>
-                  <a:pt x="3419089" y="845149"/>
-                </a:lnTo>
-                <a:lnTo>
-                  <a:pt x="3438977" y="1011720"/>
-                </a:lnTo>
-                <a:lnTo>
-                  <a:pt x="3458846" y="1067298"/>
-                </a:lnTo>
-                <a:lnTo>
-                  <a:pt x="3478734" y="1049788"/>
-                </a:lnTo>
-                <a:lnTo>
-                  <a:pt x="3498603" y="1053062"/>
-                </a:lnTo>
-                <a:lnTo>
-                  <a:pt x="3518492" y="1087320"/>
-                </a:lnTo>
-                <a:lnTo>
-                  <a:pt x="3538360" y="1092132"/>
-                </a:lnTo>
-                <a:lnTo>
-                  <a:pt x="3558246" y="1085112"/>
-                </a:lnTo>
-                <a:lnTo>
-                  <a:pt x="3578118" y="1091659"/>
-                </a:lnTo>
-                <a:lnTo>
-                  <a:pt x="3598004" y="1047516"/>
-                </a:lnTo>
-                <a:lnTo>
-                  <a:pt x="3617873" y="957597"/>
-                </a:lnTo>
-                <a:lnTo>
-                  <a:pt x="3637761" y="940610"/>
-                </a:lnTo>
-                <a:lnTo>
-                  <a:pt x="3657630" y="945775"/>
-                </a:lnTo>
-                <a:lnTo>
-                  <a:pt x="3677518" y="973341"/>
-                </a:lnTo>
-                <a:lnTo>
-                  <a:pt x="3695734" y="1020153"/>
-                </a:lnTo>
-                <a:lnTo>
-                  <a:pt x="3712297" y="1070240"/>
-                </a:lnTo>
-                <a:lnTo>
-                  <a:pt x="3728870" y="1097916"/>
-                </a:lnTo>
-                <a:lnTo>
-                  <a:pt x="3745433" y="1033970"/>
-                </a:lnTo>
-                <a:lnTo>
-                  <a:pt x="3761994" y="988986"/>
-                </a:lnTo>
-                <a:lnTo>
-                  <a:pt x="3778558" y="970032"/>
-                </a:lnTo>
-                <a:lnTo>
-                  <a:pt x="3795132" y="965177"/>
-                </a:lnTo>
-                <a:lnTo>
-                  <a:pt x="3811693" y="965643"/>
-                </a:lnTo>
-                <a:lnTo>
-                  <a:pt x="3828256" y="980135"/>
-                </a:lnTo>
-                <a:lnTo>
-                  <a:pt x="3844818" y="1016072"/>
-                </a:lnTo>
-                <a:lnTo>
-                  <a:pt x="3861394" y="1059446"/>
-                </a:lnTo>
-                <a:lnTo>
-                  <a:pt x="3877956" y="1096976"/>
-                </a:lnTo>
-                <a:lnTo>
-                  <a:pt x="3894518" y="1116105"/>
-                </a:lnTo>
-                <a:lnTo>
-                  <a:pt x="3911080" y="1087656"/>
-                </a:lnTo>
-                <a:lnTo>
-                  <a:pt x="3927653" y="1064327"/>
-                </a:lnTo>
-                <a:lnTo>
-                  <a:pt x="3944217" y="1052258"/>
-                </a:lnTo>
-                <a:lnTo>
-                  <a:pt x="3960779" y="1048656"/>
-                </a:lnTo>
-                <a:lnTo>
-                  <a:pt x="3977342" y="1048603"/>
-                </a:lnTo>
-                <a:lnTo>
-                  <a:pt x="3993915" y="1049372"/>
-                </a:lnTo>
-                <a:lnTo>
-                  <a:pt x="4010479" y="1051193"/>
-                </a:lnTo>
-                <a:lnTo>
-                  <a:pt x="4027040" y="1005123"/>
-                </a:lnTo>
-                <a:lnTo>
-                  <a:pt x="4043603" y="885168"/>
-                </a:lnTo>
-                <a:lnTo>
-                  <a:pt x="4060178" y="689243"/>
-                </a:lnTo>
-                <a:lnTo>
-                  <a:pt x="4076739" y="492980"/>
-                </a:lnTo>
-                <a:lnTo>
-                  <a:pt x="4093303" y="570207"/>
-                </a:lnTo>
-                <a:lnTo>
-                  <a:pt x="4109863" y="856465"/>
-                </a:lnTo>
-                <a:lnTo>
-                  <a:pt x="4126438" y="716955"/>
-                </a:lnTo>
-                <a:lnTo>
-                  <a:pt x="4143002" y="306618"/>
-                </a:lnTo>
-                <a:lnTo>
-                  <a:pt x="4159564" y="153091"/>
-                </a:lnTo>
-                <a:lnTo>
-                  <a:pt x="4176126" y="155029"/>
-                </a:lnTo>
-                <a:lnTo>
-                  <a:pt x="4192699" y="278262"/>
-                </a:lnTo>
-                <a:lnTo>
-                  <a:pt x="4209262" y="589322"/>
-                </a:lnTo>
-                <a:lnTo>
-                  <a:pt x="4225824" y="806779"/>
-                </a:lnTo>
-                <a:lnTo>
-                  <a:pt x="4242387" y="511666"/>
-                </a:lnTo>
-                <a:lnTo>
-                  <a:pt x="4258962" y="340417"/>
-                </a:lnTo>
-                <a:lnTo>
-                  <a:pt x="4275525" y="285854"/>
-                </a:lnTo>
-                <a:lnTo>
-                  <a:pt x="4292086" y="291305"/>
-                </a:lnTo>
-                <a:lnTo>
-                  <a:pt x="4308649" y="406151"/>
-                </a:lnTo>
-                <a:lnTo>
-                  <a:pt x="4325223" y="630401"/>
-                </a:lnTo>
-                <a:lnTo>
-                  <a:pt x="4341783" y="888739"/>
-                </a:lnTo>
-                <a:lnTo>
-                  <a:pt x="4358347" y="882243"/>
-                </a:lnTo>
-                <a:lnTo>
-                  <a:pt x="4374908" y="731785"/>
-                </a:lnTo>
-                <a:lnTo>
-                  <a:pt x="4391484" y="688253"/>
-                </a:lnTo>
-                <a:lnTo>
-                  <a:pt x="4408045" y="689867"/>
-                </a:lnTo>
-                <a:lnTo>
-                  <a:pt x="4424608" y="733672"/>
-                </a:lnTo>
-                <a:lnTo>
-                  <a:pt x="4441171" y="824713"/>
-                </a:lnTo>
-                <a:lnTo>
-                  <a:pt x="4457744" y="937275"/>
-                </a:lnTo>
-                <a:lnTo>
-                  <a:pt x="4474307" y="1022854"/>
-                </a:lnTo>
-                <a:lnTo>
-                  <a:pt x="4490868" y="1017880"/>
-                </a:lnTo>
-                <a:lnTo>
-                  <a:pt x="4507432" y="1015805"/>
-                </a:lnTo>
-                <a:lnTo>
-                  <a:pt x="4524006" y="1045345"/>
-                </a:lnTo>
-                <a:lnTo>
-                  <a:pt x="4540569" y="1058422"/>
-                </a:lnTo>
-                <a:lnTo>
-                  <a:pt x="4557131" y="1001709"/>
-                </a:lnTo>
-                <a:lnTo>
-                  <a:pt x="4573692" y="984618"/>
-                </a:lnTo>
-                <a:lnTo>
-                  <a:pt x="4590268" y="986313"/>
-                </a:lnTo>
-                <a:lnTo>
-                  <a:pt x="4606830" y="1022450"/>
-                </a:lnTo>
-                <a:lnTo>
-                  <a:pt x="4623392" y="1095268"/>
-                </a:lnTo>
-                <a:lnTo>
-                  <a:pt x="4639954" y="1014705"/>
-                </a:lnTo>
-                <a:lnTo>
-                  <a:pt x="4656529" y="946053"/>
-                </a:lnTo>
-                <a:lnTo>
-                  <a:pt x="4673092" y="927491"/>
-                </a:lnTo>
-                <a:lnTo>
-                  <a:pt x="4689653" y="930822"/>
-                </a:lnTo>
-                <a:lnTo>
-                  <a:pt x="4706216" y="969460"/>
-                </a:lnTo>
-                <a:lnTo>
-                  <a:pt x="4722789" y="1038769"/>
-                </a:lnTo>
-                <a:lnTo>
-                  <a:pt x="4739353" y="1095793"/>
-                </a:lnTo>
-                <a:lnTo>
-                  <a:pt x="4755916" y="1039320"/>
-                </a:lnTo>
-                <a:lnTo>
-                  <a:pt x="4772477" y="1015382"/>
-                </a:lnTo>
-                <a:lnTo>
-                  <a:pt x="4789052" y="1014542"/>
-                </a:lnTo>
-                <a:lnTo>
-                  <a:pt x="4805614" y="1027662"/>
-                </a:lnTo>
-                <a:lnTo>
-                  <a:pt x="4822177" y="1066032"/>
-                </a:lnTo>
-                <a:lnTo>
-                  <a:pt x="4838740" y="1104418"/>
-                </a:lnTo>
-                <a:lnTo>
-                  <a:pt x="4855311" y="1096785"/>
-                </a:lnTo>
-                <a:lnTo>
-                  <a:pt x="4871876" y="1093447"/>
-                </a:lnTo>
-                <a:lnTo>
-                  <a:pt x="4888438" y="1094425"/>
-                </a:lnTo>
-                <a:lnTo>
-                  <a:pt x="4905000" y="1102259"/>
-                </a:lnTo>
-                <a:lnTo>
-                  <a:pt x="4921574" y="1120938"/>
-                </a:lnTo>
-                <a:lnTo>
-                  <a:pt x="4938137" y="1101074"/>
-                </a:lnTo>
-                <a:lnTo>
-                  <a:pt x="4954699" y="1069577"/>
-                </a:lnTo>
-                <a:lnTo>
-                  <a:pt x="4971260" y="997976"/>
-                </a:lnTo>
-                <a:lnTo>
-                  <a:pt x="4987836" y="837804"/>
-                </a:lnTo>
-                <a:lnTo>
-                  <a:pt x="5004398" y="764741"/>
-                </a:lnTo>
-                <a:lnTo>
-                  <a:pt x="5020961" y="772782"/>
-                </a:lnTo>
-                <a:lnTo>
-                  <a:pt x="5037524" y="885468"/>
-                </a:lnTo>
-                <a:lnTo>
-                  <a:pt x="5054097" y="798596"/>
-                </a:lnTo>
-                <a:lnTo>
-                  <a:pt x="5070659" y="524563"/>
-                </a:lnTo>
-                <a:lnTo>
-                  <a:pt x="5087221" y="456342"/>
-                </a:lnTo>
-                <a:lnTo>
-                  <a:pt x="5103785" y="475697"/>
-                </a:lnTo>
-                <a:lnTo>
-                  <a:pt x="5120361" y="616291"/>
-                </a:lnTo>
-                <a:lnTo>
-                  <a:pt x="5136920" y="830074"/>
-                </a:lnTo>
-                <a:lnTo>
-                  <a:pt x="5153484" y="901411"/>
-                </a:lnTo>
-                <a:lnTo>
-                  <a:pt x="5170045" y="715780"/>
-                </a:lnTo>
-                <a:lnTo>
-                  <a:pt x="5186620" y="610277"/>
-                </a:lnTo>
-                <a:lnTo>
-                  <a:pt x="5203183" y="598082"/>
-                </a:lnTo>
-                <a:lnTo>
-                  <a:pt x="5219744" y="624921"/>
-                </a:lnTo>
-                <a:lnTo>
-                  <a:pt x="5236308" y="734293"/>
-                </a:lnTo>
-                <a:lnTo>
-                  <a:pt x="5252881" y="892561"/>
-                </a:lnTo>
-                <a:lnTo>
-                  <a:pt x="5269444" y="1004670"/>
-                </a:lnTo>
-                <a:lnTo>
-                  <a:pt x="5286006" y="912429"/>
-                </a:lnTo>
-                <a:lnTo>
-                  <a:pt x="5302569" y="884782"/>
-                </a:lnTo>
-                <a:lnTo>
-                  <a:pt x="5319143" y="885926"/>
-                </a:lnTo>
-                <a:lnTo>
-                  <a:pt x="5335705" y="910755"/>
-                </a:lnTo>
-                <a:lnTo>
-                  <a:pt x="5352267" y="962849"/>
-                </a:lnTo>
-                <a:lnTo>
-                  <a:pt x="5368829" y="1032973"/>
-                </a:lnTo>
-                <a:lnTo>
-                  <a:pt x="5385405" y="1076030"/>
-                </a:lnTo>
-                <a:lnTo>
-                  <a:pt x="5401967" y="1075937"/>
-                </a:lnTo>
-                <a:lnTo>
-                  <a:pt x="5418530" y="1081034"/>
-                </a:lnTo>
-                <a:lnTo>
-                  <a:pt x="5435091" y="1068447"/>
-                </a:lnTo>
-                <a:lnTo>
-                  <a:pt x="5451665" y="1030931"/>
-                </a:lnTo>
-                <a:lnTo>
-                  <a:pt x="5468229" y="1030668"/>
-                </a:lnTo>
-                <a:lnTo>
-                  <a:pt x="5484790" y="1034559"/>
-                </a:lnTo>
-                <a:lnTo>
-                  <a:pt x="5501353" y="975843"/>
-                </a:lnTo>
-                <a:lnTo>
-                  <a:pt x="5517927" y="979466"/>
-                </a:lnTo>
-                <a:lnTo>
-                  <a:pt x="5534489" y="1041915"/>
-                </a:lnTo>
-                <a:lnTo>
-                  <a:pt x="5551052" y="1075699"/>
-                </a:lnTo>
-                <a:lnTo>
-                  <a:pt x="5567614" y="1025930"/>
-                </a:lnTo>
-                <a:lnTo>
-                  <a:pt x="5584187" y="1002439"/>
-                </a:lnTo>
-                <a:lnTo>
-                  <a:pt x="5600750" y="1001329"/>
-                </a:lnTo>
-                <a:lnTo>
-                  <a:pt x="5617312" y="1012697"/>
-                </a:lnTo>
-                <a:lnTo>
-                  <a:pt x="5633875" y="1049796"/>
-                </a:lnTo>
-                <a:lnTo>
-                  <a:pt x="5650448" y="1098610"/>
-                </a:lnTo>
-                <a:lnTo>
-                  <a:pt x="5667013" y="1082549"/>
-                </a:lnTo>
-                <a:lnTo>
-                  <a:pt x="5683577" y="1053982"/>
-                </a:lnTo>
-                <a:lnTo>
-                  <a:pt x="5700137" y="1047281"/>
-                </a:lnTo>
-                <a:lnTo>
-                  <a:pt x="5716714" y="1049825"/>
-                </a:lnTo>
-                <a:lnTo>
-                  <a:pt x="5733275" y="1069055"/>
-                </a:lnTo>
-                <a:lnTo>
-                  <a:pt x="5749837" y="1094131"/>
-                </a:lnTo>
-                <a:lnTo>
-                  <a:pt x="5766399" y="1108447"/>
-                </a:lnTo>
-                <a:lnTo>
-                  <a:pt x="5782974" y="1112293"/>
-                </a:lnTo>
-                <a:lnTo>
-                  <a:pt x="5799538" y="1117052"/>
-                </a:lnTo>
-                <a:lnTo>
-                  <a:pt x="5816099" y="1121753"/>
-                </a:lnTo>
-                <a:lnTo>
-                  <a:pt x="5832662" y="1123249"/>
-                </a:lnTo>
-                <a:lnTo>
-                  <a:pt x="5849235" y="1124611"/>
-                </a:lnTo>
-                <a:lnTo>
-                  <a:pt x="5865798" y="1122750"/>
-                </a:lnTo>
-                <a:lnTo>
-                  <a:pt x="5882360" y="1120133"/>
-                </a:lnTo>
-                <a:lnTo>
-                  <a:pt x="5898921" y="1118006"/>
-                </a:lnTo>
-                <a:lnTo>
-                  <a:pt x="5915498" y="1112592"/>
-                </a:lnTo>
-                <a:lnTo>
-                  <a:pt x="5932058" y="1111115"/>
-                </a:lnTo>
-                <a:lnTo>
-                  <a:pt x="5948622" y="1113404"/>
-                </a:lnTo>
-                <a:lnTo>
-                  <a:pt x="5965183" y="1124793"/>
-                </a:lnTo>
-                <a:lnTo>
-                  <a:pt x="5981757" y="1083768"/>
-                </a:lnTo>
-                <a:lnTo>
-                  <a:pt x="5998321" y="1009687"/>
-                </a:lnTo>
-                <a:lnTo>
-                  <a:pt x="6014881" y="984206"/>
-                </a:lnTo>
-                <a:lnTo>
-                  <a:pt x="6031446" y="724481"/>
-                </a:lnTo>
-                <a:lnTo>
-                  <a:pt x="6048019" y="688532"/>
-                </a:lnTo>
-                <a:lnTo>
-                  <a:pt x="6064582" y="891777"/>
-                </a:lnTo>
-                <a:lnTo>
-                  <a:pt x="6081145" y="792799"/>
-                </a:lnTo>
-                <a:lnTo>
-                  <a:pt x="6097706" y="746120"/>
-                </a:lnTo>
-                <a:lnTo>
-                  <a:pt x="6114280" y="669349"/>
-                </a:lnTo>
-                <a:lnTo>
-                  <a:pt x="6130842" y="658740"/>
-                </a:lnTo>
-                <a:lnTo>
-                  <a:pt x="6147405" y="685442"/>
-                </a:lnTo>
-                <a:lnTo>
-                  <a:pt x="6163969" y="814856"/>
-                </a:lnTo>
-                <a:lnTo>
-                  <a:pt x="6180542" y="1031527"/>
-                </a:lnTo>
-                <a:lnTo>
-                  <a:pt x="6197105" y="861902"/>
-                </a:lnTo>
-                <a:lnTo>
-                  <a:pt x="6213666" y="746341"/>
-                </a:lnTo>
-                <a:lnTo>
-                  <a:pt x="6230229" y="702511"/>
-                </a:lnTo>
-                <a:lnTo>
-                  <a:pt x="6246803" y="701146"/>
-                </a:lnTo>
-                <a:lnTo>
-                  <a:pt x="6263367" y="736026"/>
-                </a:lnTo>
-                <a:lnTo>
-                  <a:pt x="6279929" y="845911"/>
-                </a:lnTo>
-                <a:lnTo>
-                  <a:pt x="6296490" y="1003053"/>
-                </a:lnTo>
-                <a:lnTo>
-                  <a:pt x="6313065" y="1004322"/>
-                </a:lnTo>
-                <a:lnTo>
-                  <a:pt x="6329626" y="928847"/>
-                </a:lnTo>
-                <a:lnTo>
-                  <a:pt x="6346190" y="916850"/>
-                </a:lnTo>
-                <a:lnTo>
-                  <a:pt x="6362754" y="925302"/>
-                </a:lnTo>
-                <a:lnTo>
-                  <a:pt x="6379325" y="969676"/>
-                </a:lnTo>
-                <a:lnTo>
-                  <a:pt x="6395889" y="1036201"/>
-                </a:lnTo>
-                <a:lnTo>
-                  <a:pt x="6412451" y="1105270"/>
-                </a:lnTo>
-                <a:lnTo>
-                  <a:pt x="6429013" y="1101570"/>
-                </a:lnTo>
-                <a:lnTo>
-                  <a:pt x="6445588" y="1097369"/>
-                </a:lnTo>
-                <a:lnTo>
-                  <a:pt x="6462149" y="1100891"/>
-                </a:lnTo>
-                <a:lnTo>
-                  <a:pt x="6478712" y="1099555"/>
-                </a:lnTo>
-                <a:lnTo>
-                  <a:pt x="6495273" y="1068044"/>
-                </a:lnTo>
-                <a:lnTo>
-                  <a:pt x="6511848" y="1043234"/>
-                </a:lnTo>
-                <a:lnTo>
-                  <a:pt x="6528412" y="1037646"/>
-                </a:lnTo>
-                <a:lnTo>
-                  <a:pt x="6544973" y="1041155"/>
-                </a:lnTo>
-                <a:lnTo>
-                  <a:pt x="6561536" y="1070026"/>
-                </a:lnTo>
-                <a:lnTo>
-                  <a:pt x="6578109" y="1116185"/>
-                </a:lnTo>
-                <a:lnTo>
-                  <a:pt x="6594671" y="1057011"/>
-                </a:lnTo>
-                <a:lnTo>
-                  <a:pt x="6611235" y="1011646"/>
-                </a:lnTo>
-                <a:lnTo>
-                  <a:pt x="6627797" y="996495"/>
-                </a:lnTo>
-                <a:lnTo>
-                  <a:pt x="6644372" y="997268"/>
-                </a:lnTo>
-                <a:lnTo>
-                  <a:pt x="6660933" y="1015668"/>
-                </a:lnTo>
-                <a:lnTo>
-                  <a:pt x="6677496" y="1053633"/>
-                </a:lnTo>
-                <a:lnTo>
-                  <a:pt x="6694058" y="1101154"/>
-                </a:lnTo>
-                <a:lnTo>
-                  <a:pt x="6710632" y="1106024"/>
-                </a:lnTo>
-                <a:lnTo>
-                  <a:pt x="6727196" y="1082830"/>
-                </a:lnTo>
-                <a:lnTo>
-                  <a:pt x="6743757" y="1078855"/>
-                </a:lnTo>
-                <a:lnTo>
-                  <a:pt x="6760321" y="1081877"/>
-                </a:lnTo>
-                <a:lnTo>
-                  <a:pt x="6776893" y="1097601"/>
-                </a:lnTo>
-                <a:lnTo>
-                  <a:pt x="6793456" y="1118557"/>
-                </a:lnTo>
-                <a:lnTo>
-                  <a:pt x="6810019" y="1132049"/>
-                </a:lnTo>
-                <a:lnTo>
-                  <a:pt x="6826581" y="1127235"/>
-                </a:lnTo>
-                <a:lnTo>
-                  <a:pt x="6843156" y="1123846"/>
-                </a:lnTo>
-                <a:lnTo>
-                  <a:pt x="6859716" y="1124032"/>
-                </a:lnTo>
-                <a:lnTo>
-                  <a:pt x="6876281" y="1124678"/>
-                </a:lnTo>
-                <a:lnTo>
-                  <a:pt x="6892843" y="1122753"/>
-                </a:lnTo>
-                <a:lnTo>
-                  <a:pt x="6909417" y="1122916"/>
-                </a:lnTo>
-                <a:lnTo>
-                  <a:pt x="6925979" y="1124160"/>
-                </a:lnTo>
-                <a:lnTo>
-                  <a:pt x="6942540" y="1126639"/>
-                </a:lnTo>
-                <a:lnTo>
-                  <a:pt x="6959105" y="1133281"/>
-                </a:lnTo>
-                <a:lnTo>
-                  <a:pt x="6975677" y="1129432"/>
-                </a:lnTo>
-                <a:lnTo>
-                  <a:pt x="6992240" y="1121346"/>
-                </a:lnTo>
-                <a:lnTo>
-                  <a:pt x="7008804" y="1120969"/>
-                </a:lnTo>
-                <a:lnTo>
-                  <a:pt x="7025364" y="1122557"/>
-                </a:lnTo>
-                <a:lnTo>
-                  <a:pt x="7041939" y="1126072"/>
-                </a:lnTo>
-                <a:lnTo>
-                  <a:pt x="7058501" y="1130316"/>
-                </a:lnTo>
-                <a:lnTo>
-                  <a:pt x="7075064" y="1135363"/>
-                </a:lnTo>
-                <a:lnTo>
-                  <a:pt x="7091628" y="1135734"/>
-                </a:lnTo>
-                <a:lnTo>
-                  <a:pt x="7108201" y="1134880"/>
-                </a:lnTo>
-                <a:lnTo>
-                  <a:pt x="7124763" y="1136158"/>
-                </a:lnTo>
-                <a:lnTo>
-                  <a:pt x="7141324" y="1130308"/>
-                </a:lnTo>
-                <a:lnTo>
-                  <a:pt x="7157886" y="1073768"/>
-                </a:lnTo>
-                <a:lnTo>
-                  <a:pt x="7174461" y="979102"/>
-                </a:lnTo>
-                <a:lnTo>
-                  <a:pt x="7191023" y="880279"/>
-                </a:lnTo>
-                <a:lnTo>
-                  <a:pt x="7207587" y="713494"/>
-                </a:lnTo>
-                <a:lnTo>
-                  <a:pt x="7224148" y="779602"/>
-                </a:lnTo>
-                <a:lnTo>
-                  <a:pt x="7240722" y="879078"/>
-                </a:lnTo>
-                <a:lnTo>
-                  <a:pt x="7257286" y="864342"/>
-                </a:lnTo>
-                <a:lnTo>
-                  <a:pt x="7273848" y="698622"/>
-                </a:lnTo>
-                <a:lnTo>
-                  <a:pt x="7290410" y="643103"/>
-                </a:lnTo>
-                <a:lnTo>
-                  <a:pt x="7306983" y="653533"/>
-                </a:lnTo>
-                <a:lnTo>
-                  <a:pt x="7323547" y="750796"/>
-                </a:lnTo>
-                <a:lnTo>
-                  <a:pt x="7340109" y="929299"/>
-                </a:lnTo>
-                <a:lnTo>
-                  <a:pt x="7356671" y="913449"/>
-                </a:lnTo>
-                <a:lnTo>
-                  <a:pt x="7373246" y="768696"/>
-                </a:lnTo>
-                <a:lnTo>
-                  <a:pt x="7389807" y="698495"/>
-                </a:lnTo>
-                <a:lnTo>
-                  <a:pt x="7406371" y="692303"/>
-                </a:lnTo>
-                <a:lnTo>
-                  <a:pt x="7422932" y="718836"/>
-                </a:lnTo>
-                <a:lnTo>
-                  <a:pt x="7439506" y="821764"/>
-                </a:lnTo>
-                <a:lnTo>
-                  <a:pt x="7456070" y="974999"/>
-                </a:lnTo>
-                <a:lnTo>
-                  <a:pt x="7472632" y="1007404"/>
-                </a:lnTo>
-                <a:lnTo>
-                  <a:pt x="7489195" y="923911"/>
-                </a:lnTo>
-                <a:lnTo>
-                  <a:pt x="7505768" y="900793"/>
-                </a:lnTo>
-                <a:lnTo>
-                  <a:pt x="7522330" y="904903"/>
-                </a:lnTo>
-                <a:lnTo>
-                  <a:pt x="7538893" y="953087"/>
-                </a:lnTo>
-                <a:lnTo>
-                  <a:pt x="7555455" y="1026574"/>
-                </a:lnTo>
-                <a:lnTo>
-                  <a:pt x="7572030" y="1081876"/>
-                </a:lnTo>
-                <a:lnTo>
-                  <a:pt x="7588591" y="1093892"/>
-                </a:lnTo>
-                <a:lnTo>
-                  <a:pt x="7605155" y="1094003"/>
-                </a:lnTo>
-                <a:lnTo>
-                  <a:pt x="7621718" y="1090626"/>
-                </a:lnTo>
-                <a:lnTo>
-                  <a:pt x="7638290" y="1085267"/>
-                </a:lnTo>
-                <a:lnTo>
-                  <a:pt x="7654853" y="1086317"/>
-                </a:lnTo>
-                <a:lnTo>
-                  <a:pt x="7671415" y="1089144"/>
-                </a:lnTo>
-                <a:lnTo>
-                  <a:pt x="7687979" y="1088081"/>
-                </a:lnTo>
-                <a:lnTo>
-                  <a:pt x="7704552" y="1093350"/>
-                </a:lnTo>
-                <a:lnTo>
-                  <a:pt x="7721115" y="1077287"/>
-                </a:lnTo>
-                <a:lnTo>
-                  <a:pt x="7737678" y="1047797"/>
-                </a:lnTo>
-                <a:lnTo>
-                  <a:pt x="7754239" y="1040999"/>
-                </a:lnTo>
-                <a:lnTo>
-                  <a:pt x="7770812" y="1045041"/>
-                </a:lnTo>
-                <a:lnTo>
-                  <a:pt x="7787375" y="1069978"/>
-                </a:lnTo>
-                <a:lnTo>
-                  <a:pt x="7803937" y="1104151"/>
-                </a:lnTo>
-                <a:lnTo>
-                  <a:pt x="7820501" y="1126681"/>
-                </a:lnTo>
-                <a:lnTo>
-                  <a:pt x="7837075" y="1111856"/>
-                </a:lnTo>
-                <a:lnTo>
-                  <a:pt x="7853637" y="1110235"/>
-                </a:lnTo>
-                <a:lnTo>
-                  <a:pt x="7870198" y="1114659"/>
-                </a:lnTo>
-                <a:lnTo>
-                  <a:pt x="7886760" y="1126805"/>
-                </a:lnTo>
-                <a:lnTo>
-                  <a:pt x="7903336" y="1132082"/>
-                </a:lnTo>
-                <a:lnTo>
-                  <a:pt x="7919897" y="1131136"/>
-                </a:lnTo>
-                <a:lnTo>
-                  <a:pt x="7936461" y="1132535"/>
-                </a:lnTo>
-                <a:lnTo>
-                  <a:pt x="7953023" y="1128359"/>
-                </a:lnTo>
-                <a:lnTo>
-                  <a:pt x="7969597" y="1126279"/>
-                </a:lnTo>
-                <a:lnTo>
-                  <a:pt x="7986160" y="1125834"/>
-                </a:lnTo>
-                <a:lnTo>
-                  <a:pt x="8002721" y="1125946"/>
-                </a:lnTo>
-                <a:lnTo>
-                  <a:pt x="8019286" y="1129027"/>
-                </a:lnTo>
-                <a:lnTo>
-                  <a:pt x="8035857" y="1134840"/>
-                </a:lnTo>
-                <a:lnTo>
-                  <a:pt x="8052421" y="1128589"/>
-                </a:lnTo>
-                <a:lnTo>
-                  <a:pt x="8068985" y="1128119"/>
-                </a:lnTo>
-                <a:lnTo>
-                  <a:pt x="8085545" y="1129691"/>
-                </a:lnTo>
-                <a:lnTo>
-                  <a:pt x="8102120" y="1129843"/>
-                </a:lnTo>
-                <a:lnTo>
-                  <a:pt x="8118682" y="1128793"/>
-                </a:lnTo>
-                <a:lnTo>
-                  <a:pt x="8135244" y="1129811"/>
-                </a:lnTo>
-                <a:lnTo>
-                  <a:pt x="8151807" y="1131820"/>
-                </a:lnTo>
-                <a:lnTo>
-                  <a:pt x="8168381" y="1135015"/>
-                </a:lnTo>
-                <a:lnTo>
-                  <a:pt x="8184944" y="1135857"/>
-                </a:lnTo>
-                <a:lnTo>
-                  <a:pt x="8201507" y="1105811"/>
-                </a:lnTo>
-                <a:lnTo>
-                  <a:pt x="8218069" y="978706"/>
-                </a:lnTo>
-                <a:lnTo>
-                  <a:pt x="8234642" y="917879"/>
-                </a:lnTo>
-                <a:lnTo>
-                  <a:pt x="8251205" y="763639"/>
-                </a:lnTo>
-                <a:lnTo>
-                  <a:pt x="8267767" y="843088"/>
-                </a:lnTo>
-                <a:lnTo>
-                  <a:pt x="8284330" y="967729"/>
-                </a:lnTo>
-                <a:lnTo>
-                  <a:pt x="8300905" y="990434"/>
-                </a:lnTo>
-                <a:lnTo>
-                  <a:pt x="8317465" y="813694"/>
-                </a:lnTo>
-                <a:lnTo>
-                  <a:pt x="8334029" y="746537"/>
-                </a:lnTo>
-                <a:lnTo>
-                  <a:pt x="8350592" y="742065"/>
-                </a:lnTo>
-                <a:lnTo>
-                  <a:pt x="8367165" y="767997"/>
-                </a:lnTo>
-                <a:lnTo>
-                  <a:pt x="8383727" y="893041"/>
-                </a:lnTo>
-                <a:lnTo>
-                  <a:pt x="8400290" y="966541"/>
-                </a:lnTo>
-                <a:lnTo>
-                  <a:pt x="8416850" y="859938"/>
-                </a:lnTo>
-                <a:lnTo>
-                  <a:pt x="8433426" y="790443"/>
-                </a:lnTo>
-                <a:lnTo>
-                  <a:pt x="8449988" y="781453"/>
-                </a:lnTo>
-                <a:lnTo>
-                  <a:pt x="8466551" y="799665"/>
-                </a:lnTo>
-                <a:lnTo>
-                  <a:pt x="8483113" y="885278"/>
-                </a:lnTo>
-                <a:lnTo>
-                  <a:pt x="8499687" y="1008793"/>
-                </a:lnTo>
-                <a:lnTo>
-                  <a:pt x="8516250" y="1045471"/>
-                </a:lnTo>
-                <a:lnTo>
-                  <a:pt x="8532811" y="974900"/>
-                </a:lnTo>
-                <a:lnTo>
-                  <a:pt x="8549375" y="955092"/>
-                </a:lnTo>
-                <a:lnTo>
-                  <a:pt x="8565950" y="958172"/>
-                </a:lnTo>
-                <a:lnTo>
-                  <a:pt x="8582511" y="994540"/>
-                </a:lnTo>
-                <a:lnTo>
-                  <a:pt x="8599073" y="1051658"/>
-                </a:lnTo>
-                <a:lnTo>
-                  <a:pt x="8615634" y="1107438"/>
-                </a:lnTo>
-                <a:lnTo>
-                  <a:pt x="8632211" y="1130959"/>
-                </a:lnTo>
-                <a:lnTo>
-                  <a:pt x="8648772" y="1109269"/>
-                </a:lnTo>
-                <a:lnTo>
-                  <a:pt x="8665335" y="1092051"/>
-                </a:lnTo>
-                <a:lnTo>
-                  <a:pt x="8681897" y="1093837"/>
-                </a:lnTo>
-                <a:lnTo>
-                  <a:pt x="8698470" y="1120816"/>
-                </a:lnTo>
-                <a:lnTo>
-                  <a:pt x="8715034" y="1109129"/>
-                </a:lnTo>
-                <a:lnTo>
-                  <a:pt x="8731596" y="1097439"/>
-                </a:lnTo>
-                <a:lnTo>
-                  <a:pt x="8748159" y="1084579"/>
-                </a:lnTo>
-                <a:lnTo>
-                  <a:pt x="8764733" y="1081963"/>
-                </a:lnTo>
-                <a:lnTo>
-                  <a:pt x="8781295" y="1085106"/>
-                </a:lnTo>
-                <a:lnTo>
-                  <a:pt x="8797859" y="1081549"/>
-                </a:lnTo>
-                <a:lnTo>
-                  <a:pt x="8814420" y="1080569"/>
-                </a:lnTo>
-                <a:lnTo>
-                  <a:pt x="8830994" y="1089965"/>
-                </a:lnTo>
-                <a:lnTo>
-                  <a:pt x="8847556" y="1115850"/>
-                </a:lnTo>
-                <a:lnTo>
-                  <a:pt x="8864119" y="1125512"/>
-                </a:lnTo>
-                <a:lnTo>
-                  <a:pt x="8880682" y="1109910"/>
-                </a:lnTo>
-                <a:lnTo>
-                  <a:pt x="8897254" y="1097421"/>
-                </a:lnTo>
-                <a:lnTo>
-                  <a:pt x="8913817" y="1094084"/>
-                </a:lnTo>
-                <a:lnTo>
-                  <a:pt x="8930380" y="1094377"/>
-                </a:lnTo>
-                <a:lnTo>
-                  <a:pt x="8946942" y="1101220"/>
-                </a:lnTo>
-                <a:lnTo>
-                  <a:pt x="8963516" y="1115732"/>
-                </a:lnTo>
-                <a:lnTo>
-                  <a:pt x="8980079" y="1127760"/>
-                </a:lnTo>
-                <a:lnTo>
-                  <a:pt x="8996640" y="1120981"/>
-                </a:lnTo>
-                <a:lnTo>
-                  <a:pt x="9013204" y="1118480"/>
-                </a:lnTo>
-                <a:lnTo>
-                  <a:pt x="9029777" y="1117866"/>
-                </a:lnTo>
-                <a:lnTo>
-                  <a:pt x="9046342" y="1114823"/>
-                </a:lnTo>
-                <a:lnTo>
-                  <a:pt x="9062901" y="1114243"/>
-                </a:lnTo>
-                <a:lnTo>
-                  <a:pt x="9079465" y="1117800"/>
-                </a:lnTo>
-                <a:lnTo>
-                  <a:pt x="9096039" y="1128672"/>
-                </a:lnTo>
-                <a:lnTo>
-                  <a:pt x="9112601" y="1137732"/>
-                </a:lnTo>
-                <a:lnTo>
-                  <a:pt x="9129164" y="1128225"/>
-                </a:lnTo>
-                <a:lnTo>
-                  <a:pt x="9145725" y="1120305"/>
-                </a:lnTo>
-                <a:lnTo>
-                  <a:pt x="9162302" y="1114942"/>
-                </a:lnTo>
-                <a:lnTo>
-                  <a:pt x="9178862" y="1113584"/>
-                </a:lnTo>
-                <a:lnTo>
-                  <a:pt x="9195425" y="1114309"/>
-                </a:lnTo>
-                <a:lnTo>
-                  <a:pt x="9211987" y="1120994"/>
-                </a:lnTo>
-                <a:lnTo>
-                  <a:pt x="9228561" y="1131636"/>
-                </a:lnTo>
-                <a:lnTo>
-                  <a:pt x="9245125" y="1107114"/>
-                </a:lnTo>
-                <a:lnTo>
-                  <a:pt x="9261685" y="1033808"/>
-                </a:lnTo>
-                <a:lnTo>
-                  <a:pt x="9278248" y="954659"/>
-                </a:lnTo>
-                <a:lnTo>
-                  <a:pt x="9294823" y="898246"/>
-                </a:lnTo>
-                <a:lnTo>
-                  <a:pt x="9311386" y="991574"/>
-                </a:lnTo>
-                <a:lnTo>
-                  <a:pt x="9327948" y="1015609"/>
-                </a:lnTo>
-                <a:lnTo>
-                  <a:pt x="9344508" y="984323"/>
-                </a:lnTo>
-                <a:lnTo>
-                  <a:pt x="9361085" y="877573"/>
-                </a:lnTo>
-                <a:lnTo>
-                  <a:pt x="9377646" y="852429"/>
-                </a:lnTo>
-                <a:lnTo>
-                  <a:pt x="9394209" y="857585"/>
-                </a:lnTo>
-                <a:lnTo>
-                  <a:pt x="9410771" y="919961"/>
-                </a:lnTo>
-                <a:lnTo>
-                  <a:pt x="9427345" y="1045079"/>
-                </a:lnTo>
-                <a:lnTo>
-                  <a:pt x="9443907" y="940540"/>
-                </a:lnTo>
-                <a:lnTo>
-                  <a:pt x="9460470" y="876282"/>
-                </a:lnTo>
-                <a:lnTo>
-                  <a:pt x="9477032" y="868904"/>
-                </a:lnTo>
-                <a:lnTo>
-                  <a:pt x="9493607" y="883481"/>
-                </a:lnTo>
-                <a:lnTo>
-                  <a:pt x="9510168" y="947158"/>
-                </a:lnTo>
-                <a:lnTo>
-                  <a:pt x="9526732" y="1042776"/>
-                </a:lnTo>
-                <a:lnTo>
-                  <a:pt x="9543295" y="1057552"/>
-                </a:lnTo>
-                <a:lnTo>
-                  <a:pt x="9559867" y="1012696"/>
-                </a:lnTo>
-                <a:lnTo>
-                  <a:pt x="9576430" y="1003356"/>
-                </a:lnTo>
-                <a:lnTo>
-                  <a:pt x="9592992" y="1007037"/>
-                </a:lnTo>
-                <a:lnTo>
-                  <a:pt x="9609556" y="1035603"/>
-                </a:lnTo>
-                <a:lnTo>
-                  <a:pt x="9626128" y="1075531"/>
-                </a:lnTo>
-                <a:lnTo>
-                  <a:pt x="9642691" y="1112488"/>
-                </a:lnTo>
-                <a:lnTo>
-                  <a:pt x="9659255" y="1128972"/>
-                </a:lnTo>
-                <a:lnTo>
-                  <a:pt x="9675816" y="1117190"/>
-                </a:lnTo>
-                <a:lnTo>
-                  <a:pt x="9692391" y="1113503"/>
-                </a:lnTo>
-                <a:lnTo>
-                  <a:pt x="9708953" y="1114167"/>
-                </a:lnTo>
-                <a:lnTo>
-                  <a:pt x="9725515" y="1115912"/>
-                </a:lnTo>
-                <a:lnTo>
-                  <a:pt x="9742078" y="1096761"/>
-                </a:lnTo>
-                <a:lnTo>
-                  <a:pt x="9758651" y="1087736"/>
-                </a:lnTo>
-                <a:lnTo>
-                  <a:pt x="9775215" y="1088032"/>
-                </a:lnTo>
-                <a:lnTo>
-                  <a:pt x="9791776" y="1098492"/>
-                </a:lnTo>
-                <a:lnTo>
-                  <a:pt x="9808340" y="1115582"/>
-                </a:lnTo>
-                <a:lnTo>
-                  <a:pt x="9824914" y="1129917"/>
-                </a:lnTo>
-                <a:lnTo>
-                  <a:pt x="9841475" y="1114648"/>
-                </a:lnTo>
-                <a:lnTo>
-                  <a:pt x="9858037" y="1107678"/>
-                </a:lnTo>
-                <a:lnTo>
-                  <a:pt x="9874599" y="1107425"/>
-                </a:lnTo>
-                <a:lnTo>
-                  <a:pt x="9891176" y="1110737"/>
-                </a:lnTo>
-                <a:lnTo>
-                  <a:pt x="9907738" y="1117697"/>
-                </a:lnTo>
-                <a:lnTo>
-                  <a:pt x="9924299" y="1125788"/>
-                </a:lnTo>
-                <a:lnTo>
-                  <a:pt x="9940862" y="1130575"/>
-                </a:lnTo>
-                <a:lnTo>
-                  <a:pt x="9957435" y="1122825"/>
-                </a:lnTo>
-                <a:lnTo>
-                  <a:pt x="9973998" y="1117510"/>
-                </a:lnTo>
-                <a:lnTo>
-                  <a:pt x="9990560" y="1116545"/>
-                </a:lnTo>
-                <a:lnTo>
-                  <a:pt x="10007120" y="1119034"/>
-                </a:lnTo>
-                <a:lnTo>
-                  <a:pt x="10023697" y="1126933"/>
-                </a:lnTo>
-                <a:lnTo>
-                  <a:pt x="10040259" y="1132884"/>
-                </a:lnTo>
-                <a:lnTo>
-                  <a:pt x="10056822" y="1135845"/>
-                </a:lnTo>
-                <a:lnTo>
-                  <a:pt x="10073384" y="1137146"/>
-                </a:lnTo>
-                <a:lnTo>
-                  <a:pt x="10089956" y="1127445"/>
-                </a:lnTo>
-                <a:lnTo>
-                  <a:pt x="10106520" y="1125791"/>
-                </a:lnTo>
-                <a:lnTo>
-                  <a:pt x="10123082" y="1125914"/>
-                </a:lnTo>
-                <a:lnTo>
-                  <a:pt x="10139645" y="1121574"/>
-                </a:lnTo>
-                <a:lnTo>
-                  <a:pt x="10156219" y="1120019"/>
-                </a:lnTo>
-                <a:lnTo>
-                  <a:pt x="10172782" y="1121548"/>
-                </a:lnTo>
-                <a:lnTo>
-                  <a:pt x="10189345" y="1130589"/>
-                </a:lnTo>
-                <a:lnTo>
-                  <a:pt x="10205906" y="1134442"/>
-                </a:lnTo>
-                <a:lnTo>
-                  <a:pt x="10222480" y="1130445"/>
-                </a:lnTo>
-                <a:lnTo>
-                  <a:pt x="10239042" y="1125972"/>
-                </a:lnTo>
-                <a:lnTo>
-                  <a:pt x="10255606" y="1123491"/>
-                </a:lnTo>
-                <a:lnTo>
-                  <a:pt x="10272169" y="1123533"/>
-                </a:lnTo>
-                <a:lnTo>
-                  <a:pt x="10288743" y="1126025"/>
-                </a:lnTo>
-                <a:lnTo>
-                  <a:pt x="10305305" y="1109625"/>
-                </a:lnTo>
-                <a:lnTo>
-                  <a:pt x="10321867" y="1076201"/>
-                </a:lnTo>
-                <a:lnTo>
-                  <a:pt x="10338429" y="997922"/>
-                </a:lnTo>
-                <a:lnTo>
-                  <a:pt x="10355004" y="974058"/>
-                </a:lnTo>
-                <a:lnTo>
-                  <a:pt x="10371565" y="1063943"/>
-                </a:lnTo>
-                <a:lnTo>
-                  <a:pt x="10388129" y="1047336"/>
-                </a:lnTo>
-                <a:lnTo>
-                  <a:pt x="10404690" y="1014286"/>
-                </a:lnTo>
-                <a:lnTo>
-                  <a:pt x="10421265" y="961377"/>
-                </a:lnTo>
-                <a:lnTo>
-                  <a:pt x="10437827" y="953834"/>
-                </a:lnTo>
-                <a:lnTo>
-                  <a:pt x="10454388" y="966855"/>
-                </a:lnTo>
-                <a:lnTo>
-                  <a:pt x="10470952" y="1029127"/>
-                </a:lnTo>
-                <a:lnTo>
-                  <a:pt x="10487525" y="1061634"/>
-                </a:lnTo>
-                <a:lnTo>
-                  <a:pt x="10504087" y="997516"/>
-                </a:lnTo>
-                <a:lnTo>
-                  <a:pt x="10520651" y="970552"/>
-                </a:lnTo>
-                <a:lnTo>
-                  <a:pt x="10537212" y="969476"/>
+                  <a:pt x="3160680" y="26663"/>
+                </a:lnTo>
+                <a:lnTo>
+                  <a:pt x="3180548" y="341369"/>
+                </a:lnTo>
+                <a:lnTo>
+                  <a:pt x="3200434" y="746397"/>
+                </a:lnTo>
+                <a:lnTo>
+                  <a:pt x="3220305" y="381202"/>
+                </a:lnTo>
+                <a:lnTo>
+                  <a:pt x="3240193" y="242421"/>
+                </a:lnTo>
+                <a:lnTo>
+                  <a:pt x="3260062" y="238083"/>
+                </a:lnTo>
+                <a:lnTo>
+                  <a:pt x="3279949" y="299692"/>
+                </a:lnTo>
+                <a:lnTo>
+                  <a:pt x="3299819" y="498257"/>
+                </a:lnTo>
+                <a:lnTo>
+                  <a:pt x="3319706" y="771826"/>
+                </a:lnTo>
+                <a:lnTo>
+                  <a:pt x="3339575" y="681420"/>
+                </a:lnTo>
+                <a:lnTo>
+                  <a:pt x="3359463" y="581937"/>
+                </a:lnTo>
+                <a:lnTo>
+                  <a:pt x="3379332" y="576623"/>
+                </a:lnTo>
+                <a:lnTo>
+                  <a:pt x="3399219" y="618797"/>
+                </a:lnTo>
+                <a:lnTo>
+                  <a:pt x="3419089" y="743731"/>
+                </a:lnTo>
+                <a:lnTo>
+                  <a:pt x="3438977" y="890313"/>
+                </a:lnTo>
+                <a:lnTo>
+                  <a:pt x="3458846" y="939222"/>
+                </a:lnTo>
+                <a:lnTo>
+                  <a:pt x="3478734" y="923813"/>
+                </a:lnTo>
+                <a:lnTo>
+                  <a:pt x="3498603" y="926694"/>
+                </a:lnTo>
+                <a:lnTo>
+                  <a:pt x="3518492" y="956841"/>
+                </a:lnTo>
+                <a:lnTo>
+                  <a:pt x="3538360" y="961076"/>
+                </a:lnTo>
+                <a:lnTo>
+                  <a:pt x="3558246" y="954899"/>
+                </a:lnTo>
+                <a:lnTo>
+                  <a:pt x="3578118" y="960660"/>
+                </a:lnTo>
+                <a:lnTo>
+                  <a:pt x="3598004" y="921814"/>
+                </a:lnTo>
+                <a:lnTo>
+                  <a:pt x="3617873" y="842686"/>
+                </a:lnTo>
+                <a:lnTo>
+                  <a:pt x="3637761" y="827737"/>
+                </a:lnTo>
+                <a:lnTo>
+                  <a:pt x="3657630" y="832282"/>
+                </a:lnTo>
+                <a:lnTo>
+                  <a:pt x="3677518" y="856540"/>
+                </a:lnTo>
+                <a:lnTo>
+                  <a:pt x="3695734" y="897734"/>
+                </a:lnTo>
+                <a:lnTo>
+                  <a:pt x="3712297" y="941811"/>
+                </a:lnTo>
+                <a:lnTo>
+                  <a:pt x="3728870" y="966166"/>
+                </a:lnTo>
+                <a:lnTo>
+                  <a:pt x="3745433" y="909894"/>
+                </a:lnTo>
+                <a:lnTo>
+                  <a:pt x="3761994" y="870308"/>
+                </a:lnTo>
+                <a:lnTo>
+                  <a:pt x="3778558" y="853628"/>
+                </a:lnTo>
+                <a:lnTo>
+                  <a:pt x="3795132" y="849356"/>
+                </a:lnTo>
+                <a:lnTo>
+                  <a:pt x="3811693" y="849766"/>
+                </a:lnTo>
+                <a:lnTo>
+                  <a:pt x="3828256" y="862518"/>
+                </a:lnTo>
+                <a:lnTo>
+                  <a:pt x="3844818" y="894143"/>
+                </a:lnTo>
+                <a:lnTo>
+                  <a:pt x="3861394" y="932313"/>
+                </a:lnTo>
+                <a:lnTo>
+                  <a:pt x="3877956" y="965338"/>
+                </a:lnTo>
+                <a:lnTo>
+                  <a:pt x="3894518" y="982172"/>
+                </a:lnTo>
+                <a:lnTo>
+                  <a:pt x="3911080" y="957137"/>
+                </a:lnTo>
+                <a:lnTo>
+                  <a:pt x="3927653" y="936607"/>
+                </a:lnTo>
+                <a:lnTo>
+                  <a:pt x="3944217" y="925987"/>
+                </a:lnTo>
+                <a:lnTo>
+                  <a:pt x="3960779" y="922817"/>
+                </a:lnTo>
+                <a:lnTo>
+                  <a:pt x="3977342" y="922771"/>
+                </a:lnTo>
+                <a:lnTo>
+                  <a:pt x="3993915" y="923448"/>
+                </a:lnTo>
+                <a:lnTo>
+                  <a:pt x="4010479" y="925050"/>
+                </a:lnTo>
+                <a:lnTo>
+                  <a:pt x="4027040" y="884508"/>
+                </a:lnTo>
+                <a:lnTo>
+                  <a:pt x="4043603" y="778948"/>
+                </a:lnTo>
+                <a:lnTo>
+                  <a:pt x="4060178" y="606534"/>
+                </a:lnTo>
+                <a:lnTo>
+                  <a:pt x="4076739" y="433822"/>
+                </a:lnTo>
+                <a:lnTo>
+                  <a:pt x="4093303" y="501782"/>
+                </a:lnTo>
+                <a:lnTo>
+                  <a:pt x="4109863" y="753690"/>
+                </a:lnTo>
+                <a:lnTo>
+                  <a:pt x="4126438" y="630920"/>
+                </a:lnTo>
+                <a:lnTo>
+                  <a:pt x="4143002" y="269823"/>
+                </a:lnTo>
+                <a:lnTo>
+                  <a:pt x="4159564" y="134720"/>
+                </a:lnTo>
+                <a:lnTo>
+                  <a:pt x="4176126" y="136425"/>
+                </a:lnTo>
+                <a:lnTo>
+                  <a:pt x="4192699" y="244871"/>
+                </a:lnTo>
+                <a:lnTo>
+                  <a:pt x="4209262" y="518604"/>
+                </a:lnTo>
+                <a:lnTo>
+                  <a:pt x="4225824" y="709965"/>
+                </a:lnTo>
+                <a:lnTo>
+                  <a:pt x="4242387" y="450266"/>
+                </a:lnTo>
+                <a:lnTo>
+                  <a:pt x="4258962" y="299567"/>
+                </a:lnTo>
+                <a:lnTo>
+                  <a:pt x="4275525" y="251552"/>
+                </a:lnTo>
+                <a:lnTo>
+                  <a:pt x="4292086" y="256349"/>
+                </a:lnTo>
+                <a:lnTo>
+                  <a:pt x="4308649" y="357413"/>
+                </a:lnTo>
+                <a:lnTo>
+                  <a:pt x="4325223" y="554753"/>
+                </a:lnTo>
+                <a:lnTo>
+                  <a:pt x="4341783" y="782090"/>
+                </a:lnTo>
+                <a:lnTo>
+                  <a:pt x="4358347" y="776374"/>
+                </a:lnTo>
+                <a:lnTo>
+                  <a:pt x="4374908" y="643971"/>
+                </a:lnTo>
+                <a:lnTo>
+                  <a:pt x="4391484" y="605662"/>
+                </a:lnTo>
+                <a:lnTo>
+                  <a:pt x="4408045" y="607083"/>
+                </a:lnTo>
+                <a:lnTo>
+                  <a:pt x="4424608" y="645632"/>
+                </a:lnTo>
+                <a:lnTo>
+                  <a:pt x="4441171" y="725748"/>
+                </a:lnTo>
+                <a:lnTo>
+                  <a:pt x="4457744" y="824802"/>
+                </a:lnTo>
+                <a:lnTo>
+                  <a:pt x="4474307" y="900111"/>
+                </a:lnTo>
+                <a:lnTo>
+                  <a:pt x="4490868" y="895735"/>
+                </a:lnTo>
+                <a:lnTo>
+                  <a:pt x="4507432" y="893909"/>
+                </a:lnTo>
+                <a:lnTo>
+                  <a:pt x="4524006" y="919903"/>
+                </a:lnTo>
+                <a:lnTo>
+                  <a:pt x="4540569" y="931411"/>
+                </a:lnTo>
+                <a:lnTo>
+                  <a:pt x="4557131" y="881504"/>
+                </a:lnTo>
+                <a:lnTo>
+                  <a:pt x="4573692" y="866464"/>
+                </a:lnTo>
+                <a:lnTo>
+                  <a:pt x="4590268" y="867955"/>
+                </a:lnTo>
+                <a:lnTo>
+                  <a:pt x="4606830" y="899756"/>
+                </a:lnTo>
+                <a:lnTo>
+                  <a:pt x="4623392" y="963836"/>
+                </a:lnTo>
+                <a:lnTo>
+                  <a:pt x="4639954" y="892940"/>
+                </a:lnTo>
+                <a:lnTo>
+                  <a:pt x="4656529" y="832527"/>
+                </a:lnTo>
+                <a:lnTo>
+                  <a:pt x="4673092" y="816192"/>
+                </a:lnTo>
+                <a:lnTo>
+                  <a:pt x="4689653" y="819123"/>
+                </a:lnTo>
+                <a:lnTo>
+                  <a:pt x="4706216" y="853124"/>
+                </a:lnTo>
+                <a:lnTo>
+                  <a:pt x="4722789" y="914116"/>
+                </a:lnTo>
+                <a:lnTo>
+                  <a:pt x="4739353" y="964298"/>
+                </a:lnTo>
+                <a:lnTo>
+                  <a:pt x="4755916" y="914602"/>
+                </a:lnTo>
+                <a:lnTo>
+                  <a:pt x="4772477" y="893536"/>
+                </a:lnTo>
+                <a:lnTo>
+                  <a:pt x="4789052" y="892797"/>
+                </a:lnTo>
+                <a:lnTo>
+                  <a:pt x="4805614" y="904342"/>
+                </a:lnTo>
+                <a:lnTo>
+                  <a:pt x="4822177" y="938108"/>
+                </a:lnTo>
+                <a:lnTo>
+                  <a:pt x="4838740" y="971887"/>
+                </a:lnTo>
+                <a:lnTo>
+                  <a:pt x="4855311" y="965171"/>
+                </a:lnTo>
+                <a:lnTo>
+                  <a:pt x="4871876" y="962233"/>
+                </a:lnTo>
+                <a:lnTo>
+                  <a:pt x="4888438" y="963094"/>
+                </a:lnTo>
+                <a:lnTo>
+                  <a:pt x="4905000" y="969988"/>
+                </a:lnTo>
+                <a:lnTo>
+                  <a:pt x="4921574" y="986426"/>
+                </a:lnTo>
+                <a:lnTo>
+                  <a:pt x="4938137" y="968945"/>
+                </a:lnTo>
+                <a:lnTo>
+                  <a:pt x="4954699" y="941228"/>
+                </a:lnTo>
+                <a:lnTo>
+                  <a:pt x="4971260" y="878219"/>
+                </a:lnTo>
+                <a:lnTo>
+                  <a:pt x="4987836" y="737268"/>
+                </a:lnTo>
+                <a:lnTo>
+                  <a:pt x="5004398" y="672972"/>
+                </a:lnTo>
+                <a:lnTo>
+                  <a:pt x="5020961" y="680048"/>
+                </a:lnTo>
+                <a:lnTo>
+                  <a:pt x="5037524" y="779212"/>
+                </a:lnTo>
+                <a:lnTo>
+                  <a:pt x="5054097" y="702764"/>
+                </a:lnTo>
+                <a:lnTo>
+                  <a:pt x="5070659" y="461615"/>
+                </a:lnTo>
+                <a:lnTo>
+                  <a:pt x="5087221" y="401581"/>
+                </a:lnTo>
+                <a:lnTo>
+                  <a:pt x="5103785" y="418614"/>
+                </a:lnTo>
+                <a:lnTo>
+                  <a:pt x="5120361" y="542336"/>
+                </a:lnTo>
+                <a:lnTo>
+                  <a:pt x="5136920" y="730465"/>
+                </a:lnTo>
+                <a:lnTo>
+                  <a:pt x="5153484" y="793241"/>
+                </a:lnTo>
+                <a:lnTo>
+                  <a:pt x="5170045" y="629886"/>
+                </a:lnTo>
+                <a:lnTo>
+                  <a:pt x="5186620" y="537044"/>
+                </a:lnTo>
+                <a:lnTo>
+                  <a:pt x="5203183" y="526312"/>
+                </a:lnTo>
+                <a:lnTo>
+                  <a:pt x="5219744" y="549930"/>
+                </a:lnTo>
+                <a:lnTo>
+                  <a:pt x="5236308" y="646178"/>
+                </a:lnTo>
+                <a:lnTo>
+                  <a:pt x="5252881" y="785454"/>
+                </a:lnTo>
+                <a:lnTo>
+                  <a:pt x="5269444" y="884110"/>
+                </a:lnTo>
+                <a:lnTo>
+                  <a:pt x="5286006" y="802938"/>
+                </a:lnTo>
+                <a:lnTo>
+                  <a:pt x="5302569" y="778608"/>
+                </a:lnTo>
+                <a:lnTo>
+                  <a:pt x="5319143" y="779615"/>
+                </a:lnTo>
+                <a:lnTo>
+                  <a:pt x="5335705" y="801464"/>
+                </a:lnTo>
+                <a:lnTo>
+                  <a:pt x="5352267" y="847307"/>
+                </a:lnTo>
+                <a:lnTo>
+                  <a:pt x="5368829" y="909017"/>
+                </a:lnTo>
+                <a:lnTo>
+                  <a:pt x="5385405" y="946907"/>
+                </a:lnTo>
+                <a:lnTo>
+                  <a:pt x="5401967" y="946824"/>
+                </a:lnTo>
+                <a:lnTo>
+                  <a:pt x="5418530" y="951310"/>
+                </a:lnTo>
+                <a:lnTo>
+                  <a:pt x="5435091" y="940233"/>
+                </a:lnTo>
+                <a:lnTo>
+                  <a:pt x="5451665" y="907219"/>
+                </a:lnTo>
+                <a:lnTo>
+                  <a:pt x="5468229" y="906988"/>
+                </a:lnTo>
+                <a:lnTo>
+                  <a:pt x="5484790" y="910412"/>
+                </a:lnTo>
+                <a:lnTo>
+                  <a:pt x="5501353" y="858742"/>
+                </a:lnTo>
+                <a:lnTo>
+                  <a:pt x="5517927" y="861930"/>
+                </a:lnTo>
+                <a:lnTo>
+                  <a:pt x="5534489" y="916885"/>
+                </a:lnTo>
+                <a:lnTo>
+                  <a:pt x="5551052" y="946615"/>
+                </a:lnTo>
+                <a:lnTo>
+                  <a:pt x="5567614" y="902818"/>
+                </a:lnTo>
+                <a:lnTo>
+                  <a:pt x="5584187" y="882147"/>
+                </a:lnTo>
+                <a:lnTo>
+                  <a:pt x="5600750" y="881170"/>
+                </a:lnTo>
+                <a:lnTo>
+                  <a:pt x="5617312" y="891173"/>
+                </a:lnTo>
+                <a:lnTo>
+                  <a:pt x="5633875" y="923820"/>
+                </a:lnTo>
+                <a:lnTo>
+                  <a:pt x="5650448" y="966776"/>
+                </a:lnTo>
+                <a:lnTo>
+                  <a:pt x="5667013" y="952643"/>
+                </a:lnTo>
+                <a:lnTo>
+                  <a:pt x="5683577" y="927504"/>
+                </a:lnTo>
+                <a:lnTo>
+                  <a:pt x="5700137" y="921607"/>
+                </a:lnTo>
+                <a:lnTo>
+                  <a:pt x="5716714" y="923846"/>
+                </a:lnTo>
+                <a:lnTo>
+                  <a:pt x="5733275" y="940769"/>
+                </a:lnTo>
+                <a:lnTo>
+                  <a:pt x="5749837" y="962835"/>
+                </a:lnTo>
+                <a:lnTo>
+                  <a:pt x="5766399" y="975433"/>
+                </a:lnTo>
+                <a:lnTo>
+                  <a:pt x="5782974" y="978818"/>
+                </a:lnTo>
+                <a:lnTo>
+                  <a:pt x="5799538" y="983006"/>
+                </a:lnTo>
+                <a:lnTo>
+                  <a:pt x="5816099" y="987142"/>
+                </a:lnTo>
+                <a:lnTo>
+                  <a:pt x="5832662" y="988459"/>
+                </a:lnTo>
+                <a:lnTo>
+                  <a:pt x="5849235" y="989657"/>
+                </a:lnTo>
+                <a:lnTo>
+                  <a:pt x="5865798" y="988020"/>
+                </a:lnTo>
+                <a:lnTo>
+                  <a:pt x="5882360" y="985717"/>
+                </a:lnTo>
+                <a:lnTo>
+                  <a:pt x="5898921" y="983845"/>
+                </a:lnTo>
+                <a:lnTo>
+                  <a:pt x="5915498" y="979081"/>
+                </a:lnTo>
+                <a:lnTo>
+                  <a:pt x="5932058" y="977781"/>
+                </a:lnTo>
+                <a:lnTo>
+                  <a:pt x="5948622" y="979795"/>
+                </a:lnTo>
+                <a:lnTo>
+                  <a:pt x="5965183" y="989817"/>
+                </a:lnTo>
+                <a:lnTo>
+                  <a:pt x="5981757" y="953716"/>
+                </a:lnTo>
+                <a:lnTo>
+                  <a:pt x="5998321" y="888524"/>
+                </a:lnTo>
+                <a:lnTo>
+                  <a:pt x="6014881" y="866101"/>
+                </a:lnTo>
+                <a:lnTo>
+                  <a:pt x="6031446" y="637543"/>
+                </a:lnTo>
+                <a:lnTo>
+                  <a:pt x="6048019" y="605908"/>
+                </a:lnTo>
+                <a:lnTo>
+                  <a:pt x="6064582" y="784763"/>
+                </a:lnTo>
+                <a:lnTo>
+                  <a:pt x="6081145" y="697663"/>
+                </a:lnTo>
+                <a:lnTo>
+                  <a:pt x="6097706" y="656585"/>
+                </a:lnTo>
+                <a:lnTo>
+                  <a:pt x="6114280" y="589027"/>
+                </a:lnTo>
+                <a:lnTo>
+                  <a:pt x="6130842" y="579691"/>
+                </a:lnTo>
+                <a:lnTo>
+                  <a:pt x="6147405" y="603189"/>
+                </a:lnTo>
+                <a:lnTo>
+                  <a:pt x="6163969" y="717074"/>
+                </a:lnTo>
+                <a:lnTo>
+                  <a:pt x="6180542" y="907743"/>
+                </a:lnTo>
+                <a:lnTo>
+                  <a:pt x="6197105" y="758474"/>
+                </a:lnTo>
+                <a:lnTo>
+                  <a:pt x="6213666" y="656780"/>
+                </a:lnTo>
+                <a:lnTo>
+                  <a:pt x="6230229" y="618209"/>
+                </a:lnTo>
+                <a:lnTo>
+                  <a:pt x="6246803" y="617008"/>
+                </a:lnTo>
+                <a:lnTo>
+                  <a:pt x="6263367" y="647703"/>
+                </a:lnTo>
+                <a:lnTo>
+                  <a:pt x="6279929" y="744402"/>
+                </a:lnTo>
+                <a:lnTo>
+                  <a:pt x="6296490" y="882686"/>
+                </a:lnTo>
+                <a:lnTo>
+                  <a:pt x="6313065" y="883803"/>
+                </a:lnTo>
+                <a:lnTo>
+                  <a:pt x="6329626" y="817385"/>
+                </a:lnTo>
+                <a:lnTo>
+                  <a:pt x="6346190" y="806828"/>
+                </a:lnTo>
+                <a:lnTo>
+                  <a:pt x="6362754" y="814266"/>
+                </a:lnTo>
+                <a:lnTo>
+                  <a:pt x="6379325" y="853315"/>
+                </a:lnTo>
+                <a:lnTo>
+                  <a:pt x="6395889" y="911857"/>
+                </a:lnTo>
+                <a:lnTo>
+                  <a:pt x="6412451" y="972637"/>
+                </a:lnTo>
+                <a:lnTo>
+                  <a:pt x="6429013" y="969381"/>
+                </a:lnTo>
+                <a:lnTo>
+                  <a:pt x="6445588" y="965685"/>
+                </a:lnTo>
+                <a:lnTo>
+                  <a:pt x="6462149" y="968784"/>
+                </a:lnTo>
+                <a:lnTo>
+                  <a:pt x="6478712" y="967608"/>
+                </a:lnTo>
+                <a:lnTo>
+                  <a:pt x="6495273" y="939878"/>
+                </a:lnTo>
+                <a:lnTo>
+                  <a:pt x="6511848" y="918046"/>
+                </a:lnTo>
+                <a:lnTo>
+                  <a:pt x="6528412" y="913128"/>
+                </a:lnTo>
+                <a:lnTo>
+                  <a:pt x="6544973" y="916217"/>
+                </a:lnTo>
+                <a:lnTo>
+                  <a:pt x="6561536" y="941623"/>
+                </a:lnTo>
+                <a:lnTo>
+                  <a:pt x="6578109" y="982243"/>
+                </a:lnTo>
+                <a:lnTo>
+                  <a:pt x="6594671" y="930170"/>
+                </a:lnTo>
+                <a:lnTo>
+                  <a:pt x="6611235" y="890248"/>
+                </a:lnTo>
+                <a:lnTo>
+                  <a:pt x="6627797" y="876916"/>
+                </a:lnTo>
+                <a:lnTo>
+                  <a:pt x="6644372" y="877596"/>
+                </a:lnTo>
+                <a:lnTo>
+                  <a:pt x="6660933" y="893788"/>
+                </a:lnTo>
+                <a:lnTo>
+                  <a:pt x="6677496" y="927197"/>
+                </a:lnTo>
+                <a:lnTo>
+                  <a:pt x="6694058" y="969016"/>
+                </a:lnTo>
+                <a:lnTo>
+                  <a:pt x="6710632" y="973301"/>
+                </a:lnTo>
+                <a:lnTo>
+                  <a:pt x="6727196" y="952890"/>
+                </a:lnTo>
+                <a:lnTo>
+                  <a:pt x="6743757" y="949392"/>
+                </a:lnTo>
+                <a:lnTo>
+                  <a:pt x="6760321" y="952051"/>
+                </a:lnTo>
+                <a:lnTo>
+                  <a:pt x="6776893" y="965888"/>
+                </a:lnTo>
+                <a:lnTo>
+                  <a:pt x="6793456" y="984330"/>
+                </a:lnTo>
+                <a:lnTo>
+                  <a:pt x="6810019" y="996203"/>
+                </a:lnTo>
+                <a:lnTo>
+                  <a:pt x="6826581" y="991967"/>
+                </a:lnTo>
+                <a:lnTo>
+                  <a:pt x="6843156" y="988985"/>
+                </a:lnTo>
+                <a:lnTo>
+                  <a:pt x="6859716" y="989148"/>
+                </a:lnTo>
+                <a:lnTo>
+                  <a:pt x="6876281" y="989716"/>
+                </a:lnTo>
+                <a:lnTo>
+                  <a:pt x="6892843" y="988023"/>
+                </a:lnTo>
+                <a:lnTo>
+                  <a:pt x="6909417" y="988166"/>
+                </a:lnTo>
+                <a:lnTo>
+                  <a:pt x="6925979" y="989260"/>
+                </a:lnTo>
+                <a:lnTo>
+                  <a:pt x="6942540" y="991443"/>
+                </a:lnTo>
+                <a:lnTo>
+                  <a:pt x="6959105" y="997287"/>
+                </a:lnTo>
+                <a:lnTo>
+                  <a:pt x="6975677" y="993900"/>
+                </a:lnTo>
+                <a:lnTo>
+                  <a:pt x="6992240" y="986784"/>
+                </a:lnTo>
+                <a:lnTo>
+                  <a:pt x="7008804" y="986453"/>
+                </a:lnTo>
+                <a:lnTo>
+                  <a:pt x="7025364" y="987850"/>
+                </a:lnTo>
+                <a:lnTo>
+                  <a:pt x="7041939" y="990943"/>
+                </a:lnTo>
+                <a:lnTo>
+                  <a:pt x="7058501" y="994678"/>
+                </a:lnTo>
+                <a:lnTo>
+                  <a:pt x="7075064" y="999120"/>
+                </a:lnTo>
+                <a:lnTo>
+                  <a:pt x="7091628" y="999446"/>
+                </a:lnTo>
+                <a:lnTo>
+                  <a:pt x="7108201" y="998695"/>
+                </a:lnTo>
+                <a:lnTo>
+                  <a:pt x="7124763" y="999819"/>
+                </a:lnTo>
+                <a:lnTo>
+                  <a:pt x="7141324" y="994671"/>
+                </a:lnTo>
+                <a:lnTo>
+                  <a:pt x="7157886" y="944916"/>
+                </a:lnTo>
+                <a:lnTo>
+                  <a:pt x="7174461" y="861609"/>
+                </a:lnTo>
+                <a:lnTo>
+                  <a:pt x="7191023" y="774646"/>
+                </a:lnTo>
+                <a:lnTo>
+                  <a:pt x="7207587" y="627875"/>
+                </a:lnTo>
+                <a:lnTo>
+                  <a:pt x="7224148" y="686049"/>
+                </a:lnTo>
+                <a:lnTo>
+                  <a:pt x="7240722" y="773589"/>
+                </a:lnTo>
+                <a:lnTo>
+                  <a:pt x="7257286" y="760621"/>
+                </a:lnTo>
+                <a:lnTo>
+                  <a:pt x="7273848" y="614788"/>
+                </a:lnTo>
+                <a:lnTo>
+                  <a:pt x="7290410" y="565930"/>
+                </a:lnTo>
+                <a:lnTo>
+                  <a:pt x="7306983" y="575109"/>
+                </a:lnTo>
+                <a:lnTo>
+                  <a:pt x="7323547" y="660700"/>
+                </a:lnTo>
+                <a:lnTo>
+                  <a:pt x="7340109" y="817783"/>
+                </a:lnTo>
+                <a:lnTo>
+                  <a:pt x="7356671" y="803835"/>
+                </a:lnTo>
+                <a:lnTo>
+                  <a:pt x="7373246" y="676452"/>
+                </a:lnTo>
+                <a:lnTo>
+                  <a:pt x="7389807" y="614676"/>
+                </a:lnTo>
+                <a:lnTo>
+                  <a:pt x="7406371" y="609226"/>
+                </a:lnTo>
+                <a:lnTo>
+                  <a:pt x="7422932" y="632576"/>
+                </a:lnTo>
+                <a:lnTo>
+                  <a:pt x="7439506" y="723153"/>
+                </a:lnTo>
+                <a:lnTo>
+                  <a:pt x="7456070" y="857999"/>
+                </a:lnTo>
+                <a:lnTo>
+                  <a:pt x="7472632" y="886515"/>
+                </a:lnTo>
+                <a:lnTo>
+                  <a:pt x="7489195" y="813041"/>
+                </a:lnTo>
+                <a:lnTo>
+                  <a:pt x="7505768" y="792698"/>
+                </a:lnTo>
+                <a:lnTo>
+                  <a:pt x="7522330" y="796315"/>
+                </a:lnTo>
+                <a:lnTo>
+                  <a:pt x="7538893" y="838716"/>
+                </a:lnTo>
+                <a:lnTo>
+                  <a:pt x="7555455" y="903385"/>
+                </a:lnTo>
+                <a:lnTo>
+                  <a:pt x="7572030" y="952050"/>
+                </a:lnTo>
+                <a:lnTo>
+                  <a:pt x="7588591" y="962625"/>
+                </a:lnTo>
+                <a:lnTo>
+                  <a:pt x="7605155" y="962722"/>
+                </a:lnTo>
+                <a:lnTo>
+                  <a:pt x="7621718" y="959751"/>
+                </a:lnTo>
+                <a:lnTo>
+                  <a:pt x="7638290" y="955035"/>
+                </a:lnTo>
+                <a:lnTo>
+                  <a:pt x="7654853" y="955959"/>
+                </a:lnTo>
+                <a:lnTo>
+                  <a:pt x="7671415" y="958446"/>
+                </a:lnTo>
+                <a:lnTo>
+                  <a:pt x="7687979" y="957511"/>
+                </a:lnTo>
+                <a:lnTo>
+                  <a:pt x="7704552" y="962148"/>
+                </a:lnTo>
+                <a:lnTo>
+                  <a:pt x="7721115" y="948012"/>
+                </a:lnTo>
+                <a:lnTo>
+                  <a:pt x="7737678" y="922062"/>
+                </a:lnTo>
+                <a:lnTo>
+                  <a:pt x="7754239" y="916079"/>
+                </a:lnTo>
+                <a:lnTo>
+                  <a:pt x="7770812" y="919636"/>
+                </a:lnTo>
+                <a:lnTo>
+                  <a:pt x="7787375" y="941581"/>
+                </a:lnTo>
+                <a:lnTo>
+                  <a:pt x="7803937" y="971653"/>
+                </a:lnTo>
+                <a:lnTo>
+                  <a:pt x="7820501" y="991479"/>
+                </a:lnTo>
+                <a:lnTo>
+                  <a:pt x="7837075" y="978433"/>
+                </a:lnTo>
+                <a:lnTo>
+                  <a:pt x="7853637" y="977007"/>
+                </a:lnTo>
+                <a:lnTo>
+                  <a:pt x="7870198" y="980900"/>
+                </a:lnTo>
+                <a:lnTo>
+                  <a:pt x="7886760" y="991588"/>
+                </a:lnTo>
+                <a:lnTo>
+                  <a:pt x="7903336" y="996233"/>
+                </a:lnTo>
+                <a:lnTo>
+                  <a:pt x="7919897" y="995399"/>
+                </a:lnTo>
+                <a:lnTo>
+                  <a:pt x="7936461" y="996631"/>
+                </a:lnTo>
+                <a:lnTo>
+                  <a:pt x="7953023" y="992956"/>
+                </a:lnTo>
+                <a:lnTo>
+                  <a:pt x="7969597" y="991126"/>
+                </a:lnTo>
+                <a:lnTo>
+                  <a:pt x="7986160" y="990734"/>
+                </a:lnTo>
+                <a:lnTo>
+                  <a:pt x="8002721" y="990832"/>
+                </a:lnTo>
+                <a:lnTo>
+                  <a:pt x="8019286" y="993544"/>
+                </a:lnTo>
+                <a:lnTo>
+                  <a:pt x="8035857" y="998659"/>
+                </a:lnTo>
+                <a:lnTo>
+                  <a:pt x="8052421" y="993158"/>
+                </a:lnTo>
+                <a:lnTo>
+                  <a:pt x="8068985" y="992744"/>
+                </a:lnTo>
+                <a:lnTo>
+                  <a:pt x="8085545" y="994128"/>
+                </a:lnTo>
+                <a:lnTo>
+                  <a:pt x="8102120" y="994262"/>
+                </a:lnTo>
+                <a:lnTo>
+                  <a:pt x="8118682" y="993338"/>
+                </a:lnTo>
+                <a:lnTo>
+                  <a:pt x="8135244" y="994233"/>
+                </a:lnTo>
+                <a:lnTo>
+                  <a:pt x="8151807" y="996002"/>
+                </a:lnTo>
+                <a:lnTo>
+                  <a:pt x="8168381" y="998813"/>
+                </a:lnTo>
+                <a:lnTo>
+                  <a:pt x="8184944" y="999554"/>
+                </a:lnTo>
+                <a:lnTo>
+                  <a:pt x="8201507" y="973114"/>
+                </a:lnTo>
+                <a:lnTo>
+                  <a:pt x="8218069" y="861261"/>
+                </a:lnTo>
+                <a:lnTo>
+                  <a:pt x="8234642" y="807733"/>
+                </a:lnTo>
+                <a:lnTo>
+                  <a:pt x="8251205" y="672002"/>
+                </a:lnTo>
+                <a:lnTo>
+                  <a:pt x="8267767" y="741917"/>
+                </a:lnTo>
+                <a:lnTo>
+                  <a:pt x="8284330" y="851601"/>
+                </a:lnTo>
+                <a:lnTo>
+                  <a:pt x="8300905" y="871582"/>
+                </a:lnTo>
+                <a:lnTo>
+                  <a:pt x="8317465" y="716051"/>
+                </a:lnTo>
+                <a:lnTo>
+                  <a:pt x="8334029" y="656953"/>
+                </a:lnTo>
+                <a:lnTo>
+                  <a:pt x="8350592" y="653017"/>
+                </a:lnTo>
+                <a:lnTo>
+                  <a:pt x="8367165" y="675837"/>
+                </a:lnTo>
+                <a:lnTo>
+                  <a:pt x="8383727" y="785876"/>
+                </a:lnTo>
+                <a:lnTo>
+                  <a:pt x="8400290" y="850556"/>
+                </a:lnTo>
+                <a:lnTo>
+                  <a:pt x="8416850" y="756745"/>
+                </a:lnTo>
+                <a:lnTo>
+                  <a:pt x="8433426" y="695590"/>
+                </a:lnTo>
+                <a:lnTo>
+                  <a:pt x="8449988" y="687679"/>
+                </a:lnTo>
+                <a:lnTo>
+                  <a:pt x="8466551" y="703705"/>
+                </a:lnTo>
+                <a:lnTo>
+                  <a:pt x="8483113" y="779045"/>
+                </a:lnTo>
+                <a:lnTo>
+                  <a:pt x="8499687" y="887738"/>
+                </a:lnTo>
+                <a:lnTo>
+                  <a:pt x="8516250" y="920015"/>
+                </a:lnTo>
+                <a:lnTo>
+                  <a:pt x="8532811" y="857912"/>
+                </a:lnTo>
+                <a:lnTo>
+                  <a:pt x="8549375" y="840481"/>
+                </a:lnTo>
+                <a:lnTo>
+                  <a:pt x="8565950" y="843191"/>
+                </a:lnTo>
+                <a:lnTo>
+                  <a:pt x="8582511" y="875195"/>
+                </a:lnTo>
+                <a:lnTo>
+                  <a:pt x="8599073" y="925459"/>
+                </a:lnTo>
+                <a:lnTo>
+                  <a:pt x="8615634" y="974545"/>
+                </a:lnTo>
+                <a:lnTo>
+                  <a:pt x="8632211" y="995244"/>
+                </a:lnTo>
+                <a:lnTo>
+                  <a:pt x="8648772" y="976157"/>
+                </a:lnTo>
+                <a:lnTo>
+                  <a:pt x="8665335" y="961005"/>
+                </a:lnTo>
+                <a:lnTo>
+                  <a:pt x="8681897" y="962577"/>
+                </a:lnTo>
+                <a:lnTo>
+                  <a:pt x="8698470" y="986318"/>
+                </a:lnTo>
+                <a:lnTo>
+                  <a:pt x="8715034" y="976033"/>
+                </a:lnTo>
+                <a:lnTo>
+                  <a:pt x="8731596" y="965746"/>
+                </a:lnTo>
+                <a:lnTo>
+                  <a:pt x="8748159" y="954430"/>
+                </a:lnTo>
+                <a:lnTo>
+                  <a:pt x="8764733" y="952127"/>
+                </a:lnTo>
+                <a:lnTo>
+                  <a:pt x="8781295" y="954893"/>
+                </a:lnTo>
+                <a:lnTo>
+                  <a:pt x="8797859" y="951763"/>
+                </a:lnTo>
+                <a:lnTo>
+                  <a:pt x="8814420" y="950900"/>
+                </a:lnTo>
+                <a:lnTo>
+                  <a:pt x="8830994" y="959169"/>
+                </a:lnTo>
+                <a:lnTo>
+                  <a:pt x="8847556" y="981948"/>
+                </a:lnTo>
+                <a:lnTo>
+                  <a:pt x="8864119" y="990451"/>
+                </a:lnTo>
+                <a:lnTo>
+                  <a:pt x="8880682" y="976721"/>
+                </a:lnTo>
+                <a:lnTo>
+                  <a:pt x="8897254" y="965731"/>
+                </a:lnTo>
+                <a:lnTo>
+                  <a:pt x="8913817" y="962793"/>
+                </a:lnTo>
+                <a:lnTo>
+                  <a:pt x="8930380" y="963052"/>
+                </a:lnTo>
+                <a:lnTo>
+                  <a:pt x="8946942" y="969074"/>
+                </a:lnTo>
+                <a:lnTo>
+                  <a:pt x="8963516" y="981844"/>
+                </a:lnTo>
+                <a:lnTo>
+                  <a:pt x="8980079" y="992429"/>
+                </a:lnTo>
+                <a:lnTo>
+                  <a:pt x="8996640" y="986463"/>
+                </a:lnTo>
+                <a:lnTo>
+                  <a:pt x="9013204" y="984262"/>
+                </a:lnTo>
+                <a:lnTo>
+                  <a:pt x="9029777" y="983722"/>
+                </a:lnTo>
+                <a:lnTo>
+                  <a:pt x="9046342" y="981044"/>
+                </a:lnTo>
+                <a:lnTo>
+                  <a:pt x="9062901" y="980534"/>
+                </a:lnTo>
+                <a:lnTo>
+                  <a:pt x="9079465" y="983664"/>
+                </a:lnTo>
+                <a:lnTo>
+                  <a:pt x="9096039" y="993231"/>
+                </a:lnTo>
+                <a:lnTo>
+                  <a:pt x="9112601" y="1001204"/>
+                </a:lnTo>
+                <a:lnTo>
+                  <a:pt x="9129164" y="992838"/>
+                </a:lnTo>
+                <a:lnTo>
+                  <a:pt x="9145725" y="985868"/>
+                </a:lnTo>
+                <a:lnTo>
+                  <a:pt x="9162302" y="981149"/>
+                </a:lnTo>
+                <a:lnTo>
+                  <a:pt x="9178862" y="979954"/>
+                </a:lnTo>
+                <a:lnTo>
+                  <a:pt x="9195425" y="980592"/>
+                </a:lnTo>
+                <a:lnTo>
+                  <a:pt x="9211987" y="986475"/>
+                </a:lnTo>
+                <a:lnTo>
+                  <a:pt x="9228561" y="995839"/>
+                </a:lnTo>
+                <a:lnTo>
+                  <a:pt x="9245125" y="974260"/>
+                </a:lnTo>
+                <a:lnTo>
+                  <a:pt x="9261685" y="909751"/>
+                </a:lnTo>
+                <a:lnTo>
+                  <a:pt x="9278248" y="840100"/>
+                </a:lnTo>
+                <a:lnTo>
+                  <a:pt x="9294823" y="790456"/>
+                </a:lnTo>
+                <a:lnTo>
+                  <a:pt x="9311386" y="872585"/>
+                </a:lnTo>
+                <a:lnTo>
+                  <a:pt x="9327948" y="893736"/>
+                </a:lnTo>
+                <a:lnTo>
+                  <a:pt x="9344508" y="866204"/>
+                </a:lnTo>
+                <a:lnTo>
+                  <a:pt x="9361085" y="772264"/>
+                </a:lnTo>
+                <a:lnTo>
+                  <a:pt x="9377646" y="750138"/>
+                </a:lnTo>
+                <a:lnTo>
+                  <a:pt x="9394209" y="754675"/>
+                </a:lnTo>
+                <a:lnTo>
+                  <a:pt x="9410771" y="809565"/>
+                </a:lnTo>
+                <a:lnTo>
+                  <a:pt x="9427345" y="919670"/>
+                </a:lnTo>
+                <a:lnTo>
+                  <a:pt x="9443907" y="827675"/>
+                </a:lnTo>
+                <a:lnTo>
+                  <a:pt x="9460470" y="771128"/>
+                </a:lnTo>
+                <a:lnTo>
+                  <a:pt x="9477032" y="764635"/>
+                </a:lnTo>
+                <a:lnTo>
+                  <a:pt x="9493607" y="777464"/>
+                </a:lnTo>
+                <a:lnTo>
+                  <a:pt x="9510168" y="833499"/>
+                </a:lnTo>
+                <a:lnTo>
+                  <a:pt x="9526732" y="917643"/>
+                </a:lnTo>
+                <a:lnTo>
+                  <a:pt x="9543295" y="930646"/>
+                </a:lnTo>
+                <a:lnTo>
+                  <a:pt x="9559867" y="891173"/>
+                </a:lnTo>
+                <a:lnTo>
+                  <a:pt x="9576430" y="882953"/>
+                </a:lnTo>
+                <a:lnTo>
+                  <a:pt x="9592992" y="886193"/>
+                </a:lnTo>
+                <a:lnTo>
+                  <a:pt x="9609556" y="911331"/>
+                </a:lnTo>
+                <a:lnTo>
+                  <a:pt x="9626128" y="946467"/>
+                </a:lnTo>
+                <a:lnTo>
+                  <a:pt x="9642691" y="978989"/>
+                </a:lnTo>
+                <a:lnTo>
+                  <a:pt x="9659255" y="993495"/>
+                </a:lnTo>
+                <a:lnTo>
+                  <a:pt x="9675816" y="983127"/>
+                </a:lnTo>
+                <a:lnTo>
+                  <a:pt x="9692391" y="979882"/>
+                </a:lnTo>
+                <a:lnTo>
+                  <a:pt x="9708953" y="980467"/>
+                </a:lnTo>
+                <a:lnTo>
+                  <a:pt x="9725515" y="982003"/>
+                </a:lnTo>
+                <a:lnTo>
+                  <a:pt x="9742078" y="965150"/>
+                </a:lnTo>
+                <a:lnTo>
+                  <a:pt x="9758651" y="957208"/>
+                </a:lnTo>
+                <a:lnTo>
+                  <a:pt x="9775215" y="957468"/>
+                </a:lnTo>
+                <a:lnTo>
+                  <a:pt x="9791776" y="966673"/>
+                </a:lnTo>
+                <a:lnTo>
+                  <a:pt x="9808340" y="981713"/>
+                </a:lnTo>
+                <a:lnTo>
+                  <a:pt x="9824914" y="994326"/>
+                </a:lnTo>
+                <a:lnTo>
+                  <a:pt x="9841475" y="980890"/>
+                </a:lnTo>
+                <a:lnTo>
+                  <a:pt x="9858037" y="974757"/>
+                </a:lnTo>
+                <a:lnTo>
+                  <a:pt x="9874599" y="974534"/>
+                </a:lnTo>
+                <a:lnTo>
+                  <a:pt x="9891176" y="977449"/>
+                </a:lnTo>
+                <a:lnTo>
+                  <a:pt x="9907738" y="983574"/>
+                </a:lnTo>
+                <a:lnTo>
+                  <a:pt x="9924299" y="990694"/>
+                </a:lnTo>
+                <a:lnTo>
+                  <a:pt x="9940862" y="994906"/>
+                </a:lnTo>
+                <a:lnTo>
+                  <a:pt x="9957435" y="988086"/>
+                </a:lnTo>
+                <a:lnTo>
+                  <a:pt x="9973998" y="983409"/>
+                </a:lnTo>
+                <a:lnTo>
+                  <a:pt x="9990560" y="982560"/>
+                </a:lnTo>
+                <a:lnTo>
+                  <a:pt x="10007120" y="984750"/>
+                </a:lnTo>
+                <a:lnTo>
+                  <a:pt x="10023697" y="991701"/>
+                </a:lnTo>
+                <a:lnTo>
+                  <a:pt x="10040259" y="996938"/>
+                </a:lnTo>
+                <a:lnTo>
+                  <a:pt x="10056822" y="999543"/>
+                </a:lnTo>
+                <a:lnTo>
+                  <a:pt x="10073384" y="1000688"/>
+                </a:lnTo>
+                <a:lnTo>
+                  <a:pt x="10089956" y="992152"/>
+                </a:lnTo>
+                <a:lnTo>
+                  <a:pt x="10106520" y="990696"/>
+                </a:lnTo>
+                <a:lnTo>
+                  <a:pt x="10123082" y="990804"/>
+                </a:lnTo>
+                <a:lnTo>
+                  <a:pt x="10139645" y="986985"/>
+                </a:lnTo>
+                <a:lnTo>
+                  <a:pt x="10156219" y="985617"/>
+                </a:lnTo>
+                <a:lnTo>
+                  <a:pt x="10172782" y="986962"/>
+                </a:lnTo>
+                <a:lnTo>
+                  <a:pt x="10189345" y="994919"/>
+                </a:lnTo>
+                <a:lnTo>
+                  <a:pt x="10205906" y="998308"/>
+                </a:lnTo>
+                <a:lnTo>
+                  <a:pt x="10222480" y="994792"/>
+                </a:lnTo>
+                <a:lnTo>
+                  <a:pt x="10239042" y="990856"/>
+                </a:lnTo>
+                <a:lnTo>
+                  <a:pt x="10255606" y="988672"/>
+                </a:lnTo>
+                <a:lnTo>
+                  <a:pt x="10272169" y="988709"/>
+                </a:lnTo>
+                <a:lnTo>
+                  <a:pt x="10288743" y="990902"/>
+                </a:lnTo>
+                <a:lnTo>
+                  <a:pt x="10305305" y="976470"/>
+                </a:lnTo>
+                <a:lnTo>
+                  <a:pt x="10321867" y="947057"/>
+                </a:lnTo>
+                <a:lnTo>
+                  <a:pt x="10338429" y="878171"/>
+                </a:lnTo>
+                <a:lnTo>
+                  <a:pt x="10355004" y="857171"/>
+                </a:lnTo>
+                <a:lnTo>
+                  <a:pt x="10371565" y="936270"/>
+                </a:lnTo>
+                <a:lnTo>
+                  <a:pt x="10388129" y="921656"/>
+                </a:lnTo>
+                <a:lnTo>
+                  <a:pt x="10404690" y="892572"/>
+                </a:lnTo>
+                <a:lnTo>
+                  <a:pt x="10421265" y="846012"/>
+                </a:lnTo>
+                <a:lnTo>
+                  <a:pt x="10437827" y="839374"/>
+                </a:lnTo>
+                <a:lnTo>
+                  <a:pt x="10454388" y="850833"/>
+                </a:lnTo>
+                <a:lnTo>
+                  <a:pt x="10470952" y="905632"/>
+                </a:lnTo>
+                <a:lnTo>
+                  <a:pt x="10487525" y="934238"/>
+                </a:lnTo>
+                <a:lnTo>
+                  <a:pt x="10504087" y="877814"/>
+                </a:lnTo>
+                <a:lnTo>
+                  <a:pt x="10520651" y="854085"/>
+                </a:lnTo>
+                <a:lnTo>
+                  <a:pt x="10537212" y="853138"/>
                 </a:lnTo>
               </a:path>
             </a:pathLst>
@@ -10659,7 +10730,7 @@
         </p:nvSpPr>
         <p:spPr>
           <a:xfrm>
-            <a:off x="822960" y="1691640"/>
+            <a:off x="822960" y="1554480"/>
             <a:ext cx="2743200" cy="274320"/>
           </a:xfrm>
           <a:prstGeom prst="rect">
@@ -10694,7 +10765,7 @@
         </p:nvCxnSpPr>
         <p:spPr>
           <a:xfrm>
-            <a:off x="822960" y="4480560"/>
+            <a:off x="822960" y="4114800"/>
             <a:ext cx="10545775" cy="0"/>
           </a:xfrm>
           <a:prstGeom prst="line">
@@ -10729,8 +10800,8 @@
         </p:nvSpPr>
         <p:spPr>
           <a:xfrm>
-            <a:off x="831377" y="3562479"/>
-            <a:ext cx="10537358" cy="908763"/>
+            <a:off x="831377" y="3306889"/>
+            <a:ext cx="10537358" cy="799711"/>
           </a:xfrm>
           <a:custGeom>
             <a:avLst/>
@@ -10739,1806 +10810,1806 @@
             <a:cxnLst/>
             <a:rect l="l" t="t" r="r" b="b"/>
             <a:pathLst>
-              <a:path w="10537358" h="908763">
+              <a:path w="10537358" h="799711">
                 <a:moveTo>
-                  <a:pt x="0" y="812150"/>
+                  <a:pt x="0" y="714691"/>
                 </a:moveTo>
                 <a:lnTo>
-                  <a:pt x="19890" y="823328"/>
-                </a:lnTo>
-                <a:lnTo>
-                  <a:pt x="39759" y="840187"/>
-                </a:lnTo>
-                <a:lnTo>
-                  <a:pt x="59648" y="831985"/>
-                </a:lnTo>
-                <a:lnTo>
-                  <a:pt x="79517" y="835496"/>
-                </a:lnTo>
-                <a:lnTo>
-                  <a:pt x="99405" y="871422"/>
-                </a:lnTo>
-                <a:lnTo>
-                  <a:pt x="119272" y="849534"/>
-                </a:lnTo>
-                <a:lnTo>
-                  <a:pt x="139163" y="852052"/>
-                </a:lnTo>
-                <a:lnTo>
-                  <a:pt x="159032" y="878868"/>
-                </a:lnTo>
-                <a:lnTo>
-                  <a:pt x="178919" y="863450"/>
-                </a:lnTo>
-                <a:lnTo>
-                  <a:pt x="198788" y="854523"/>
-                </a:lnTo>
-                <a:lnTo>
-                  <a:pt x="218675" y="864346"/>
-                </a:lnTo>
-                <a:lnTo>
-                  <a:pt x="238542" y="876087"/>
-                </a:lnTo>
-                <a:lnTo>
-                  <a:pt x="258434" y="870650"/>
-                </a:lnTo>
-                <a:lnTo>
-                  <a:pt x="278304" y="875156"/>
-                </a:lnTo>
-                <a:lnTo>
-                  <a:pt x="298191" y="878338"/>
-                </a:lnTo>
-                <a:lnTo>
-                  <a:pt x="318062" y="867475"/>
-                </a:lnTo>
-                <a:lnTo>
-                  <a:pt x="337946" y="867561"/>
-                </a:lnTo>
-                <a:lnTo>
-                  <a:pt x="357816" y="880679"/>
-                </a:lnTo>
-                <a:lnTo>
-                  <a:pt x="377706" y="844124"/>
-                </a:lnTo>
-                <a:lnTo>
-                  <a:pt x="397574" y="814984"/>
-                </a:lnTo>
-                <a:lnTo>
-                  <a:pt x="417465" y="811231"/>
-                </a:lnTo>
-                <a:lnTo>
-                  <a:pt x="437332" y="821874"/>
-                </a:lnTo>
-                <a:lnTo>
-                  <a:pt x="457219" y="860182"/>
-                </a:lnTo>
-                <a:lnTo>
-                  <a:pt x="477090" y="892649"/>
-                </a:lnTo>
-                <a:lnTo>
-                  <a:pt x="496976" y="881595"/>
-                </a:lnTo>
-                <a:lnTo>
-                  <a:pt x="516847" y="871891"/>
-                </a:lnTo>
-                <a:lnTo>
-                  <a:pt x="536737" y="871797"/>
-                </a:lnTo>
-                <a:lnTo>
-                  <a:pt x="556604" y="878683"/>
-                </a:lnTo>
-                <a:lnTo>
-                  <a:pt x="576491" y="882740"/>
-                </a:lnTo>
-                <a:lnTo>
-                  <a:pt x="596360" y="882621"/>
-                </a:lnTo>
-                <a:lnTo>
-                  <a:pt x="616248" y="893204"/>
-                </a:lnTo>
-                <a:lnTo>
-                  <a:pt x="636120" y="875139"/>
-                </a:lnTo>
-                <a:lnTo>
-                  <a:pt x="656007" y="862501"/>
-                </a:lnTo>
-                <a:lnTo>
-                  <a:pt x="675874" y="858229"/>
-                </a:lnTo>
-                <a:lnTo>
-                  <a:pt x="695763" y="852518"/>
-                </a:lnTo>
-                <a:lnTo>
-                  <a:pt x="715632" y="852181"/>
-                </a:lnTo>
-                <a:lnTo>
-                  <a:pt x="735520" y="858964"/>
-                </a:lnTo>
-                <a:lnTo>
-                  <a:pt x="755391" y="875002"/>
-                </a:lnTo>
-                <a:lnTo>
-                  <a:pt x="775279" y="896165"/>
-                </a:lnTo>
-                <a:lnTo>
-                  <a:pt x="795145" y="893159"/>
-                </a:lnTo>
-                <a:lnTo>
-                  <a:pt x="815036" y="890109"/>
-                </a:lnTo>
-                <a:lnTo>
-                  <a:pt x="834902" y="874468"/>
-                </a:lnTo>
-                <a:lnTo>
-                  <a:pt x="854793" y="872064"/>
-                </a:lnTo>
-                <a:lnTo>
-                  <a:pt x="874661" y="879262"/>
-                </a:lnTo>
-                <a:lnTo>
-                  <a:pt x="894547" y="877876"/>
-                </a:lnTo>
-                <a:lnTo>
-                  <a:pt x="914419" y="861599"/>
-                </a:lnTo>
-                <a:lnTo>
-                  <a:pt x="934305" y="861643"/>
-                </a:lnTo>
-                <a:lnTo>
-                  <a:pt x="954175" y="874601"/>
-                </a:lnTo>
-                <a:lnTo>
-                  <a:pt x="974066" y="890634"/>
-                </a:lnTo>
-                <a:lnTo>
-                  <a:pt x="993933" y="891885"/>
-                </a:lnTo>
-                <a:lnTo>
-                  <a:pt x="1013821" y="894964"/>
-                </a:lnTo>
-                <a:lnTo>
-                  <a:pt x="1033689" y="881972"/>
-                </a:lnTo>
-                <a:lnTo>
-                  <a:pt x="1053577" y="873032"/>
-                </a:lnTo>
-                <a:lnTo>
-                  <a:pt x="1073447" y="876169"/>
-                </a:lnTo>
-                <a:lnTo>
-                  <a:pt x="1093336" y="853819"/>
-                </a:lnTo>
-                <a:lnTo>
-                  <a:pt x="1113205" y="844339"/>
-                </a:lnTo>
-                <a:lnTo>
-                  <a:pt x="1133092" y="845579"/>
-                </a:lnTo>
-                <a:lnTo>
-                  <a:pt x="1152959" y="839263"/>
-                </a:lnTo>
-                <a:lnTo>
-                  <a:pt x="1172851" y="826021"/>
-                </a:lnTo>
-                <a:lnTo>
-                  <a:pt x="1192720" y="826626"/>
-                </a:lnTo>
-                <a:lnTo>
-                  <a:pt x="1212609" y="841556"/>
-                </a:lnTo>
-                <a:lnTo>
-                  <a:pt x="1232477" y="820128"/>
-                </a:lnTo>
-                <a:lnTo>
-                  <a:pt x="1252364" y="821245"/>
-                </a:lnTo>
-                <a:lnTo>
-                  <a:pt x="1272232" y="851552"/>
-                </a:lnTo>
-                <a:lnTo>
-                  <a:pt x="1292121" y="818921"/>
-                </a:lnTo>
-                <a:lnTo>
-                  <a:pt x="1311991" y="806923"/>
-                </a:lnTo>
-                <a:lnTo>
-                  <a:pt x="1331879" y="813886"/>
-                </a:lnTo>
-                <a:lnTo>
-                  <a:pt x="1351750" y="857970"/>
-                </a:lnTo>
-                <a:lnTo>
-                  <a:pt x="1371636" y="846987"/>
-                </a:lnTo>
-                <a:lnTo>
-                  <a:pt x="1391506" y="838861"/>
-                </a:lnTo>
-                <a:lnTo>
-                  <a:pt x="1411392" y="819621"/>
-                </a:lnTo>
-                <a:lnTo>
-                  <a:pt x="1431262" y="771399"/>
-                </a:lnTo>
-                <a:lnTo>
-                  <a:pt x="1451152" y="769545"/>
-                </a:lnTo>
-                <a:lnTo>
-                  <a:pt x="1471021" y="800826"/>
-                </a:lnTo>
-                <a:lnTo>
-                  <a:pt x="1490907" y="768270"/>
-                </a:lnTo>
-                <a:lnTo>
-                  <a:pt x="1510777" y="764531"/>
-                </a:lnTo>
-                <a:lnTo>
-                  <a:pt x="1530666" y="790211"/>
-                </a:lnTo>
-                <a:lnTo>
-                  <a:pt x="1550534" y="846704"/>
-                </a:lnTo>
-                <a:lnTo>
-                  <a:pt x="1570424" y="852191"/>
-                </a:lnTo>
-                <a:lnTo>
-                  <a:pt x="1590291" y="822532"/>
-                </a:lnTo>
-                <a:lnTo>
-                  <a:pt x="1610181" y="820354"/>
-                </a:lnTo>
-                <a:lnTo>
-                  <a:pt x="1630048" y="817363"/>
-                </a:lnTo>
-                <a:lnTo>
-                  <a:pt x="1649936" y="801354"/>
-                </a:lnTo>
-                <a:lnTo>
-                  <a:pt x="1669805" y="800774"/>
-                </a:lnTo>
-                <a:lnTo>
-                  <a:pt x="1689695" y="814676"/>
-                </a:lnTo>
-                <a:lnTo>
-                  <a:pt x="1709563" y="847489"/>
-                </a:lnTo>
-                <a:lnTo>
-                  <a:pt x="1729453" y="813192"/>
-                </a:lnTo>
-                <a:lnTo>
-                  <a:pt x="1749320" y="750866"/>
-                </a:lnTo>
-                <a:lnTo>
-                  <a:pt x="1769208" y="689264"/>
-                </a:lnTo>
-                <a:lnTo>
-                  <a:pt x="1789078" y="627053"/>
-                </a:lnTo>
-                <a:lnTo>
-                  <a:pt x="1808966" y="541065"/>
-                </a:lnTo>
-                <a:lnTo>
-                  <a:pt x="1828837" y="504097"/>
-                </a:lnTo>
-                <a:lnTo>
-                  <a:pt x="1848723" y="513509"/>
-                </a:lnTo>
-                <a:lnTo>
-                  <a:pt x="1868593" y="669845"/>
-                </a:lnTo>
-                <a:lnTo>
-                  <a:pt x="1888480" y="592424"/>
-                </a:lnTo>
-                <a:lnTo>
-                  <a:pt x="1908348" y="568393"/>
-                </a:lnTo>
-                <a:lnTo>
-                  <a:pt x="1928238" y="635313"/>
-                </a:lnTo>
-                <a:lnTo>
-                  <a:pt x="1948107" y="649311"/>
-                </a:lnTo>
-                <a:lnTo>
-                  <a:pt x="1967996" y="565441"/>
-                </a:lnTo>
-                <a:lnTo>
-                  <a:pt x="1987865" y="592727"/>
-                </a:lnTo>
-                <a:lnTo>
-                  <a:pt x="2007753" y="620772"/>
-                </a:lnTo>
-                <a:lnTo>
-                  <a:pt x="2027620" y="540431"/>
-                </a:lnTo>
-                <a:lnTo>
-                  <a:pt x="2047512" y="597766"/>
-                </a:lnTo>
-                <a:lnTo>
-                  <a:pt x="2067376" y="815360"/>
-                </a:lnTo>
-                <a:lnTo>
-                  <a:pt x="2087267" y="819072"/>
-                </a:lnTo>
-                <a:lnTo>
-                  <a:pt x="2107138" y="748464"/>
-                </a:lnTo>
-                <a:lnTo>
-                  <a:pt x="2127024" y="676731"/>
-                </a:lnTo>
-                <a:lnTo>
-                  <a:pt x="2146893" y="621697"/>
-                </a:lnTo>
-                <a:lnTo>
-                  <a:pt x="2166782" y="576061"/>
-                </a:lnTo>
-                <a:lnTo>
-                  <a:pt x="2186651" y="561339"/>
-                </a:lnTo>
-                <a:lnTo>
-                  <a:pt x="2206538" y="564402"/>
-                </a:lnTo>
-                <a:lnTo>
-                  <a:pt x="2226408" y="601078"/>
-                </a:lnTo>
-                <a:lnTo>
-                  <a:pt x="2246297" y="619556"/>
-                </a:lnTo>
-                <a:lnTo>
-                  <a:pt x="2266166" y="568866"/>
-                </a:lnTo>
-                <a:lnTo>
-                  <a:pt x="2286055" y="534963"/>
-                </a:lnTo>
-                <a:lnTo>
-                  <a:pt x="2305922" y="469388"/>
-                </a:lnTo>
-                <a:lnTo>
-                  <a:pt x="2325810" y="389005"/>
-                </a:lnTo>
-                <a:lnTo>
-                  <a:pt x="2345678" y="355627"/>
-                </a:lnTo>
-                <a:lnTo>
-                  <a:pt x="2365569" y="354997"/>
-                </a:lnTo>
-                <a:lnTo>
-                  <a:pt x="2385438" y="385157"/>
-                </a:lnTo>
-                <a:lnTo>
-                  <a:pt x="2405325" y="540806"/>
-                </a:lnTo>
-                <a:lnTo>
-                  <a:pt x="2425193" y="584001"/>
-                </a:lnTo>
-                <a:lnTo>
-                  <a:pt x="2445083" y="573030"/>
-                </a:lnTo>
-                <a:lnTo>
-                  <a:pt x="2464951" y="591942"/>
-                </a:lnTo>
-                <a:lnTo>
-                  <a:pt x="2484844" y="573102"/>
-                </a:lnTo>
-                <a:lnTo>
-                  <a:pt x="2504708" y="570939"/>
-                </a:lnTo>
-                <a:lnTo>
-                  <a:pt x="2524596" y="566873"/>
-                </a:lnTo>
-                <a:lnTo>
-                  <a:pt x="2544468" y="568160"/>
-                </a:lnTo>
-                <a:lnTo>
-                  <a:pt x="2564353" y="682094"/>
-                </a:lnTo>
-                <a:lnTo>
-                  <a:pt x="2584223" y="658948"/>
-                </a:lnTo>
-                <a:lnTo>
-                  <a:pt x="2604112" y="641084"/>
-                </a:lnTo>
-                <a:lnTo>
-                  <a:pt x="2623982" y="738189"/>
-                </a:lnTo>
-                <a:lnTo>
-                  <a:pt x="2643869" y="592434"/>
-                </a:lnTo>
-                <a:lnTo>
-                  <a:pt x="2663737" y="445161"/>
-                </a:lnTo>
-                <a:lnTo>
-                  <a:pt x="2683623" y="265426"/>
-                </a:lnTo>
-                <a:lnTo>
-                  <a:pt x="2703497" y="52891"/>
+                  <a:pt x="19890" y="724528"/>
+                </a:lnTo>
+                <a:lnTo>
+                  <a:pt x="39759" y="739364"/>
+                </a:lnTo>
+                <a:lnTo>
+                  <a:pt x="59648" y="732146"/>
+                </a:lnTo>
+                <a:lnTo>
+                  <a:pt x="79517" y="735236"/>
+                </a:lnTo>
+                <a:lnTo>
+                  <a:pt x="99405" y="766851"/>
+                </a:lnTo>
+                <a:lnTo>
+                  <a:pt x="119272" y="747589"/>
+                </a:lnTo>
+                <a:lnTo>
+                  <a:pt x="139163" y="749806"/>
+                </a:lnTo>
+                <a:lnTo>
+                  <a:pt x="159032" y="773403"/>
+                </a:lnTo>
+                <a:lnTo>
+                  <a:pt x="178919" y="759836"/>
+                </a:lnTo>
+                <a:lnTo>
+                  <a:pt x="198788" y="751980"/>
+                </a:lnTo>
+                <a:lnTo>
+                  <a:pt x="218675" y="760624"/>
+                </a:lnTo>
+                <a:lnTo>
+                  <a:pt x="238542" y="770956"/>
+                </a:lnTo>
+                <a:lnTo>
+                  <a:pt x="258434" y="766172"/>
+                </a:lnTo>
+                <a:lnTo>
+                  <a:pt x="278304" y="770137"/>
+                </a:lnTo>
+                <a:lnTo>
+                  <a:pt x="298191" y="772937"/>
+                </a:lnTo>
+                <a:lnTo>
+                  <a:pt x="318062" y="763378"/>
+                </a:lnTo>
+                <a:lnTo>
+                  <a:pt x="337946" y="763454"/>
+                </a:lnTo>
+                <a:lnTo>
+                  <a:pt x="357816" y="774997"/>
+                </a:lnTo>
+                <a:lnTo>
+                  <a:pt x="377706" y="742829"/>
+                </a:lnTo>
+                <a:lnTo>
+                  <a:pt x="397574" y="717186"/>
+                </a:lnTo>
+                <a:lnTo>
+                  <a:pt x="417465" y="713883"/>
+                </a:lnTo>
+                <a:lnTo>
+                  <a:pt x="437332" y="723249"/>
+                </a:lnTo>
+                <a:lnTo>
+                  <a:pt x="457219" y="756960"/>
+                </a:lnTo>
+                <a:lnTo>
+                  <a:pt x="477090" y="785531"/>
+                </a:lnTo>
+                <a:lnTo>
+                  <a:pt x="496976" y="775803"/>
+                </a:lnTo>
+                <a:lnTo>
+                  <a:pt x="516847" y="767264"/>
+                </a:lnTo>
+                <a:lnTo>
+                  <a:pt x="536737" y="767181"/>
+                </a:lnTo>
+                <a:lnTo>
+                  <a:pt x="556604" y="773241"/>
+                </a:lnTo>
+                <a:lnTo>
+                  <a:pt x="576491" y="776811"/>
+                </a:lnTo>
+                <a:lnTo>
+                  <a:pt x="596360" y="776706"/>
+                </a:lnTo>
+                <a:lnTo>
+                  <a:pt x="616248" y="786019"/>
+                </a:lnTo>
+                <a:lnTo>
+                  <a:pt x="636120" y="770122"/>
+                </a:lnTo>
+                <a:lnTo>
+                  <a:pt x="656007" y="759001"/>
+                </a:lnTo>
+                <a:lnTo>
+                  <a:pt x="675874" y="755241"/>
+                </a:lnTo>
+                <a:lnTo>
+                  <a:pt x="695763" y="750216"/>
+                </a:lnTo>
+                <a:lnTo>
+                  <a:pt x="715632" y="749919"/>
+                </a:lnTo>
+                <a:lnTo>
+                  <a:pt x="735520" y="755888"/>
+                </a:lnTo>
+                <a:lnTo>
+                  <a:pt x="755391" y="770001"/>
+                </a:lnTo>
+                <a:lnTo>
+                  <a:pt x="775279" y="788625"/>
+                </a:lnTo>
+                <a:lnTo>
+                  <a:pt x="795145" y="785979"/>
+                </a:lnTo>
+                <a:lnTo>
+                  <a:pt x="815036" y="783296"/>
+                </a:lnTo>
+                <a:lnTo>
+                  <a:pt x="834902" y="769531"/>
+                </a:lnTo>
+                <a:lnTo>
+                  <a:pt x="854793" y="767416"/>
+                </a:lnTo>
+                <a:lnTo>
+                  <a:pt x="874661" y="773750"/>
+                </a:lnTo>
+                <a:lnTo>
+                  <a:pt x="894547" y="772530"/>
+                </a:lnTo>
+                <a:lnTo>
+                  <a:pt x="914419" y="758207"/>
+                </a:lnTo>
+                <a:lnTo>
+                  <a:pt x="934305" y="758246"/>
+                </a:lnTo>
+                <a:lnTo>
+                  <a:pt x="954175" y="769649"/>
+                </a:lnTo>
+                <a:lnTo>
+                  <a:pt x="974066" y="783758"/>
+                </a:lnTo>
+                <a:lnTo>
+                  <a:pt x="993933" y="784859"/>
+                </a:lnTo>
+                <a:lnTo>
+                  <a:pt x="1013821" y="787568"/>
+                </a:lnTo>
+                <a:lnTo>
+                  <a:pt x="1033689" y="776135"/>
+                </a:lnTo>
+                <a:lnTo>
+                  <a:pt x="1053577" y="768268"/>
+                </a:lnTo>
+                <a:lnTo>
+                  <a:pt x="1073447" y="771028"/>
+                </a:lnTo>
+                <a:lnTo>
+                  <a:pt x="1093336" y="751360"/>
+                </a:lnTo>
+                <a:lnTo>
+                  <a:pt x="1113205" y="743018"/>
+                </a:lnTo>
+                <a:lnTo>
+                  <a:pt x="1133092" y="744109"/>
+                </a:lnTo>
+                <a:lnTo>
+                  <a:pt x="1152959" y="738551"/>
+                </a:lnTo>
+                <a:lnTo>
+                  <a:pt x="1172851" y="726898"/>
+                </a:lnTo>
+                <a:lnTo>
+                  <a:pt x="1192720" y="727430"/>
+                </a:lnTo>
+                <a:lnTo>
+                  <a:pt x="1212609" y="740569"/>
+                </a:lnTo>
+                <a:lnTo>
+                  <a:pt x="1232477" y="721712"/>
+                </a:lnTo>
+                <a:lnTo>
+                  <a:pt x="1252364" y="722695"/>
+                </a:lnTo>
+                <a:lnTo>
+                  <a:pt x="1272232" y="749366"/>
+                </a:lnTo>
+                <a:lnTo>
+                  <a:pt x="1292121" y="720650"/>
+                </a:lnTo>
+                <a:lnTo>
+                  <a:pt x="1311991" y="710092"/>
+                </a:lnTo>
+                <a:lnTo>
+                  <a:pt x="1331879" y="716219"/>
+                </a:lnTo>
+                <a:lnTo>
+                  <a:pt x="1351750" y="755013"/>
+                </a:lnTo>
+                <a:lnTo>
+                  <a:pt x="1371636" y="745348"/>
+                </a:lnTo>
+                <a:lnTo>
+                  <a:pt x="1391506" y="738198"/>
+                </a:lnTo>
+                <a:lnTo>
+                  <a:pt x="1411392" y="721266"/>
+                </a:lnTo>
+                <a:lnTo>
+                  <a:pt x="1431262" y="678830"/>
+                </a:lnTo>
+                <a:lnTo>
+                  <a:pt x="1451152" y="677199"/>
+                </a:lnTo>
+                <a:lnTo>
+                  <a:pt x="1471021" y="704726"/>
+                </a:lnTo>
+                <a:lnTo>
+                  <a:pt x="1490907" y="676077"/>
+                </a:lnTo>
+                <a:lnTo>
+                  <a:pt x="1510777" y="672787"/>
+                </a:lnTo>
+                <a:lnTo>
+                  <a:pt x="1530666" y="695385"/>
+                </a:lnTo>
+                <a:lnTo>
+                  <a:pt x="1550534" y="745100"/>
+                </a:lnTo>
+                <a:lnTo>
+                  <a:pt x="1570424" y="749927"/>
+                </a:lnTo>
+                <a:lnTo>
+                  <a:pt x="1590291" y="723828"/>
+                </a:lnTo>
+                <a:lnTo>
+                  <a:pt x="1610181" y="721911"/>
+                </a:lnTo>
+                <a:lnTo>
+                  <a:pt x="1630048" y="719279"/>
+                </a:lnTo>
+                <a:lnTo>
+                  <a:pt x="1649936" y="705191"/>
+                </a:lnTo>
+                <a:lnTo>
+                  <a:pt x="1669805" y="704681"/>
+                </a:lnTo>
+                <a:lnTo>
+                  <a:pt x="1689695" y="716915"/>
+                </a:lnTo>
+                <a:lnTo>
+                  <a:pt x="1709563" y="745790"/>
+                </a:lnTo>
+                <a:lnTo>
+                  <a:pt x="1729453" y="715609"/>
+                </a:lnTo>
+                <a:lnTo>
+                  <a:pt x="1749320" y="660762"/>
+                </a:lnTo>
+                <a:lnTo>
+                  <a:pt x="1769208" y="606552"/>
+                </a:lnTo>
+                <a:lnTo>
+                  <a:pt x="1789078" y="551806"/>
+                </a:lnTo>
+                <a:lnTo>
+                  <a:pt x="1808966" y="476136"/>
+                </a:lnTo>
+                <a:lnTo>
+                  <a:pt x="1828837" y="443605"/>
+                </a:lnTo>
+                <a:lnTo>
+                  <a:pt x="1848723" y="451888"/>
+                </a:lnTo>
+                <a:lnTo>
+                  <a:pt x="1868593" y="589464"/>
+                </a:lnTo>
+                <a:lnTo>
+                  <a:pt x="1888480" y="521332"/>
+                </a:lnTo>
+                <a:lnTo>
+                  <a:pt x="1908348" y="500186"/>
+                </a:lnTo>
+                <a:lnTo>
+                  <a:pt x="1928238" y="559075"/>
+                </a:lnTo>
+                <a:lnTo>
+                  <a:pt x="1948107" y="571394"/>
+                </a:lnTo>
+                <a:lnTo>
+                  <a:pt x="1967996" y="497588"/>
+                </a:lnTo>
+                <a:lnTo>
+                  <a:pt x="1987865" y="521600"/>
+                </a:lnTo>
+                <a:lnTo>
+                  <a:pt x="2007753" y="546279"/>
+                </a:lnTo>
+                <a:lnTo>
+                  <a:pt x="2027620" y="475579"/>
+                </a:lnTo>
+                <a:lnTo>
+                  <a:pt x="2047512" y="526034"/>
+                </a:lnTo>
+                <a:lnTo>
+                  <a:pt x="2067376" y="717517"/>
+                </a:lnTo>
+                <a:lnTo>
+                  <a:pt x="2087267" y="720783"/>
+                </a:lnTo>
+                <a:lnTo>
+                  <a:pt x="2107138" y="658648"/>
+                </a:lnTo>
+                <a:lnTo>
+                  <a:pt x="2127024" y="595523"/>
+                </a:lnTo>
+                <a:lnTo>
+                  <a:pt x="2146893" y="547093"/>
+                </a:lnTo>
+                <a:lnTo>
+                  <a:pt x="2166782" y="506933"/>
+                </a:lnTo>
+                <a:lnTo>
+                  <a:pt x="2186651" y="493978"/>
+                </a:lnTo>
+                <a:lnTo>
+                  <a:pt x="2206538" y="496674"/>
+                </a:lnTo>
+                <a:lnTo>
+                  <a:pt x="2226408" y="528948"/>
+                </a:lnTo>
+                <a:lnTo>
+                  <a:pt x="2246297" y="545209"/>
+                </a:lnTo>
+                <a:lnTo>
+                  <a:pt x="2266166" y="500602"/>
+                </a:lnTo>
+                <a:lnTo>
+                  <a:pt x="2286055" y="470767"/>
+                </a:lnTo>
+                <a:lnTo>
+                  <a:pt x="2305922" y="413061"/>
+                </a:lnTo>
+                <a:lnTo>
+                  <a:pt x="2325810" y="342324"/>
+                </a:lnTo>
+                <a:lnTo>
+                  <a:pt x="2345678" y="312952"/>
+                </a:lnTo>
+                <a:lnTo>
+                  <a:pt x="2365569" y="312397"/>
+                </a:lnTo>
+                <a:lnTo>
+                  <a:pt x="2385438" y="338938"/>
+                </a:lnTo>
+                <a:lnTo>
+                  <a:pt x="2405325" y="475909"/>
+                </a:lnTo>
+                <a:lnTo>
+                  <a:pt x="2425193" y="513920"/>
+                </a:lnTo>
+                <a:lnTo>
+                  <a:pt x="2445083" y="504266"/>
+                </a:lnTo>
+                <a:lnTo>
+                  <a:pt x="2464951" y="520908"/>
+                </a:lnTo>
+                <a:lnTo>
+                  <a:pt x="2484844" y="504330"/>
+                </a:lnTo>
+                <a:lnTo>
+                  <a:pt x="2504708" y="502426"/>
+                </a:lnTo>
+                <a:lnTo>
+                  <a:pt x="2524596" y="498848"/>
+                </a:lnTo>
+                <a:lnTo>
+                  <a:pt x="2544468" y="499980"/>
+                </a:lnTo>
+                <a:lnTo>
+                  <a:pt x="2564353" y="600242"/>
+                </a:lnTo>
+                <a:lnTo>
+                  <a:pt x="2584223" y="579874"/>
+                </a:lnTo>
+                <a:lnTo>
+                  <a:pt x="2604112" y="564153"/>
+                </a:lnTo>
+                <a:lnTo>
+                  <a:pt x="2623982" y="649606"/>
+                </a:lnTo>
+                <a:lnTo>
+                  <a:pt x="2643869" y="521342"/>
+                </a:lnTo>
+                <a:lnTo>
+                  <a:pt x="2663737" y="391741"/>
+                </a:lnTo>
+                <a:lnTo>
+                  <a:pt x="2683623" y="233574"/>
+                </a:lnTo>
+                <a:lnTo>
+                  <a:pt x="2703497" y="46544"/>
                 </a:lnTo>
                 <a:lnTo>
                   <a:pt x="2723383" y="0"/>
                 </a:lnTo>
                 <a:lnTo>
-                  <a:pt x="2743253" y="61909"/>
-                </a:lnTo>
-                <a:lnTo>
-                  <a:pt x="2763143" y="260634"/>
-                </a:lnTo>
-                <a:lnTo>
-                  <a:pt x="2783007" y="241842"/>
-                </a:lnTo>
-                <a:lnTo>
-                  <a:pt x="2802899" y="366930"/>
-                </a:lnTo>
-                <a:lnTo>
-                  <a:pt x="2822768" y="661780"/>
-                </a:lnTo>
-                <a:lnTo>
-                  <a:pt x="2842656" y="612523"/>
-                </a:lnTo>
-                <a:lnTo>
-                  <a:pt x="2862524" y="613511"/>
-                </a:lnTo>
-                <a:lnTo>
-                  <a:pt x="2882412" y="660619"/>
-                </a:lnTo>
-                <a:lnTo>
-                  <a:pt x="2902281" y="697108"/>
-                </a:lnTo>
-                <a:lnTo>
-                  <a:pt x="2922174" y="565935"/>
-                </a:lnTo>
-                <a:lnTo>
-                  <a:pt x="2942039" y="430921"/>
-                </a:lnTo>
-                <a:lnTo>
-                  <a:pt x="2961927" y="394468"/>
-                </a:lnTo>
-                <a:lnTo>
-                  <a:pt x="2981797" y="518788"/>
-                </a:lnTo>
-                <a:lnTo>
-                  <a:pt x="3001683" y="788365"/>
-                </a:lnTo>
-                <a:lnTo>
-                  <a:pt x="3021554" y="799790"/>
-                </a:lnTo>
-                <a:lnTo>
-                  <a:pt x="3041441" y="597680"/>
-                </a:lnTo>
-                <a:lnTo>
-                  <a:pt x="3061312" y="559254"/>
-                </a:lnTo>
-                <a:lnTo>
-                  <a:pt x="3081200" y="622263"/>
-                </a:lnTo>
-                <a:lnTo>
-                  <a:pt x="3101068" y="705154"/>
-                </a:lnTo>
-                <a:lnTo>
-                  <a:pt x="3120954" y="649078"/>
-                </a:lnTo>
-                <a:lnTo>
-                  <a:pt x="3140827" y="620417"/>
-                </a:lnTo>
-                <a:lnTo>
-                  <a:pt x="3160713" y="619160"/>
-                </a:lnTo>
-                <a:lnTo>
-                  <a:pt x="3180585" y="634887"/>
-                </a:lnTo>
-                <a:lnTo>
-                  <a:pt x="3200473" y="707799"/>
-                </a:lnTo>
-                <a:lnTo>
-                  <a:pt x="3220339" y="647276"/>
-                </a:lnTo>
-                <a:lnTo>
-                  <a:pt x="3240229" y="591713"/>
-                </a:lnTo>
-                <a:lnTo>
-                  <a:pt x="3260096" y="581826"/>
-                </a:lnTo>
-                <a:lnTo>
-                  <a:pt x="3279987" y="583773"/>
-                </a:lnTo>
-                <a:lnTo>
-                  <a:pt x="3299855" y="616891"/>
-                </a:lnTo>
-                <a:lnTo>
-                  <a:pt x="3319744" y="685920"/>
-                </a:lnTo>
-                <a:lnTo>
-                  <a:pt x="3339614" y="773853"/>
-                </a:lnTo>
-                <a:lnTo>
-                  <a:pt x="3359500" y="696476"/>
-                </a:lnTo>
-                <a:lnTo>
-                  <a:pt x="3379370" y="665769"/>
-                </a:lnTo>
-                <a:lnTo>
-                  <a:pt x="3399258" y="661427"/>
-                </a:lnTo>
-                <a:lnTo>
-                  <a:pt x="3419129" y="669628"/>
-                </a:lnTo>
-                <a:lnTo>
-                  <a:pt x="3439014" y="702913"/>
-                </a:lnTo>
-                <a:lnTo>
-                  <a:pt x="3458885" y="714844"/>
-                </a:lnTo>
-                <a:lnTo>
-                  <a:pt x="3478771" y="727774"/>
-                </a:lnTo>
-                <a:lnTo>
-                  <a:pt x="3498642" y="767425"/>
-                </a:lnTo>
-                <a:lnTo>
-                  <a:pt x="3518531" y="803616"/>
-                </a:lnTo>
-                <a:lnTo>
-                  <a:pt x="3538398" y="809264"/>
-                </a:lnTo>
-                <a:lnTo>
-                  <a:pt x="3558286" y="809586"/>
-                </a:lnTo>
-                <a:lnTo>
-                  <a:pt x="3578157" y="820980"/>
-                </a:lnTo>
-                <a:lnTo>
-                  <a:pt x="3598044" y="827790"/>
-                </a:lnTo>
-                <a:lnTo>
-                  <a:pt x="3617911" y="824484"/>
-                </a:lnTo>
-                <a:lnTo>
-                  <a:pt x="3637801" y="829273"/>
-                </a:lnTo>
-                <a:lnTo>
-                  <a:pt x="3657670" y="860292"/>
-                </a:lnTo>
-                <a:lnTo>
-                  <a:pt x="3677560" y="866010"/>
-                </a:lnTo>
-                <a:lnTo>
-                  <a:pt x="3695773" y="823844"/>
-                </a:lnTo>
-                <a:lnTo>
-                  <a:pt x="3712338" y="797347"/>
-                </a:lnTo>
-                <a:lnTo>
-                  <a:pt x="3728911" y="783913"/>
-                </a:lnTo>
-                <a:lnTo>
-                  <a:pt x="3745475" y="782739"/>
-                </a:lnTo>
-                <a:lnTo>
-                  <a:pt x="3762036" y="789287"/>
-                </a:lnTo>
-                <a:lnTo>
-                  <a:pt x="3778601" y="815639"/>
-                </a:lnTo>
-                <a:lnTo>
-                  <a:pt x="3795172" y="848555"/>
-                </a:lnTo>
-                <a:lnTo>
-                  <a:pt x="3811736" y="868597"/>
-                </a:lnTo>
-                <a:lnTo>
-                  <a:pt x="3828301" y="884995"/>
-                </a:lnTo>
-                <a:lnTo>
-                  <a:pt x="3844862" y="862420"/>
-                </a:lnTo>
-                <a:lnTo>
-                  <a:pt x="3861438" y="835438"/>
-                </a:lnTo>
-                <a:lnTo>
-                  <a:pt x="3877998" y="817656"/>
-                </a:lnTo>
-                <a:lnTo>
-                  <a:pt x="3894563" y="800649"/>
-                </a:lnTo>
-                <a:lnTo>
-                  <a:pt x="3911121" y="790929"/>
-                </a:lnTo>
-                <a:lnTo>
-                  <a:pt x="3927700" y="790935"/>
-                </a:lnTo>
-                <a:lnTo>
-                  <a:pt x="3944260" y="800189"/>
-                </a:lnTo>
-                <a:lnTo>
-                  <a:pt x="3960825" y="821896"/>
-                </a:lnTo>
-                <a:lnTo>
-                  <a:pt x="3977386" y="851843"/>
-                </a:lnTo>
-                <a:lnTo>
-                  <a:pt x="3993961" y="832511"/>
-                </a:lnTo>
-                <a:lnTo>
-                  <a:pt x="4010524" y="722203"/>
-                </a:lnTo>
-                <a:lnTo>
-                  <a:pt x="4027086" y="625663"/>
-                </a:lnTo>
-                <a:lnTo>
-                  <a:pt x="4043648" y="590776"/>
-                </a:lnTo>
-                <a:lnTo>
-                  <a:pt x="4060220" y="590845"/>
-                </a:lnTo>
-                <a:lnTo>
-                  <a:pt x="4076784" y="614081"/>
-                </a:lnTo>
-                <a:lnTo>
-                  <a:pt x="4093348" y="656726"/>
-                </a:lnTo>
-                <a:lnTo>
-                  <a:pt x="4109912" y="718869"/>
-                </a:lnTo>
-                <a:lnTo>
-                  <a:pt x="4126485" y="748168"/>
-                </a:lnTo>
-                <a:lnTo>
-                  <a:pt x="4143047" y="640406"/>
-                </a:lnTo>
-                <a:lnTo>
-                  <a:pt x="4159611" y="547799"/>
-                </a:lnTo>
-                <a:lnTo>
-                  <a:pt x="4176171" y="524663"/>
-                </a:lnTo>
-                <a:lnTo>
-                  <a:pt x="4192747" y="532361"/>
-                </a:lnTo>
-                <a:lnTo>
-                  <a:pt x="4209310" y="586485"/>
-                </a:lnTo>
-                <a:lnTo>
-                  <a:pt x="4225873" y="659643"/>
-                </a:lnTo>
-                <a:lnTo>
-                  <a:pt x="4242434" y="750978"/>
-                </a:lnTo>
-                <a:lnTo>
-                  <a:pt x="4259010" y="848246"/>
-                </a:lnTo>
-                <a:lnTo>
-                  <a:pt x="4275573" y="783280"/>
-                </a:lnTo>
-                <a:lnTo>
-                  <a:pt x="4292136" y="732340"/>
-                </a:lnTo>
-                <a:lnTo>
-                  <a:pt x="4308698" y="701910"/>
-                </a:lnTo>
-                <a:lnTo>
-                  <a:pt x="4325273" y="692241"/>
-                </a:lnTo>
-                <a:lnTo>
-                  <a:pt x="4341833" y="693776"/>
-                </a:lnTo>
-                <a:lnTo>
-                  <a:pt x="4358397" y="720734"/>
-                </a:lnTo>
-                <a:lnTo>
-                  <a:pt x="4374961" y="745787"/>
-                </a:lnTo>
-                <a:lnTo>
-                  <a:pt x="4391533" y="702921"/>
-                </a:lnTo>
-                <a:lnTo>
-                  <a:pt x="4408097" y="667544"/>
-                </a:lnTo>
-                <a:lnTo>
-                  <a:pt x="4424658" y="649897"/>
-                </a:lnTo>
-                <a:lnTo>
-                  <a:pt x="4441224" y="607266"/>
-                </a:lnTo>
-                <a:lnTo>
-                  <a:pt x="4457794" y="500444"/>
-                </a:lnTo>
-                <a:lnTo>
-                  <a:pt x="4474360" y="358546"/>
-                </a:lnTo>
-                <a:lnTo>
-                  <a:pt x="4490920" y="324712"/>
-                </a:lnTo>
-                <a:lnTo>
-                  <a:pt x="4507482" y="353326"/>
-                </a:lnTo>
-                <a:lnTo>
-                  <a:pt x="4524057" y="448808"/>
-                </a:lnTo>
-                <a:lnTo>
-                  <a:pt x="4540622" y="502244"/>
-                </a:lnTo>
-                <a:lnTo>
-                  <a:pt x="4557183" y="578705"/>
-                </a:lnTo>
-                <a:lnTo>
-                  <a:pt x="4573747" y="647332"/>
-                </a:lnTo>
-                <a:lnTo>
-                  <a:pt x="4590322" y="606902"/>
-                </a:lnTo>
-                <a:lnTo>
-                  <a:pt x="4606883" y="400847"/>
-                </a:lnTo>
-                <a:lnTo>
-                  <a:pt x="4623444" y="360731"/>
-                </a:lnTo>
-                <a:lnTo>
-                  <a:pt x="4640009" y="378373"/>
-                </a:lnTo>
-                <a:lnTo>
-                  <a:pt x="4656584" y="507579"/>
-                </a:lnTo>
-                <a:lnTo>
-                  <a:pt x="4673145" y="547041"/>
-                </a:lnTo>
-                <a:lnTo>
-                  <a:pt x="4689707" y="551669"/>
-                </a:lnTo>
-                <a:lnTo>
-                  <a:pt x="4706272" y="643179"/>
-                </a:lnTo>
-                <a:lnTo>
-                  <a:pt x="4722844" y="696948"/>
-                </a:lnTo>
-                <a:lnTo>
-                  <a:pt x="4739409" y="683697"/>
-                </a:lnTo>
-                <a:lnTo>
-                  <a:pt x="4755970" y="657635"/>
-                </a:lnTo>
-                <a:lnTo>
-                  <a:pt x="4772533" y="653951"/>
-                </a:lnTo>
-                <a:lnTo>
-                  <a:pt x="4789109" y="667143"/>
-                </a:lnTo>
-                <a:lnTo>
-                  <a:pt x="4805671" y="689129"/>
-                </a:lnTo>
-                <a:lnTo>
-                  <a:pt x="4822230" y="697680"/>
-                </a:lnTo>
-                <a:lnTo>
-                  <a:pt x="4838792" y="625291"/>
-                </a:lnTo>
-                <a:lnTo>
-                  <a:pt x="4855369" y="553596"/>
-                </a:lnTo>
-                <a:lnTo>
-                  <a:pt x="4871933" y="455437"/>
-                </a:lnTo>
-                <a:lnTo>
-                  <a:pt x="4888494" y="356106"/>
-                </a:lnTo>
-                <a:lnTo>
-                  <a:pt x="4905059" y="379027"/>
-                </a:lnTo>
-                <a:lnTo>
-                  <a:pt x="4921634" y="540009"/>
-                </a:lnTo>
-                <a:lnTo>
-                  <a:pt x="4938194" y="308814"/>
-                </a:lnTo>
-                <a:lnTo>
-                  <a:pt x="4954757" y="301529"/>
-                </a:lnTo>
-                <a:lnTo>
-                  <a:pt x="4971319" y="367389"/>
-                </a:lnTo>
-                <a:lnTo>
-                  <a:pt x="4987894" y="481716"/>
-                </a:lnTo>
-                <a:lnTo>
-                  <a:pt x="5004456" y="589750"/>
-                </a:lnTo>
-                <a:lnTo>
-                  <a:pt x="5021022" y="667128"/>
-                </a:lnTo>
-                <a:lnTo>
-                  <a:pt x="5037583" y="725127"/>
-                </a:lnTo>
-                <a:lnTo>
-                  <a:pt x="5054155" y="778714"/>
-                </a:lnTo>
-                <a:lnTo>
-                  <a:pt x="5070719" y="780112"/>
-                </a:lnTo>
-                <a:lnTo>
-                  <a:pt x="5087282" y="735206"/>
-                </a:lnTo>
-                <a:lnTo>
-                  <a:pt x="5103845" y="700021"/>
-                </a:lnTo>
-                <a:lnTo>
-                  <a:pt x="5120419" y="692714"/>
-                </a:lnTo>
-                <a:lnTo>
-                  <a:pt x="5136982" y="684397"/>
-                </a:lnTo>
-                <a:lnTo>
-                  <a:pt x="5153542" y="683373"/>
-                </a:lnTo>
-                <a:lnTo>
-                  <a:pt x="5170108" y="700605"/>
-                </a:lnTo>
-                <a:lnTo>
-                  <a:pt x="5186680" y="751372"/>
-                </a:lnTo>
-                <a:lnTo>
-                  <a:pt x="5203243" y="798530"/>
-                </a:lnTo>
-                <a:lnTo>
-                  <a:pt x="5219806" y="752882"/>
-                </a:lnTo>
-                <a:lnTo>
-                  <a:pt x="5236371" y="715045"/>
-                </a:lnTo>
-                <a:lnTo>
-                  <a:pt x="5252945" y="708042"/>
-                </a:lnTo>
-                <a:lnTo>
-                  <a:pt x="5269503" y="712723"/>
-                </a:lnTo>
-                <a:lnTo>
-                  <a:pt x="5286069" y="745139"/>
-                </a:lnTo>
-                <a:lnTo>
-                  <a:pt x="5302631" y="795595"/>
-                </a:lnTo>
-                <a:lnTo>
-                  <a:pt x="5319205" y="780530"/>
-                </a:lnTo>
-                <a:lnTo>
-                  <a:pt x="5335766" y="740189"/>
-                </a:lnTo>
-                <a:lnTo>
-                  <a:pt x="5352333" y="728513"/>
-                </a:lnTo>
-                <a:lnTo>
-                  <a:pt x="5368893" y="733005"/>
-                </a:lnTo>
-                <a:lnTo>
-                  <a:pt x="5385468" y="776155"/>
-                </a:lnTo>
-                <a:lnTo>
-                  <a:pt x="5402031" y="650371"/>
-                </a:lnTo>
-                <a:lnTo>
-                  <a:pt x="5418593" y="527875"/>
-                </a:lnTo>
-                <a:lnTo>
-                  <a:pt x="5435155" y="563128"/>
-                </a:lnTo>
-                <a:lnTo>
-                  <a:pt x="5451730" y="627556"/>
-                </a:lnTo>
-                <a:lnTo>
-                  <a:pt x="5468292" y="615951"/>
-                </a:lnTo>
-                <a:lnTo>
-                  <a:pt x="5484855" y="610827"/>
-                </a:lnTo>
-                <a:lnTo>
-                  <a:pt x="5501417" y="606146"/>
-                </a:lnTo>
-                <a:lnTo>
-                  <a:pt x="5517992" y="642548"/>
-                </a:lnTo>
-                <a:lnTo>
-                  <a:pt x="5534555" y="645975"/>
-                </a:lnTo>
-                <a:lnTo>
-                  <a:pt x="5551118" y="665549"/>
-                </a:lnTo>
-                <a:lnTo>
-                  <a:pt x="5567683" y="694811"/>
-                </a:lnTo>
-                <a:lnTo>
-                  <a:pt x="5584254" y="736396"/>
-                </a:lnTo>
-                <a:lnTo>
-                  <a:pt x="5600818" y="744410"/>
-                </a:lnTo>
-                <a:lnTo>
-                  <a:pt x="5617380" y="772894"/>
-                </a:lnTo>
-                <a:lnTo>
-                  <a:pt x="5633940" y="837042"/>
-                </a:lnTo>
-                <a:lnTo>
-                  <a:pt x="5650514" y="798238"/>
-                </a:lnTo>
-                <a:lnTo>
-                  <a:pt x="5667080" y="786858"/>
-                </a:lnTo>
-                <a:lnTo>
-                  <a:pt x="5683644" y="744120"/>
-                </a:lnTo>
-                <a:lnTo>
-                  <a:pt x="5700203" y="692831"/>
-                </a:lnTo>
-                <a:lnTo>
-                  <a:pt x="5716781" y="671155"/>
-                </a:lnTo>
-                <a:lnTo>
-                  <a:pt x="5733342" y="666570"/>
-                </a:lnTo>
-                <a:lnTo>
-                  <a:pt x="5749904" y="652441"/>
-                </a:lnTo>
-                <a:lnTo>
-                  <a:pt x="5766466" y="642397"/>
-                </a:lnTo>
-                <a:lnTo>
-                  <a:pt x="5783042" y="642860"/>
-                </a:lnTo>
-                <a:lnTo>
-                  <a:pt x="5799602" y="658805"/>
-                </a:lnTo>
-                <a:lnTo>
-                  <a:pt x="5816167" y="651040"/>
-                </a:lnTo>
-                <a:lnTo>
-                  <a:pt x="5832731" y="652003"/>
-                </a:lnTo>
-                <a:lnTo>
-                  <a:pt x="5849303" y="711594"/>
-                </a:lnTo>
-                <a:lnTo>
-                  <a:pt x="5865867" y="768544"/>
-                </a:lnTo>
-                <a:lnTo>
-                  <a:pt x="5882430" y="732472"/>
-                </a:lnTo>
-                <a:lnTo>
-                  <a:pt x="5898991" y="721922"/>
-                </a:lnTo>
-                <a:lnTo>
-                  <a:pt x="5915566" y="721493"/>
-                </a:lnTo>
-                <a:lnTo>
-                  <a:pt x="5932132" y="724078"/>
-                </a:lnTo>
-                <a:lnTo>
-                  <a:pt x="5948692" y="728511"/>
-                </a:lnTo>
-                <a:lnTo>
-                  <a:pt x="5965254" y="728334"/>
-                </a:lnTo>
-                <a:lnTo>
-                  <a:pt x="5981829" y="729861"/>
-                </a:lnTo>
-                <a:lnTo>
-                  <a:pt x="5998392" y="723827"/>
-                </a:lnTo>
-                <a:lnTo>
-                  <a:pt x="6014952" y="721959"/>
-                </a:lnTo>
-                <a:lnTo>
-                  <a:pt x="6031517" y="723196"/>
-                </a:lnTo>
-                <a:lnTo>
-                  <a:pt x="6048093" y="730110"/>
-                </a:lnTo>
-                <a:lnTo>
-                  <a:pt x="6064655" y="744184"/>
-                </a:lnTo>
-                <a:lnTo>
-                  <a:pt x="6081216" y="766355"/>
-                </a:lnTo>
-                <a:lnTo>
-                  <a:pt x="6097781" y="786909"/>
-                </a:lnTo>
-                <a:lnTo>
-                  <a:pt x="6114354" y="809779"/>
-                </a:lnTo>
-                <a:lnTo>
-                  <a:pt x="6130916" y="778517"/>
-                </a:lnTo>
-                <a:lnTo>
-                  <a:pt x="6147479" y="708309"/>
-                </a:lnTo>
-                <a:lnTo>
-                  <a:pt x="6164043" y="710533"/>
-                </a:lnTo>
-                <a:lnTo>
-                  <a:pt x="6180616" y="801557"/>
-                </a:lnTo>
-                <a:lnTo>
-                  <a:pt x="6197179" y="802175"/>
-                </a:lnTo>
-                <a:lnTo>
-                  <a:pt x="6213742" y="793463"/>
-                </a:lnTo>
-                <a:lnTo>
-                  <a:pt x="6230303" y="824184"/>
-                </a:lnTo>
-                <a:lnTo>
-                  <a:pt x="6246881" y="821206"/>
-                </a:lnTo>
-                <a:lnTo>
-                  <a:pt x="6263443" y="819424"/>
-                </a:lnTo>
-                <a:lnTo>
-                  <a:pt x="6280002" y="807868"/>
-                </a:lnTo>
-                <a:lnTo>
-                  <a:pt x="6296566" y="769151"/>
-                </a:lnTo>
-                <a:lnTo>
-                  <a:pt x="6313140" y="750299"/>
-                </a:lnTo>
-                <a:lnTo>
-                  <a:pt x="6329704" y="729968"/>
-                </a:lnTo>
-                <a:lnTo>
-                  <a:pt x="6346264" y="702249"/>
-                </a:lnTo>
-                <a:lnTo>
-                  <a:pt x="6362828" y="698574"/>
-                </a:lnTo>
-                <a:lnTo>
-                  <a:pt x="6379403" y="703334"/>
-                </a:lnTo>
-                <a:lnTo>
-                  <a:pt x="6395965" y="724235"/>
-                </a:lnTo>
-                <a:lnTo>
-                  <a:pt x="6412528" y="764667"/>
-                </a:lnTo>
-                <a:lnTo>
-                  <a:pt x="6429092" y="807313"/>
-                </a:lnTo>
-                <a:lnTo>
-                  <a:pt x="6445665" y="832872"/>
-                </a:lnTo>
-                <a:lnTo>
-                  <a:pt x="6462228" y="837276"/>
-                </a:lnTo>
-                <a:lnTo>
-                  <a:pt x="6478791" y="802200"/>
-                </a:lnTo>
-                <a:lnTo>
-                  <a:pt x="6495352" y="794961"/>
-                </a:lnTo>
-                <a:lnTo>
-                  <a:pt x="6511928" y="807188"/>
-                </a:lnTo>
-                <a:lnTo>
-                  <a:pt x="6528490" y="771077"/>
-                </a:lnTo>
-                <a:lnTo>
-                  <a:pt x="6545053" y="757452"/>
-                </a:lnTo>
-                <a:lnTo>
-                  <a:pt x="6561611" y="762550"/>
-                </a:lnTo>
-                <a:lnTo>
-                  <a:pt x="6578193" y="808658"/>
-                </a:lnTo>
-                <a:lnTo>
-                  <a:pt x="6594752" y="850419"/>
-                </a:lnTo>
-                <a:lnTo>
-                  <a:pt x="6611316" y="823140"/>
-                </a:lnTo>
-                <a:lnTo>
-                  <a:pt x="6627880" y="810587"/>
-                </a:lnTo>
-                <a:lnTo>
-                  <a:pt x="6644452" y="799267"/>
-                </a:lnTo>
-                <a:lnTo>
-                  <a:pt x="6661015" y="803149"/>
-                </a:lnTo>
-                <a:lnTo>
-                  <a:pt x="6677577" y="837045"/>
-                </a:lnTo>
-                <a:lnTo>
-                  <a:pt x="6694143" y="831252"/>
-                </a:lnTo>
-                <a:lnTo>
-                  <a:pt x="6710714" y="810682"/>
-                </a:lnTo>
-                <a:lnTo>
-                  <a:pt x="6727278" y="780757"/>
-                </a:lnTo>
-                <a:lnTo>
-                  <a:pt x="6743841" y="770490"/>
-                </a:lnTo>
-                <a:lnTo>
-                  <a:pt x="6760404" y="772232"/>
-                </a:lnTo>
-                <a:lnTo>
-                  <a:pt x="6776977" y="789910"/>
-                </a:lnTo>
-                <a:lnTo>
-                  <a:pt x="6793540" y="816705"/>
-                </a:lnTo>
-                <a:lnTo>
-                  <a:pt x="6810104" y="848742"/>
-                </a:lnTo>
-                <a:lnTo>
-                  <a:pt x="6826665" y="851199"/>
-                </a:lnTo>
-                <a:lnTo>
-                  <a:pt x="6843240" y="832583"/>
-                </a:lnTo>
-                <a:lnTo>
-                  <a:pt x="6859802" y="818681"/>
-                </a:lnTo>
-                <a:lnTo>
-                  <a:pt x="6876364" y="812347"/>
-                </a:lnTo>
-                <a:lnTo>
-                  <a:pt x="6892927" y="812323"/>
-                </a:lnTo>
-                <a:lnTo>
-                  <a:pt x="6909502" y="816658"/>
-                </a:lnTo>
-                <a:lnTo>
-                  <a:pt x="6926062" y="820819"/>
-                </a:lnTo>
-                <a:lnTo>
-                  <a:pt x="6942627" y="810751"/>
-                </a:lnTo>
-                <a:lnTo>
-                  <a:pt x="6959191" y="808309"/>
-                </a:lnTo>
-                <a:lnTo>
-                  <a:pt x="6975764" y="812744"/>
-                </a:lnTo>
-                <a:lnTo>
-                  <a:pt x="6992327" y="827432"/>
-                </a:lnTo>
-                <a:lnTo>
-                  <a:pt x="7008892" y="835021"/>
-                </a:lnTo>
-                <a:lnTo>
-                  <a:pt x="7025452" y="825256"/>
-                </a:lnTo>
-                <a:lnTo>
-                  <a:pt x="7042024" y="805437"/>
-                </a:lnTo>
-                <a:lnTo>
-                  <a:pt x="7058590" y="777134"/>
-                </a:lnTo>
-                <a:lnTo>
-                  <a:pt x="7075153" y="750093"/>
-                </a:lnTo>
-                <a:lnTo>
-                  <a:pt x="7091715" y="737205"/>
-                </a:lnTo>
-                <a:lnTo>
-                  <a:pt x="7108287" y="735780"/>
-                </a:lnTo>
-                <a:lnTo>
-                  <a:pt x="7124853" y="736482"/>
-                </a:lnTo>
-                <a:lnTo>
-                  <a:pt x="7141414" y="737919"/>
-                </a:lnTo>
-                <a:lnTo>
-                  <a:pt x="7157977" y="739526"/>
-                </a:lnTo>
-                <a:lnTo>
-                  <a:pt x="7174555" y="750657"/>
-                </a:lnTo>
-                <a:lnTo>
-                  <a:pt x="7191113" y="776340"/>
-                </a:lnTo>
-                <a:lnTo>
-                  <a:pt x="7207676" y="789623"/>
-                </a:lnTo>
-                <a:lnTo>
-                  <a:pt x="7224240" y="761213"/>
-                </a:lnTo>
-                <a:lnTo>
-                  <a:pt x="7240814" y="741817"/>
-                </a:lnTo>
-                <a:lnTo>
-                  <a:pt x="7257374" y="740788"/>
-                </a:lnTo>
-                <a:lnTo>
-                  <a:pt x="7273939" y="741712"/>
-                </a:lnTo>
-                <a:lnTo>
-                  <a:pt x="7290501" y="725546"/>
-                </a:lnTo>
-                <a:lnTo>
-                  <a:pt x="7307074" y="707057"/>
-                </a:lnTo>
-                <a:lnTo>
-                  <a:pt x="7323639" y="677977"/>
-                </a:lnTo>
-                <a:lnTo>
-                  <a:pt x="7340201" y="668434"/>
-                </a:lnTo>
-                <a:lnTo>
-                  <a:pt x="7356763" y="680956"/>
-                </a:lnTo>
-                <a:lnTo>
-                  <a:pt x="7373339" y="752872"/>
-                </a:lnTo>
-                <a:lnTo>
-                  <a:pt x="7389902" y="836344"/>
-                </a:lnTo>
-                <a:lnTo>
-                  <a:pt x="7406464" y="825279"/>
-                </a:lnTo>
-                <a:lnTo>
-                  <a:pt x="7423027" y="809229"/>
-                </a:lnTo>
-                <a:lnTo>
-                  <a:pt x="7439601" y="796978"/>
-                </a:lnTo>
-                <a:lnTo>
-                  <a:pt x="7456165" y="777354"/>
-                </a:lnTo>
-                <a:lnTo>
-                  <a:pt x="7472722" y="760246"/>
-                </a:lnTo>
-                <a:lnTo>
-                  <a:pt x="7489289" y="745020"/>
-                </a:lnTo>
-                <a:lnTo>
-                  <a:pt x="7505864" y="739123"/>
-                </a:lnTo>
-                <a:lnTo>
-                  <a:pt x="7522426" y="739505"/>
-                </a:lnTo>
-                <a:lnTo>
-                  <a:pt x="7538988" y="743989"/>
-                </a:lnTo>
-                <a:lnTo>
-                  <a:pt x="7555551" y="738146"/>
-                </a:lnTo>
-                <a:lnTo>
-                  <a:pt x="7572124" y="732577"/>
-                </a:lnTo>
-                <a:lnTo>
-                  <a:pt x="7588687" y="732406"/>
-                </a:lnTo>
-                <a:lnTo>
-                  <a:pt x="7605251" y="740060"/>
-                </a:lnTo>
-                <a:lnTo>
-                  <a:pt x="7621813" y="765625"/>
-                </a:lnTo>
-                <a:lnTo>
-                  <a:pt x="7638388" y="811773"/>
-                </a:lnTo>
-                <a:lnTo>
-                  <a:pt x="7654952" y="853664"/>
-                </a:lnTo>
-                <a:lnTo>
-                  <a:pt x="7671512" y="840873"/>
-                </a:lnTo>
-                <a:lnTo>
-                  <a:pt x="7688075" y="829006"/>
-                </a:lnTo>
-                <a:lnTo>
-                  <a:pt x="7704650" y="827488"/>
-                </a:lnTo>
-                <a:lnTo>
-                  <a:pt x="7721214" y="831640"/>
-                </a:lnTo>
-                <a:lnTo>
-                  <a:pt x="7737774" y="834236"/>
-                </a:lnTo>
-                <a:lnTo>
-                  <a:pt x="7754338" y="820935"/>
-                </a:lnTo>
-                <a:lnTo>
-                  <a:pt x="7770915" y="805554"/>
-                </a:lnTo>
-                <a:lnTo>
-                  <a:pt x="7787476" y="789628"/>
-                </a:lnTo>
-                <a:lnTo>
-                  <a:pt x="7804038" y="783346"/>
-                </a:lnTo>
-                <a:lnTo>
-                  <a:pt x="7820603" y="783786"/>
-                </a:lnTo>
-                <a:lnTo>
-                  <a:pt x="7837173" y="790103"/>
-                </a:lnTo>
-                <a:lnTo>
-                  <a:pt x="7853735" y="798216"/>
-                </a:lnTo>
-                <a:lnTo>
-                  <a:pt x="7870300" y="817332"/>
-                </a:lnTo>
-                <a:lnTo>
-                  <a:pt x="7886864" y="851195"/>
-                </a:lnTo>
-                <a:lnTo>
-                  <a:pt x="7903437" y="847334"/>
-                </a:lnTo>
-                <a:lnTo>
-                  <a:pt x="7920000" y="802328"/>
-                </a:lnTo>
-                <a:lnTo>
-                  <a:pt x="7936563" y="799022"/>
-                </a:lnTo>
-                <a:lnTo>
-                  <a:pt x="7953123" y="825283"/>
-                </a:lnTo>
-                <a:lnTo>
-                  <a:pt x="7969703" y="883284"/>
-                </a:lnTo>
-                <a:lnTo>
-                  <a:pt x="7986263" y="867628"/>
-                </a:lnTo>
-                <a:lnTo>
-                  <a:pt x="8002825" y="859656"/>
-                </a:lnTo>
-                <a:lnTo>
-                  <a:pt x="8019390" y="860421"/>
-                </a:lnTo>
-                <a:lnTo>
-                  <a:pt x="8035963" y="860453"/>
-                </a:lnTo>
-                <a:lnTo>
-                  <a:pt x="8052524" y="832202"/>
-                </a:lnTo>
-                <a:lnTo>
-                  <a:pt x="8069087" y="826115"/>
-                </a:lnTo>
-                <a:lnTo>
-                  <a:pt x="8085653" y="829202"/>
-                </a:lnTo>
-                <a:lnTo>
-                  <a:pt x="8102225" y="836855"/>
-                </a:lnTo>
-                <a:lnTo>
-                  <a:pt x="8118784" y="835650"/>
-                </a:lnTo>
-                <a:lnTo>
-                  <a:pt x="8135351" y="836050"/>
-                </a:lnTo>
-                <a:lnTo>
-                  <a:pt x="8151913" y="832744"/>
-                </a:lnTo>
-                <a:lnTo>
-                  <a:pt x="8168486" y="832517"/>
-                </a:lnTo>
-                <a:lnTo>
-                  <a:pt x="8185050" y="835223"/>
-                </a:lnTo>
-                <a:lnTo>
-                  <a:pt x="8201614" y="839534"/>
-                </a:lnTo>
-                <a:lnTo>
-                  <a:pt x="8218174" y="829392"/>
-                </a:lnTo>
-                <a:lnTo>
-                  <a:pt x="8234749" y="822956"/>
-                </a:lnTo>
-                <a:lnTo>
-                  <a:pt x="8251310" y="822190"/>
-                </a:lnTo>
-                <a:lnTo>
-                  <a:pt x="8267874" y="821787"/>
-                </a:lnTo>
-                <a:lnTo>
-                  <a:pt x="8284436" y="814667"/>
-                </a:lnTo>
-                <a:lnTo>
-                  <a:pt x="8301012" y="815084"/>
-                </a:lnTo>
-                <a:lnTo>
-                  <a:pt x="8317574" y="851104"/>
-                </a:lnTo>
-                <a:lnTo>
-                  <a:pt x="8334138" y="796799"/>
-                </a:lnTo>
-                <a:lnTo>
-                  <a:pt x="8350699" y="782456"/>
-                </a:lnTo>
-                <a:lnTo>
-                  <a:pt x="8367273" y="799831"/>
-                </a:lnTo>
-                <a:lnTo>
-                  <a:pt x="8383836" y="848511"/>
-                </a:lnTo>
-                <a:lnTo>
-                  <a:pt x="8400402" y="870743"/>
-                </a:lnTo>
-                <a:lnTo>
-                  <a:pt x="8416964" y="832334"/>
-                </a:lnTo>
-                <a:lnTo>
-                  <a:pt x="8433535" y="822355"/>
-                </a:lnTo>
-                <a:lnTo>
-                  <a:pt x="8450101" y="827261"/>
-                </a:lnTo>
-                <a:lnTo>
-                  <a:pt x="8466663" y="837476"/>
-                </a:lnTo>
-                <a:lnTo>
-                  <a:pt x="8483223" y="831188"/>
-                </a:lnTo>
-                <a:lnTo>
-                  <a:pt x="8499796" y="818442"/>
-                </a:lnTo>
-                <a:lnTo>
-                  <a:pt x="8516361" y="799267"/>
-                </a:lnTo>
-                <a:lnTo>
-                  <a:pt x="8532925" y="779931"/>
-                </a:lnTo>
-                <a:lnTo>
-                  <a:pt x="8549487" y="766104"/>
-                </a:lnTo>
-                <a:lnTo>
-                  <a:pt x="8566063" y="764511"/>
-                </a:lnTo>
-                <a:lnTo>
-                  <a:pt x="8582624" y="772450"/>
-                </a:lnTo>
-                <a:lnTo>
-                  <a:pt x="8599185" y="803434"/>
-                </a:lnTo>
-                <a:lnTo>
-                  <a:pt x="8615748" y="840511"/>
-                </a:lnTo>
-                <a:lnTo>
-                  <a:pt x="8632321" y="868646"/>
-                </a:lnTo>
-                <a:lnTo>
-                  <a:pt x="8648885" y="881376"/>
-                </a:lnTo>
-                <a:lnTo>
-                  <a:pt x="8665449" y="875228"/>
-                </a:lnTo>
-                <a:lnTo>
-                  <a:pt x="8682013" y="878061"/>
-                </a:lnTo>
-                <a:lnTo>
-                  <a:pt x="8698586" y="889998"/>
-                </a:lnTo>
-                <a:lnTo>
-                  <a:pt x="8715149" y="882614"/>
-                </a:lnTo>
-                <a:lnTo>
-                  <a:pt x="8731711" y="878953"/>
-                </a:lnTo>
-                <a:lnTo>
-                  <a:pt x="8748271" y="878103"/>
-                </a:lnTo>
-                <a:lnTo>
-                  <a:pt x="8764847" y="878495"/>
-                </a:lnTo>
-                <a:lnTo>
-                  <a:pt x="8781411" y="880966"/>
-                </a:lnTo>
-                <a:lnTo>
-                  <a:pt x="8797973" y="874765"/>
-                </a:lnTo>
-                <a:lnTo>
-                  <a:pt x="8814535" y="867532"/>
-                </a:lnTo>
-                <a:lnTo>
-                  <a:pt x="8831110" y="864212"/>
-                </a:lnTo>
-                <a:lnTo>
-                  <a:pt x="8847673" y="864288"/>
-                </a:lnTo>
-                <a:lnTo>
-                  <a:pt x="8864236" y="869867"/>
-                </a:lnTo>
-                <a:lnTo>
-                  <a:pt x="8880798" y="881835"/>
-                </a:lnTo>
-                <a:lnTo>
-                  <a:pt x="8897374" y="890365"/>
-                </a:lnTo>
-                <a:lnTo>
-                  <a:pt x="8913936" y="885413"/>
-                </a:lnTo>
-                <a:lnTo>
-                  <a:pt x="8930497" y="882102"/>
-                </a:lnTo>
-                <a:lnTo>
-                  <a:pt x="8947062" y="879707"/>
-                </a:lnTo>
-                <a:lnTo>
-                  <a:pt x="8963634" y="879660"/>
-                </a:lnTo>
-                <a:lnTo>
-                  <a:pt x="8980197" y="883053"/>
-                </a:lnTo>
-                <a:lnTo>
-                  <a:pt x="8996758" y="871069"/>
-                </a:lnTo>
-                <a:lnTo>
-                  <a:pt x="9013325" y="846491"/>
-                </a:lnTo>
-                <a:lnTo>
-                  <a:pt x="9029895" y="845125"/>
-                </a:lnTo>
-                <a:lnTo>
-                  <a:pt x="9046463" y="863280"/>
-                </a:lnTo>
-                <a:lnTo>
-                  <a:pt x="9063022" y="883623"/>
-                </a:lnTo>
-                <a:lnTo>
-                  <a:pt x="9079584" y="864725"/>
-                </a:lnTo>
-                <a:lnTo>
-                  <a:pt x="9096160" y="846056"/>
-                </a:lnTo>
-                <a:lnTo>
-                  <a:pt x="9112722" y="839328"/>
-                </a:lnTo>
-                <a:lnTo>
-                  <a:pt x="9129284" y="839851"/>
-                </a:lnTo>
-                <a:lnTo>
-                  <a:pt x="9145848" y="848578"/>
-                </a:lnTo>
-                <a:lnTo>
-                  <a:pt x="9162422" y="864494"/>
-                </a:lnTo>
-                <a:lnTo>
-                  <a:pt x="9178984" y="880435"/>
-                </a:lnTo>
-                <a:lnTo>
-                  <a:pt x="9195547" y="890040"/>
-                </a:lnTo>
-                <a:lnTo>
-                  <a:pt x="9212110" y="885769"/>
-                </a:lnTo>
-                <a:lnTo>
-                  <a:pt x="9228687" y="877852"/>
-                </a:lnTo>
-                <a:lnTo>
-                  <a:pt x="9245247" y="876416"/>
-                </a:lnTo>
-                <a:lnTo>
-                  <a:pt x="9261810" y="880235"/>
-                </a:lnTo>
-                <a:lnTo>
-                  <a:pt x="9278372" y="893190"/>
-                </a:lnTo>
-                <a:lnTo>
-                  <a:pt x="9294946" y="895159"/>
-                </a:lnTo>
-                <a:lnTo>
-                  <a:pt x="9311509" y="881975"/>
-                </a:lnTo>
-                <a:lnTo>
-                  <a:pt x="9328074" y="867352"/>
-                </a:lnTo>
-                <a:lnTo>
-                  <a:pt x="9344637" y="853437"/>
-                </a:lnTo>
-                <a:lnTo>
-                  <a:pt x="9361210" y="840547"/>
-                </a:lnTo>
-                <a:lnTo>
-                  <a:pt x="9377772" y="837912"/>
-                </a:lnTo>
-                <a:lnTo>
-                  <a:pt x="9394334" y="840904"/>
-                </a:lnTo>
-                <a:lnTo>
-                  <a:pt x="9410898" y="855594"/>
-                </a:lnTo>
-                <a:lnTo>
-                  <a:pt x="9427472" y="873049"/>
-                </a:lnTo>
-                <a:lnTo>
-                  <a:pt x="9444033" y="875806"/>
-                </a:lnTo>
-                <a:lnTo>
-                  <a:pt x="9460597" y="877656"/>
-                </a:lnTo>
-                <a:lnTo>
-                  <a:pt x="9477159" y="890244"/>
-                </a:lnTo>
-                <a:lnTo>
-                  <a:pt x="9493735" y="904794"/>
-                </a:lnTo>
-                <a:lnTo>
-                  <a:pt x="9510294" y="908763"/>
-                </a:lnTo>
-                <a:lnTo>
-                  <a:pt x="9526861" y="905797"/>
-                </a:lnTo>
-                <a:lnTo>
-                  <a:pt x="9543424" y="901004"/>
-                </a:lnTo>
-                <a:lnTo>
-                  <a:pt x="9559996" y="899825"/>
-                </a:lnTo>
-                <a:lnTo>
-                  <a:pt x="9576559" y="900808"/>
-                </a:lnTo>
-                <a:lnTo>
-                  <a:pt x="9593124" y="904184"/>
-                </a:lnTo>
-                <a:lnTo>
-                  <a:pt x="9609686" y="905047"/>
-                </a:lnTo>
-                <a:lnTo>
-                  <a:pt x="9626259" y="901929"/>
-                </a:lnTo>
-                <a:lnTo>
-                  <a:pt x="9642821" y="900662"/>
-                </a:lnTo>
-                <a:lnTo>
-                  <a:pt x="9659383" y="900855"/>
-                </a:lnTo>
-                <a:lnTo>
-                  <a:pt x="9675945" y="895531"/>
-                </a:lnTo>
-                <a:lnTo>
-                  <a:pt x="9692522" y="888043"/>
-                </a:lnTo>
-                <a:lnTo>
-                  <a:pt x="9709086" y="882753"/>
-                </a:lnTo>
-                <a:lnTo>
-                  <a:pt x="9725646" y="882646"/>
-                </a:lnTo>
-                <a:lnTo>
-                  <a:pt x="9742211" y="887635"/>
-                </a:lnTo>
-                <a:lnTo>
-                  <a:pt x="9758783" y="896575"/>
-                </a:lnTo>
-                <a:lnTo>
-                  <a:pt x="9775346" y="906315"/>
-                </a:lnTo>
-                <a:lnTo>
-                  <a:pt x="9791910" y="906956"/>
-                </a:lnTo>
-                <a:lnTo>
-                  <a:pt x="9808472" y="905567"/>
-                </a:lnTo>
-                <a:lnTo>
-                  <a:pt x="9825049" y="906926"/>
-                </a:lnTo>
-                <a:lnTo>
-                  <a:pt x="9841608" y="907598"/>
-                </a:lnTo>
-                <a:lnTo>
-                  <a:pt x="9858174" y="900301"/>
-                </a:lnTo>
-                <a:lnTo>
-                  <a:pt x="9874734" y="890476"/>
-                </a:lnTo>
-                <a:lnTo>
-                  <a:pt x="9891311" y="878205"/>
-                </a:lnTo>
-                <a:lnTo>
-                  <a:pt x="9907871" y="861445"/>
-                </a:lnTo>
-                <a:lnTo>
-                  <a:pt x="9924435" y="850050"/>
-                </a:lnTo>
-                <a:lnTo>
-                  <a:pt x="9940996" y="846420"/>
-                </a:lnTo>
-                <a:lnTo>
-                  <a:pt x="9957571" y="846660"/>
-                </a:lnTo>
-                <a:lnTo>
-                  <a:pt x="9974136" y="853117"/>
-                </a:lnTo>
-                <a:lnTo>
-                  <a:pt x="9990695" y="865589"/>
-                </a:lnTo>
-                <a:lnTo>
-                  <a:pt x="10007260" y="876442"/>
-                </a:lnTo>
-                <a:lnTo>
-                  <a:pt x="10023836" y="884422"/>
-                </a:lnTo>
-                <a:lnTo>
-                  <a:pt x="10040397" y="892168"/>
-                </a:lnTo>
-                <a:lnTo>
-                  <a:pt x="10056957" y="892384"/>
-                </a:lnTo>
-                <a:lnTo>
-                  <a:pt x="10073523" y="888259"/>
-                </a:lnTo>
-                <a:lnTo>
-                  <a:pt x="10090095" y="884936"/>
-                </a:lnTo>
-                <a:lnTo>
-                  <a:pt x="10106660" y="880902"/>
-                </a:lnTo>
-                <a:lnTo>
-                  <a:pt x="10123223" y="880230"/>
-                </a:lnTo>
-                <a:lnTo>
-                  <a:pt x="10139785" y="882624"/>
-                </a:lnTo>
-                <a:lnTo>
-                  <a:pt x="10156360" y="884045"/>
-                </a:lnTo>
-                <a:lnTo>
-                  <a:pt x="10172923" y="882312"/>
-                </a:lnTo>
-                <a:lnTo>
-                  <a:pt x="10189484" y="880839"/>
-                </a:lnTo>
-                <a:lnTo>
-                  <a:pt x="10206044" y="881425"/>
-                </a:lnTo>
-                <a:lnTo>
-                  <a:pt x="10222622" y="889494"/>
-                </a:lnTo>
-                <a:lnTo>
-                  <a:pt x="10239185" y="883661"/>
-                </a:lnTo>
-                <a:lnTo>
-                  <a:pt x="10255747" y="878445"/>
-                </a:lnTo>
-                <a:lnTo>
-                  <a:pt x="10272310" y="878461"/>
-                </a:lnTo>
-                <a:lnTo>
-                  <a:pt x="10288883" y="883322"/>
-                </a:lnTo>
-                <a:lnTo>
-                  <a:pt x="10305447" y="889670"/>
-                </a:lnTo>
-                <a:lnTo>
-                  <a:pt x="10322007" y="894368"/>
-                </a:lnTo>
-                <a:lnTo>
-                  <a:pt x="10338573" y="894144"/>
-                </a:lnTo>
-                <a:lnTo>
-                  <a:pt x="10355148" y="891915"/>
-                </a:lnTo>
-                <a:lnTo>
-                  <a:pt x="10371709" y="887848"/>
-                </a:lnTo>
-                <a:lnTo>
-                  <a:pt x="10388272" y="863683"/>
-                </a:lnTo>
-                <a:lnTo>
-                  <a:pt x="10404835" y="855164"/>
-                </a:lnTo>
-                <a:lnTo>
-                  <a:pt x="10421406" y="855249"/>
-                </a:lnTo>
-                <a:lnTo>
-                  <a:pt x="10437972" y="860164"/>
-                </a:lnTo>
-                <a:lnTo>
-                  <a:pt x="10454535" y="868038"/>
-                </a:lnTo>
-                <a:lnTo>
-                  <a:pt x="10471095" y="872616"/>
-                </a:lnTo>
-                <a:lnTo>
-                  <a:pt x="10487672" y="874313"/>
-                </a:lnTo>
-                <a:lnTo>
-                  <a:pt x="10504235" y="882388"/>
-                </a:lnTo>
-                <a:lnTo>
-                  <a:pt x="10520797" y="894913"/>
-                </a:lnTo>
-                <a:lnTo>
-                  <a:pt x="10537358" y="903876"/>
+                  <a:pt x="2743253" y="54480"/>
+                </a:lnTo>
+                <a:lnTo>
+                  <a:pt x="2763143" y="229358"/>
+                </a:lnTo>
+                <a:lnTo>
+                  <a:pt x="2783007" y="212820"/>
+                </a:lnTo>
+                <a:lnTo>
+                  <a:pt x="2802899" y="322898"/>
+                </a:lnTo>
+                <a:lnTo>
+                  <a:pt x="2822768" y="582366"/>
+                </a:lnTo>
+                <a:lnTo>
+                  <a:pt x="2842656" y="539020"/>
+                </a:lnTo>
+                <a:lnTo>
+                  <a:pt x="2862524" y="539890"/>
+                </a:lnTo>
+                <a:lnTo>
+                  <a:pt x="2882412" y="581344"/>
+                </a:lnTo>
+                <a:lnTo>
+                  <a:pt x="2902281" y="613455"/>
+                </a:lnTo>
+                <a:lnTo>
+                  <a:pt x="2922174" y="498023"/>
+                </a:lnTo>
+                <a:lnTo>
+                  <a:pt x="2942039" y="379210"/>
+                </a:lnTo>
+                <a:lnTo>
+                  <a:pt x="2961927" y="347131"/>
+                </a:lnTo>
+                <a:lnTo>
+                  <a:pt x="2981797" y="456533"/>
+                </a:lnTo>
+                <a:lnTo>
+                  <a:pt x="3001683" y="693761"/>
+                </a:lnTo>
+                <a:lnTo>
+                  <a:pt x="3021554" y="703815"/>
+                </a:lnTo>
+                <a:lnTo>
+                  <a:pt x="3041441" y="525958"/>
+                </a:lnTo>
+                <a:lnTo>
+                  <a:pt x="3061312" y="492143"/>
+                </a:lnTo>
+                <a:lnTo>
+                  <a:pt x="3081200" y="547591"/>
+                </a:lnTo>
+                <a:lnTo>
+                  <a:pt x="3101068" y="620535"/>
+                </a:lnTo>
+                <a:lnTo>
+                  <a:pt x="3120954" y="571188"/>
+                </a:lnTo>
+                <a:lnTo>
+                  <a:pt x="3140827" y="545966"/>
+                </a:lnTo>
+                <a:lnTo>
+                  <a:pt x="3160713" y="544861"/>
+                </a:lnTo>
+                <a:lnTo>
+                  <a:pt x="3180585" y="558700"/>
+                </a:lnTo>
+                <a:lnTo>
+                  <a:pt x="3200473" y="622863"/>
+                </a:lnTo>
+                <a:lnTo>
+                  <a:pt x="3220339" y="569602"/>
+                </a:lnTo>
+                <a:lnTo>
+                  <a:pt x="3240229" y="520707"/>
+                </a:lnTo>
+                <a:lnTo>
+                  <a:pt x="3260096" y="512007"/>
+                </a:lnTo>
+                <a:lnTo>
+                  <a:pt x="3279987" y="513720"/>
+                </a:lnTo>
+                <a:lnTo>
+                  <a:pt x="3299855" y="542864"/>
+                </a:lnTo>
+                <a:lnTo>
+                  <a:pt x="3319744" y="603609"/>
+                </a:lnTo>
+                <a:lnTo>
+                  <a:pt x="3339614" y="680990"/>
+                </a:lnTo>
+                <a:lnTo>
+                  <a:pt x="3359500" y="612898"/>
+                </a:lnTo>
+                <a:lnTo>
+                  <a:pt x="3379370" y="585877"/>
+                </a:lnTo>
+                <a:lnTo>
+                  <a:pt x="3399258" y="582056"/>
+                </a:lnTo>
+                <a:lnTo>
+                  <a:pt x="3419129" y="589273"/>
+                </a:lnTo>
+                <a:lnTo>
+                  <a:pt x="3439014" y="618563"/>
+                </a:lnTo>
+                <a:lnTo>
+                  <a:pt x="3458885" y="629062"/>
+                </a:lnTo>
+                <a:lnTo>
+                  <a:pt x="3478771" y="640440"/>
+                </a:lnTo>
+                <a:lnTo>
+                  <a:pt x="3498642" y="675333"/>
+                </a:lnTo>
+                <a:lnTo>
+                  <a:pt x="3518531" y="707182"/>
+                </a:lnTo>
+                <a:lnTo>
+                  <a:pt x="3538398" y="712152"/>
+                </a:lnTo>
+                <a:lnTo>
+                  <a:pt x="3558286" y="712435"/>
+                </a:lnTo>
+                <a:lnTo>
+                  <a:pt x="3578157" y="722462"/>
+                </a:lnTo>
+                <a:lnTo>
+                  <a:pt x="3598044" y="728455"/>
+                </a:lnTo>
+                <a:lnTo>
+                  <a:pt x="3617911" y="725545"/>
+                </a:lnTo>
+                <a:lnTo>
+                  <a:pt x="3637801" y="729760"/>
+                </a:lnTo>
+                <a:lnTo>
+                  <a:pt x="3657670" y="757057"/>
+                </a:lnTo>
+                <a:lnTo>
+                  <a:pt x="3677560" y="762089"/>
+                </a:lnTo>
+                <a:lnTo>
+                  <a:pt x="3695773" y="724982"/>
+                </a:lnTo>
+                <a:lnTo>
+                  <a:pt x="3712338" y="701665"/>
+                </a:lnTo>
+                <a:lnTo>
+                  <a:pt x="3728911" y="689843"/>
+                </a:lnTo>
+                <a:lnTo>
+                  <a:pt x="3745475" y="688810"/>
+                </a:lnTo>
+                <a:lnTo>
+                  <a:pt x="3762036" y="694572"/>
+                </a:lnTo>
+                <a:lnTo>
+                  <a:pt x="3778601" y="717762"/>
+                </a:lnTo>
+                <a:lnTo>
+                  <a:pt x="3795172" y="746728"/>
+                </a:lnTo>
+                <a:lnTo>
+                  <a:pt x="3811736" y="764365"/>
+                </a:lnTo>
+                <a:lnTo>
+                  <a:pt x="3828301" y="778795"/>
+                </a:lnTo>
+                <a:lnTo>
+                  <a:pt x="3844862" y="758929"/>
+                </a:lnTo>
+                <a:lnTo>
+                  <a:pt x="3861438" y="735185"/>
+                </a:lnTo>
+                <a:lnTo>
+                  <a:pt x="3877998" y="719537"/>
+                </a:lnTo>
+                <a:lnTo>
+                  <a:pt x="3894563" y="704571"/>
+                </a:lnTo>
+                <a:lnTo>
+                  <a:pt x="3911121" y="696017"/>
+                </a:lnTo>
+                <a:lnTo>
+                  <a:pt x="3927700" y="696022"/>
+                </a:lnTo>
+                <a:lnTo>
+                  <a:pt x="3944260" y="704166"/>
+                </a:lnTo>
+                <a:lnTo>
+                  <a:pt x="3960825" y="723268"/>
+                </a:lnTo>
+                <a:lnTo>
+                  <a:pt x="3977386" y="749622"/>
+                </a:lnTo>
+                <a:lnTo>
+                  <a:pt x="3993961" y="732609"/>
+                </a:lnTo>
+                <a:lnTo>
+                  <a:pt x="4010524" y="635539"/>
+                </a:lnTo>
+                <a:lnTo>
+                  <a:pt x="4027086" y="550584"/>
+                </a:lnTo>
+                <a:lnTo>
+                  <a:pt x="4043648" y="519882"/>
+                </a:lnTo>
+                <a:lnTo>
+                  <a:pt x="4060220" y="519943"/>
+                </a:lnTo>
+                <a:lnTo>
+                  <a:pt x="4076784" y="540391"/>
+                </a:lnTo>
+                <a:lnTo>
+                  <a:pt x="4093348" y="577918"/>
+                </a:lnTo>
+                <a:lnTo>
+                  <a:pt x="4109912" y="632604"/>
+                </a:lnTo>
+                <a:lnTo>
+                  <a:pt x="4126485" y="658387"/>
+                </a:lnTo>
+                <a:lnTo>
+                  <a:pt x="4143047" y="563557"/>
+                </a:lnTo>
+                <a:lnTo>
+                  <a:pt x="4159611" y="482063"/>
+                </a:lnTo>
+                <a:lnTo>
+                  <a:pt x="4176171" y="461703"/>
+                </a:lnTo>
+                <a:lnTo>
+                  <a:pt x="4192747" y="468477"/>
+                </a:lnTo>
+                <a:lnTo>
+                  <a:pt x="4209310" y="516107"/>
+                </a:lnTo>
+                <a:lnTo>
+                  <a:pt x="4225873" y="580486"/>
+                </a:lnTo>
+                <a:lnTo>
+                  <a:pt x="4242434" y="660860"/>
+                </a:lnTo>
+                <a:lnTo>
+                  <a:pt x="4259010" y="746456"/>
+                </a:lnTo>
+                <a:lnTo>
+                  <a:pt x="4275573" y="689286"/>
+                </a:lnTo>
+                <a:lnTo>
+                  <a:pt x="4292136" y="644459"/>
+                </a:lnTo>
+                <a:lnTo>
+                  <a:pt x="4308698" y="617680"/>
+                </a:lnTo>
+                <a:lnTo>
+                  <a:pt x="4325273" y="609172"/>
+                </a:lnTo>
+                <a:lnTo>
+                  <a:pt x="4341833" y="610523"/>
+                </a:lnTo>
+                <a:lnTo>
+                  <a:pt x="4358397" y="634246"/>
+                </a:lnTo>
+                <a:lnTo>
+                  <a:pt x="4374961" y="656292"/>
+                </a:lnTo>
+                <a:lnTo>
+                  <a:pt x="4391533" y="618570"/>
+                </a:lnTo>
+                <a:lnTo>
+                  <a:pt x="4408097" y="587438"/>
+                </a:lnTo>
+                <a:lnTo>
+                  <a:pt x="4424658" y="571909"/>
+                </a:lnTo>
+                <a:lnTo>
+                  <a:pt x="4441224" y="534394"/>
+                </a:lnTo>
+                <a:lnTo>
+                  <a:pt x="4457794" y="440390"/>
+                </a:lnTo>
+                <a:lnTo>
+                  <a:pt x="4474360" y="315520"/>
+                </a:lnTo>
+                <a:lnTo>
+                  <a:pt x="4490920" y="285746"/>
+                </a:lnTo>
+                <a:lnTo>
+                  <a:pt x="4507482" y="310926"/>
+                </a:lnTo>
+                <a:lnTo>
+                  <a:pt x="4524057" y="394950"/>
+                </a:lnTo>
+                <a:lnTo>
+                  <a:pt x="4540622" y="441975"/>
+                </a:lnTo>
+                <a:lnTo>
+                  <a:pt x="4557183" y="509260"/>
+                </a:lnTo>
+                <a:lnTo>
+                  <a:pt x="4573747" y="569651"/>
+                </a:lnTo>
+                <a:lnTo>
+                  <a:pt x="4590322" y="534073"/>
+                </a:lnTo>
+                <a:lnTo>
+                  <a:pt x="4606883" y="352745"/>
+                </a:lnTo>
+                <a:lnTo>
+                  <a:pt x="4623444" y="317443"/>
+                </a:lnTo>
+                <a:lnTo>
+                  <a:pt x="4640009" y="332968"/>
+                </a:lnTo>
+                <a:lnTo>
+                  <a:pt x="4656584" y="446670"/>
+                </a:lnTo>
+                <a:lnTo>
+                  <a:pt x="4673145" y="481396"/>
+                </a:lnTo>
+                <a:lnTo>
+                  <a:pt x="4689707" y="485469"/>
+                </a:lnTo>
+                <a:lnTo>
+                  <a:pt x="4706272" y="565997"/>
+                </a:lnTo>
+                <a:lnTo>
+                  <a:pt x="4722844" y="613314"/>
+                </a:lnTo>
+                <a:lnTo>
+                  <a:pt x="4739409" y="601653"/>
+                </a:lnTo>
+                <a:lnTo>
+                  <a:pt x="4755970" y="578719"/>
+                </a:lnTo>
+                <a:lnTo>
+                  <a:pt x="4772533" y="575477"/>
+                </a:lnTo>
+                <a:lnTo>
+                  <a:pt x="4789109" y="587086"/>
+                </a:lnTo>
+                <a:lnTo>
+                  <a:pt x="4805671" y="606433"/>
+                </a:lnTo>
+                <a:lnTo>
+                  <a:pt x="4822230" y="613958"/>
+                </a:lnTo>
+                <a:lnTo>
+                  <a:pt x="4838792" y="550255"/>
+                </a:lnTo>
+                <a:lnTo>
+                  <a:pt x="4855369" y="487164"/>
+                </a:lnTo>
+                <a:lnTo>
+                  <a:pt x="4871933" y="400784"/>
+                </a:lnTo>
+                <a:lnTo>
+                  <a:pt x="4888494" y="313373"/>
+                </a:lnTo>
+                <a:lnTo>
+                  <a:pt x="4905059" y="333543"/>
+                </a:lnTo>
+                <a:lnTo>
+                  <a:pt x="4921634" y="475208"/>
+                </a:lnTo>
+                <a:lnTo>
+                  <a:pt x="4938194" y="271756"/>
+                </a:lnTo>
+                <a:lnTo>
+                  <a:pt x="4954757" y="265345"/>
+                </a:lnTo>
+                <a:lnTo>
+                  <a:pt x="4971319" y="323302"/>
+                </a:lnTo>
+                <a:lnTo>
+                  <a:pt x="4987894" y="423910"/>
+                </a:lnTo>
+                <a:lnTo>
+                  <a:pt x="5004456" y="518980"/>
+                </a:lnTo>
+                <a:lnTo>
+                  <a:pt x="5021022" y="587072"/>
+                </a:lnTo>
+                <a:lnTo>
+                  <a:pt x="5037583" y="638111"/>
+                </a:lnTo>
+                <a:lnTo>
+                  <a:pt x="5054155" y="685268"/>
+                </a:lnTo>
+                <a:lnTo>
+                  <a:pt x="5070719" y="686498"/>
+                </a:lnTo>
+                <a:lnTo>
+                  <a:pt x="5087282" y="646981"/>
+                </a:lnTo>
+                <a:lnTo>
+                  <a:pt x="5103845" y="616018"/>
+                </a:lnTo>
+                <a:lnTo>
+                  <a:pt x="5120419" y="609588"/>
+                </a:lnTo>
+                <a:lnTo>
+                  <a:pt x="5136982" y="602269"/>
+                </a:lnTo>
+                <a:lnTo>
+                  <a:pt x="5153542" y="601368"/>
+                </a:lnTo>
+                <a:lnTo>
+                  <a:pt x="5170108" y="616532"/>
+                </a:lnTo>
+                <a:lnTo>
+                  <a:pt x="5186680" y="661207"/>
+                </a:lnTo>
+                <a:lnTo>
+                  <a:pt x="5203243" y="702706"/>
+                </a:lnTo>
+                <a:lnTo>
+                  <a:pt x="5219806" y="662536"/>
+                </a:lnTo>
+                <a:lnTo>
+                  <a:pt x="5236371" y="629239"/>
+                </a:lnTo>
+                <a:lnTo>
+                  <a:pt x="5252945" y="623077"/>
+                </a:lnTo>
+                <a:lnTo>
+                  <a:pt x="5269503" y="627196"/>
+                </a:lnTo>
+                <a:lnTo>
+                  <a:pt x="5286069" y="655722"/>
+                </a:lnTo>
+                <a:lnTo>
+                  <a:pt x="5302631" y="700124"/>
+                </a:lnTo>
+                <a:lnTo>
+                  <a:pt x="5319205" y="686866"/>
+                </a:lnTo>
+                <a:lnTo>
+                  <a:pt x="5335766" y="651366"/>
+                </a:lnTo>
+                <a:lnTo>
+                  <a:pt x="5352333" y="641091"/>
+                </a:lnTo>
+                <a:lnTo>
+                  <a:pt x="5368893" y="645044"/>
+                </a:lnTo>
+                <a:lnTo>
+                  <a:pt x="5385468" y="683016"/>
+                </a:lnTo>
+                <a:lnTo>
+                  <a:pt x="5402031" y="572326"/>
+                </a:lnTo>
+                <a:lnTo>
+                  <a:pt x="5418593" y="464530"/>
+                </a:lnTo>
+                <a:lnTo>
+                  <a:pt x="5435155" y="495553"/>
+                </a:lnTo>
+                <a:lnTo>
+                  <a:pt x="5451730" y="552249"/>
+                </a:lnTo>
+                <a:lnTo>
+                  <a:pt x="5468292" y="542036"/>
+                </a:lnTo>
+                <a:lnTo>
+                  <a:pt x="5484855" y="537528"/>
+                </a:lnTo>
+                <a:lnTo>
+                  <a:pt x="5501417" y="533408"/>
+                </a:lnTo>
+                <a:lnTo>
+                  <a:pt x="5517992" y="565442"/>
+                </a:lnTo>
+                <a:lnTo>
+                  <a:pt x="5534555" y="568458"/>
+                </a:lnTo>
+                <a:lnTo>
+                  <a:pt x="5551118" y="585683"/>
+                </a:lnTo>
+                <a:lnTo>
+                  <a:pt x="5567683" y="611434"/>
+                </a:lnTo>
+                <a:lnTo>
+                  <a:pt x="5584254" y="648028"/>
+                </a:lnTo>
+                <a:lnTo>
+                  <a:pt x="5600818" y="655080"/>
+                </a:lnTo>
+                <a:lnTo>
+                  <a:pt x="5617380" y="680147"/>
+                </a:lnTo>
+                <a:lnTo>
+                  <a:pt x="5633940" y="736597"/>
+                </a:lnTo>
+                <a:lnTo>
+                  <a:pt x="5650514" y="702449"/>
+                </a:lnTo>
+                <a:lnTo>
+                  <a:pt x="5667080" y="692434"/>
+                </a:lnTo>
+                <a:lnTo>
+                  <a:pt x="5683644" y="654825"/>
+                </a:lnTo>
+                <a:lnTo>
+                  <a:pt x="5700203" y="609691"/>
+                </a:lnTo>
+                <a:lnTo>
+                  <a:pt x="5716781" y="590616"/>
+                </a:lnTo>
+                <a:lnTo>
+                  <a:pt x="5733342" y="586581"/>
+                </a:lnTo>
+                <a:lnTo>
+                  <a:pt x="5749904" y="574147"/>
+                </a:lnTo>
+                <a:lnTo>
+                  <a:pt x="5766466" y="565309"/>
+                </a:lnTo>
+                <a:lnTo>
+                  <a:pt x="5783042" y="565716"/>
+                </a:lnTo>
+                <a:lnTo>
+                  <a:pt x="5799602" y="579748"/>
+                </a:lnTo>
+                <a:lnTo>
+                  <a:pt x="5816167" y="572915"/>
+                </a:lnTo>
+                <a:lnTo>
+                  <a:pt x="5832731" y="573763"/>
+                </a:lnTo>
+                <a:lnTo>
+                  <a:pt x="5849303" y="626203"/>
+                </a:lnTo>
+                <a:lnTo>
+                  <a:pt x="5865867" y="676318"/>
+                </a:lnTo>
+                <a:lnTo>
+                  <a:pt x="5882430" y="644575"/>
+                </a:lnTo>
+                <a:lnTo>
+                  <a:pt x="5898991" y="635291"/>
+                </a:lnTo>
+                <a:lnTo>
+                  <a:pt x="5915566" y="634913"/>
+                </a:lnTo>
+                <a:lnTo>
+                  <a:pt x="5932132" y="637188"/>
+                </a:lnTo>
+                <a:lnTo>
+                  <a:pt x="5948692" y="641090"/>
+                </a:lnTo>
+                <a:lnTo>
+                  <a:pt x="5965254" y="640934"/>
+                </a:lnTo>
+                <a:lnTo>
+                  <a:pt x="5981829" y="642277"/>
+                </a:lnTo>
+                <a:lnTo>
+                  <a:pt x="5998392" y="636967"/>
+                </a:lnTo>
+                <a:lnTo>
+                  <a:pt x="6014952" y="635324"/>
+                </a:lnTo>
+                <a:lnTo>
+                  <a:pt x="6031517" y="636412"/>
+                </a:lnTo>
+                <a:lnTo>
+                  <a:pt x="6048093" y="642496"/>
+                </a:lnTo>
+                <a:lnTo>
+                  <a:pt x="6064655" y="654881"/>
+                </a:lnTo>
+                <a:lnTo>
+                  <a:pt x="6081216" y="674392"/>
+                </a:lnTo>
+                <a:lnTo>
+                  <a:pt x="6097781" y="692480"/>
+                </a:lnTo>
+                <a:lnTo>
+                  <a:pt x="6114354" y="712605"/>
+                </a:lnTo>
+                <a:lnTo>
+                  <a:pt x="6130916" y="685095"/>
+                </a:lnTo>
+                <a:lnTo>
+                  <a:pt x="6147479" y="623311"/>
+                </a:lnTo>
+                <a:lnTo>
+                  <a:pt x="6164043" y="625269"/>
+                </a:lnTo>
+                <a:lnTo>
+                  <a:pt x="6180616" y="705370"/>
+                </a:lnTo>
+                <a:lnTo>
+                  <a:pt x="6197179" y="705913"/>
+                </a:lnTo>
+                <a:lnTo>
+                  <a:pt x="6213742" y="698247"/>
+                </a:lnTo>
+                <a:lnTo>
+                  <a:pt x="6230303" y="725281"/>
+                </a:lnTo>
+                <a:lnTo>
+                  <a:pt x="6246881" y="722661"/>
+                </a:lnTo>
+                <a:lnTo>
+                  <a:pt x="6263443" y="721093"/>
+                </a:lnTo>
+                <a:lnTo>
+                  <a:pt x="6280002" y="710924"/>
+                </a:lnTo>
+                <a:lnTo>
+                  <a:pt x="6296566" y="676853"/>
+                </a:lnTo>
+                <a:lnTo>
+                  <a:pt x="6313140" y="660263"/>
+                </a:lnTo>
+                <a:lnTo>
+                  <a:pt x="6329704" y="642372"/>
+                </a:lnTo>
+                <a:lnTo>
+                  <a:pt x="6346264" y="617978"/>
+                </a:lnTo>
+                <a:lnTo>
+                  <a:pt x="6362828" y="614745"/>
+                </a:lnTo>
+                <a:lnTo>
+                  <a:pt x="6379403" y="618934"/>
+                </a:lnTo>
+                <a:lnTo>
+                  <a:pt x="6395965" y="637327"/>
+                </a:lnTo>
+                <a:lnTo>
+                  <a:pt x="6412528" y="672907"/>
+                </a:lnTo>
+                <a:lnTo>
+                  <a:pt x="6429092" y="710435"/>
+                </a:lnTo>
+                <a:lnTo>
+                  <a:pt x="6445665" y="732927"/>
+                </a:lnTo>
+                <a:lnTo>
+                  <a:pt x="6462228" y="736803"/>
+                </a:lnTo>
+                <a:lnTo>
+                  <a:pt x="6478791" y="705936"/>
+                </a:lnTo>
+                <a:lnTo>
+                  <a:pt x="6495352" y="699566"/>
+                </a:lnTo>
+                <a:lnTo>
+                  <a:pt x="6511928" y="710325"/>
+                </a:lnTo>
+                <a:lnTo>
+                  <a:pt x="6528490" y="678548"/>
+                </a:lnTo>
+                <a:lnTo>
+                  <a:pt x="6545053" y="666557"/>
+                </a:lnTo>
+                <a:lnTo>
+                  <a:pt x="6561611" y="671043"/>
+                </a:lnTo>
+                <a:lnTo>
+                  <a:pt x="6578193" y="711619"/>
+                </a:lnTo>
+                <a:lnTo>
+                  <a:pt x="6594752" y="748368"/>
+                </a:lnTo>
+                <a:lnTo>
+                  <a:pt x="6611316" y="724363"/>
+                </a:lnTo>
+                <a:lnTo>
+                  <a:pt x="6627880" y="713316"/>
+                </a:lnTo>
+                <a:lnTo>
+                  <a:pt x="6644452" y="703354"/>
+                </a:lnTo>
+                <a:lnTo>
+                  <a:pt x="6661015" y="706771"/>
+                </a:lnTo>
+                <a:lnTo>
+                  <a:pt x="6677577" y="736599"/>
+                </a:lnTo>
+                <a:lnTo>
+                  <a:pt x="6694143" y="731501"/>
+                </a:lnTo>
+                <a:lnTo>
+                  <a:pt x="6710714" y="713399"/>
+                </a:lnTo>
+                <a:lnTo>
+                  <a:pt x="6727278" y="687066"/>
+                </a:lnTo>
+                <a:lnTo>
+                  <a:pt x="6743841" y="678031"/>
+                </a:lnTo>
+                <a:lnTo>
+                  <a:pt x="6760404" y="679564"/>
+                </a:lnTo>
+                <a:lnTo>
+                  <a:pt x="6776977" y="695121"/>
+                </a:lnTo>
+                <a:lnTo>
+                  <a:pt x="6793540" y="718700"/>
+                </a:lnTo>
+                <a:lnTo>
+                  <a:pt x="6810104" y="746893"/>
+                </a:lnTo>
+                <a:lnTo>
+                  <a:pt x="6826665" y="749055"/>
+                </a:lnTo>
+                <a:lnTo>
+                  <a:pt x="6843240" y="732672"/>
+                </a:lnTo>
+                <a:lnTo>
+                  <a:pt x="6859802" y="720439"/>
+                </a:lnTo>
+                <a:lnTo>
+                  <a:pt x="6876364" y="714865"/>
+                </a:lnTo>
+                <a:lnTo>
+                  <a:pt x="6892927" y="714844"/>
+                </a:lnTo>
+                <a:lnTo>
+                  <a:pt x="6909502" y="718659"/>
+                </a:lnTo>
+                <a:lnTo>
+                  <a:pt x="6926062" y="722321"/>
+                </a:lnTo>
+                <a:lnTo>
+                  <a:pt x="6942627" y="713460"/>
+                </a:lnTo>
+                <a:lnTo>
+                  <a:pt x="6959191" y="711312"/>
+                </a:lnTo>
+                <a:lnTo>
+                  <a:pt x="6975764" y="715214"/>
+                </a:lnTo>
+                <a:lnTo>
+                  <a:pt x="6992327" y="728139"/>
+                </a:lnTo>
+                <a:lnTo>
+                  <a:pt x="7008892" y="734818"/>
+                </a:lnTo>
+                <a:lnTo>
+                  <a:pt x="7025452" y="726225"/>
+                </a:lnTo>
+                <a:lnTo>
+                  <a:pt x="7042024" y="708784"/>
+                </a:lnTo>
+                <a:lnTo>
+                  <a:pt x="7058590" y="683878"/>
+                </a:lnTo>
+                <a:lnTo>
+                  <a:pt x="7075153" y="660082"/>
+                </a:lnTo>
+                <a:lnTo>
+                  <a:pt x="7091715" y="648740"/>
+                </a:lnTo>
+                <a:lnTo>
+                  <a:pt x="7108287" y="647486"/>
+                </a:lnTo>
+                <a:lnTo>
+                  <a:pt x="7124853" y="648104"/>
+                </a:lnTo>
+                <a:lnTo>
+                  <a:pt x="7141414" y="649369"/>
+                </a:lnTo>
+                <a:lnTo>
+                  <a:pt x="7157977" y="650783"/>
+                </a:lnTo>
+                <a:lnTo>
+                  <a:pt x="7174555" y="660578"/>
+                </a:lnTo>
+                <a:lnTo>
+                  <a:pt x="7191113" y="683179"/>
+                </a:lnTo>
+                <a:lnTo>
+                  <a:pt x="7207676" y="694868"/>
+                </a:lnTo>
+                <a:lnTo>
+                  <a:pt x="7224240" y="669867"/>
+                </a:lnTo>
+                <a:lnTo>
+                  <a:pt x="7240814" y="652799"/>
+                </a:lnTo>
+                <a:lnTo>
+                  <a:pt x="7257374" y="651893"/>
+                </a:lnTo>
+                <a:lnTo>
+                  <a:pt x="7273939" y="652706"/>
+                </a:lnTo>
+                <a:lnTo>
+                  <a:pt x="7290501" y="638480"/>
+                </a:lnTo>
+                <a:lnTo>
+                  <a:pt x="7307074" y="622210"/>
+                </a:lnTo>
+                <a:lnTo>
+                  <a:pt x="7323639" y="596619"/>
+                </a:lnTo>
+                <a:lnTo>
+                  <a:pt x="7340201" y="588222"/>
+                </a:lnTo>
+                <a:lnTo>
+                  <a:pt x="7356763" y="599241"/>
+                </a:lnTo>
+                <a:lnTo>
+                  <a:pt x="7373339" y="662527"/>
+                </a:lnTo>
+                <a:lnTo>
+                  <a:pt x="7389902" y="735982"/>
+                </a:lnTo>
+                <a:lnTo>
+                  <a:pt x="7406464" y="726245"/>
+                </a:lnTo>
+                <a:lnTo>
+                  <a:pt x="7423027" y="712121"/>
+                </a:lnTo>
+                <a:lnTo>
+                  <a:pt x="7439601" y="701340"/>
+                </a:lnTo>
+                <a:lnTo>
+                  <a:pt x="7456165" y="684071"/>
+                </a:lnTo>
+                <a:lnTo>
+                  <a:pt x="7472722" y="669016"/>
+                </a:lnTo>
+                <a:lnTo>
+                  <a:pt x="7489289" y="655617"/>
+                </a:lnTo>
+                <a:lnTo>
+                  <a:pt x="7505864" y="650428"/>
+                </a:lnTo>
+                <a:lnTo>
+                  <a:pt x="7522426" y="650764"/>
+                </a:lnTo>
+                <a:lnTo>
+                  <a:pt x="7538988" y="654710"/>
+                </a:lnTo>
+                <a:lnTo>
+                  <a:pt x="7555551" y="649568"/>
+                </a:lnTo>
+                <a:lnTo>
+                  <a:pt x="7572124" y="644667"/>
+                </a:lnTo>
+                <a:lnTo>
+                  <a:pt x="7588687" y="644517"/>
+                </a:lnTo>
+                <a:lnTo>
+                  <a:pt x="7605251" y="651252"/>
+                </a:lnTo>
+                <a:lnTo>
+                  <a:pt x="7621813" y="673750"/>
+                </a:lnTo>
+                <a:lnTo>
+                  <a:pt x="7638388" y="714360"/>
+                </a:lnTo>
+                <a:lnTo>
+                  <a:pt x="7654952" y="751224"/>
+                </a:lnTo>
+                <a:lnTo>
+                  <a:pt x="7671512" y="739968"/>
+                </a:lnTo>
+                <a:lnTo>
+                  <a:pt x="7688075" y="729525"/>
+                </a:lnTo>
+                <a:lnTo>
+                  <a:pt x="7704650" y="728189"/>
+                </a:lnTo>
+                <a:lnTo>
+                  <a:pt x="7721214" y="731843"/>
+                </a:lnTo>
+                <a:lnTo>
+                  <a:pt x="7737774" y="734127"/>
+                </a:lnTo>
+                <a:lnTo>
+                  <a:pt x="7754338" y="722422"/>
+                </a:lnTo>
+                <a:lnTo>
+                  <a:pt x="7770915" y="708887"/>
+                </a:lnTo>
+                <a:lnTo>
+                  <a:pt x="7787476" y="694873"/>
+                </a:lnTo>
+                <a:lnTo>
+                  <a:pt x="7804038" y="689344"/>
+                </a:lnTo>
+                <a:lnTo>
+                  <a:pt x="7820603" y="689731"/>
+                </a:lnTo>
+                <a:lnTo>
+                  <a:pt x="7837173" y="695290"/>
+                </a:lnTo>
+                <a:lnTo>
+                  <a:pt x="7853735" y="702430"/>
+                </a:lnTo>
+                <a:lnTo>
+                  <a:pt x="7870300" y="719252"/>
+                </a:lnTo>
+                <a:lnTo>
+                  <a:pt x="7886864" y="749051"/>
+                </a:lnTo>
+                <a:lnTo>
+                  <a:pt x="7903437" y="745653"/>
+                </a:lnTo>
+                <a:lnTo>
+                  <a:pt x="7920000" y="706048"/>
+                </a:lnTo>
+                <a:lnTo>
+                  <a:pt x="7936563" y="703139"/>
+                </a:lnTo>
+                <a:lnTo>
+                  <a:pt x="7953123" y="726248"/>
+                </a:lnTo>
+                <a:lnTo>
+                  <a:pt x="7969703" y="777289"/>
+                </a:lnTo>
+                <a:lnTo>
+                  <a:pt x="7986263" y="763513"/>
+                </a:lnTo>
+                <a:lnTo>
+                  <a:pt x="8002825" y="756497"/>
+                </a:lnTo>
+                <a:lnTo>
+                  <a:pt x="8019390" y="757170"/>
+                </a:lnTo>
+                <a:lnTo>
+                  <a:pt x="8035963" y="757198"/>
+                </a:lnTo>
+                <a:lnTo>
+                  <a:pt x="8052524" y="732338"/>
+                </a:lnTo>
+                <a:lnTo>
+                  <a:pt x="8069087" y="726981"/>
+                </a:lnTo>
+                <a:lnTo>
+                  <a:pt x="8085653" y="729698"/>
+                </a:lnTo>
+                <a:lnTo>
+                  <a:pt x="8102225" y="736432"/>
+                </a:lnTo>
+                <a:lnTo>
+                  <a:pt x="8118784" y="735372"/>
+                </a:lnTo>
+                <a:lnTo>
+                  <a:pt x="8135351" y="735723"/>
+                </a:lnTo>
+                <a:lnTo>
+                  <a:pt x="8151913" y="732814"/>
+                </a:lnTo>
+                <a:lnTo>
+                  <a:pt x="8168486" y="732615"/>
+                </a:lnTo>
+                <a:lnTo>
+                  <a:pt x="8185050" y="734996"/>
+                </a:lnTo>
+                <a:lnTo>
+                  <a:pt x="8201614" y="738790"/>
+                </a:lnTo>
+                <a:lnTo>
+                  <a:pt x="8218174" y="729864"/>
+                </a:lnTo>
+                <a:lnTo>
+                  <a:pt x="8234749" y="724201"/>
+                </a:lnTo>
+                <a:lnTo>
+                  <a:pt x="8251310" y="723527"/>
+                </a:lnTo>
+                <a:lnTo>
+                  <a:pt x="8267874" y="723172"/>
+                </a:lnTo>
+                <a:lnTo>
+                  <a:pt x="8284436" y="716907"/>
+                </a:lnTo>
+                <a:lnTo>
+                  <a:pt x="8301012" y="717274"/>
+                </a:lnTo>
+                <a:lnTo>
+                  <a:pt x="8317574" y="748971"/>
+                </a:lnTo>
+                <a:lnTo>
+                  <a:pt x="8334138" y="701183"/>
+                </a:lnTo>
+                <a:lnTo>
+                  <a:pt x="8350699" y="688561"/>
+                </a:lnTo>
+                <a:lnTo>
+                  <a:pt x="8367273" y="703851"/>
+                </a:lnTo>
+                <a:lnTo>
+                  <a:pt x="8383836" y="746689"/>
+                </a:lnTo>
+                <a:lnTo>
+                  <a:pt x="8400402" y="766253"/>
+                </a:lnTo>
+                <a:lnTo>
+                  <a:pt x="8416964" y="732453"/>
+                </a:lnTo>
+                <a:lnTo>
+                  <a:pt x="8433535" y="723672"/>
+                </a:lnTo>
+                <a:lnTo>
+                  <a:pt x="8450101" y="727990"/>
+                </a:lnTo>
+                <a:lnTo>
+                  <a:pt x="8466663" y="736978"/>
+                </a:lnTo>
+                <a:lnTo>
+                  <a:pt x="8483223" y="731445"/>
+                </a:lnTo>
+                <a:lnTo>
+                  <a:pt x="8499796" y="720228"/>
+                </a:lnTo>
+                <a:lnTo>
+                  <a:pt x="8516361" y="703355"/>
+                </a:lnTo>
+                <a:lnTo>
+                  <a:pt x="8532925" y="686339"/>
+                </a:lnTo>
+                <a:lnTo>
+                  <a:pt x="8549487" y="674172"/>
+                </a:lnTo>
+                <a:lnTo>
+                  <a:pt x="8566063" y="672769"/>
+                </a:lnTo>
+                <a:lnTo>
+                  <a:pt x="8582624" y="679756"/>
+                </a:lnTo>
+                <a:lnTo>
+                  <a:pt x="8599185" y="707022"/>
+                </a:lnTo>
+                <a:lnTo>
+                  <a:pt x="8615748" y="739650"/>
+                </a:lnTo>
+                <a:lnTo>
+                  <a:pt x="8632321" y="764408"/>
+                </a:lnTo>
+                <a:lnTo>
+                  <a:pt x="8648885" y="775611"/>
+                </a:lnTo>
+                <a:lnTo>
+                  <a:pt x="8665449" y="770200"/>
+                </a:lnTo>
+                <a:lnTo>
+                  <a:pt x="8682013" y="772693"/>
+                </a:lnTo>
+                <a:lnTo>
+                  <a:pt x="8698586" y="783198"/>
+                </a:lnTo>
+                <a:lnTo>
+                  <a:pt x="8715149" y="776700"/>
+                </a:lnTo>
+                <a:lnTo>
+                  <a:pt x="8731711" y="773478"/>
+                </a:lnTo>
+                <a:lnTo>
+                  <a:pt x="8748271" y="772730"/>
+                </a:lnTo>
+                <a:lnTo>
+                  <a:pt x="8764847" y="773076"/>
+                </a:lnTo>
+                <a:lnTo>
+                  <a:pt x="8781411" y="775250"/>
+                </a:lnTo>
+                <a:lnTo>
+                  <a:pt x="8797973" y="769793"/>
+                </a:lnTo>
+                <a:lnTo>
+                  <a:pt x="8814535" y="763428"/>
+                </a:lnTo>
+                <a:lnTo>
+                  <a:pt x="8831110" y="760506"/>
+                </a:lnTo>
+                <a:lnTo>
+                  <a:pt x="8847673" y="760573"/>
+                </a:lnTo>
+                <a:lnTo>
+                  <a:pt x="8864236" y="765482"/>
+                </a:lnTo>
+                <a:lnTo>
+                  <a:pt x="8880798" y="776014"/>
+                </a:lnTo>
+                <a:lnTo>
+                  <a:pt x="8897374" y="783521"/>
+                </a:lnTo>
+                <a:lnTo>
+                  <a:pt x="8913936" y="779163"/>
+                </a:lnTo>
+                <a:lnTo>
+                  <a:pt x="8930497" y="776249"/>
+                </a:lnTo>
+                <a:lnTo>
+                  <a:pt x="8947062" y="774142"/>
+                </a:lnTo>
+                <a:lnTo>
+                  <a:pt x="8963634" y="774101"/>
+                </a:lnTo>
+                <a:lnTo>
+                  <a:pt x="8980197" y="777087"/>
+                </a:lnTo>
+                <a:lnTo>
+                  <a:pt x="8996758" y="766540"/>
+                </a:lnTo>
+                <a:lnTo>
+                  <a:pt x="9013325" y="744912"/>
+                </a:lnTo>
+                <a:lnTo>
+                  <a:pt x="9029895" y="743710"/>
+                </a:lnTo>
+                <a:lnTo>
+                  <a:pt x="9046463" y="759686"/>
+                </a:lnTo>
+                <a:lnTo>
+                  <a:pt x="9063022" y="777588"/>
+                </a:lnTo>
+                <a:lnTo>
+                  <a:pt x="9079584" y="760957"/>
+                </a:lnTo>
+                <a:lnTo>
+                  <a:pt x="9096160" y="744529"/>
+                </a:lnTo>
+                <a:lnTo>
+                  <a:pt x="9112722" y="738609"/>
+                </a:lnTo>
+                <a:lnTo>
+                  <a:pt x="9129284" y="739068"/>
+                </a:lnTo>
+                <a:lnTo>
+                  <a:pt x="9145848" y="746748"/>
+                </a:lnTo>
+                <a:lnTo>
+                  <a:pt x="9162422" y="760755"/>
+                </a:lnTo>
+                <a:lnTo>
+                  <a:pt x="9178984" y="774782"/>
+                </a:lnTo>
+                <a:lnTo>
+                  <a:pt x="9195547" y="783235"/>
+                </a:lnTo>
+                <a:lnTo>
+                  <a:pt x="9212110" y="779476"/>
+                </a:lnTo>
+                <a:lnTo>
+                  <a:pt x="9228687" y="772509"/>
+                </a:lnTo>
+                <a:lnTo>
+                  <a:pt x="9245247" y="771246"/>
+                </a:lnTo>
+                <a:lnTo>
+                  <a:pt x="9261810" y="774607"/>
+                </a:lnTo>
+                <a:lnTo>
+                  <a:pt x="9278372" y="786007"/>
+                </a:lnTo>
+                <a:lnTo>
+                  <a:pt x="9294946" y="787740"/>
+                </a:lnTo>
+                <a:lnTo>
+                  <a:pt x="9311509" y="776138"/>
+                </a:lnTo>
+                <a:lnTo>
+                  <a:pt x="9328074" y="763270"/>
+                </a:lnTo>
+                <a:lnTo>
+                  <a:pt x="9344637" y="751024"/>
+                </a:lnTo>
+                <a:lnTo>
+                  <a:pt x="9361210" y="739681"/>
+                </a:lnTo>
+                <a:lnTo>
+                  <a:pt x="9377772" y="737362"/>
+                </a:lnTo>
+                <a:lnTo>
+                  <a:pt x="9394334" y="739995"/>
+                </a:lnTo>
+                <a:lnTo>
+                  <a:pt x="9410898" y="752922"/>
+                </a:lnTo>
+                <a:lnTo>
+                  <a:pt x="9427472" y="768283"/>
+                </a:lnTo>
+                <a:lnTo>
+                  <a:pt x="9444033" y="770709"/>
+                </a:lnTo>
+                <a:lnTo>
+                  <a:pt x="9460597" y="772337"/>
+                </a:lnTo>
+                <a:lnTo>
+                  <a:pt x="9477159" y="783414"/>
+                </a:lnTo>
+                <a:lnTo>
+                  <a:pt x="9493735" y="796219"/>
+                </a:lnTo>
+                <a:lnTo>
+                  <a:pt x="9510294" y="799711"/>
+                </a:lnTo>
+                <a:lnTo>
+                  <a:pt x="9526861" y="797101"/>
+                </a:lnTo>
+                <a:lnTo>
+                  <a:pt x="9543424" y="792883"/>
+                </a:lnTo>
+                <a:lnTo>
+                  <a:pt x="9559996" y="791845"/>
+                </a:lnTo>
+                <a:lnTo>
+                  <a:pt x="9576559" y="792711"/>
+                </a:lnTo>
+                <a:lnTo>
+                  <a:pt x="9593124" y="795682"/>
+                </a:lnTo>
+                <a:lnTo>
+                  <a:pt x="9609686" y="796441"/>
+                </a:lnTo>
+                <a:lnTo>
+                  <a:pt x="9626259" y="793698"/>
+                </a:lnTo>
+                <a:lnTo>
+                  <a:pt x="9642821" y="792582"/>
+                </a:lnTo>
+                <a:lnTo>
+                  <a:pt x="9659383" y="792752"/>
+                </a:lnTo>
+                <a:lnTo>
+                  <a:pt x="9675945" y="788067"/>
+                </a:lnTo>
+                <a:lnTo>
+                  <a:pt x="9692522" y="781478"/>
+                </a:lnTo>
+                <a:lnTo>
+                  <a:pt x="9709086" y="776822"/>
+                </a:lnTo>
+                <a:lnTo>
+                  <a:pt x="9725646" y="776728"/>
+                </a:lnTo>
+                <a:lnTo>
+                  <a:pt x="9742211" y="781118"/>
+                </a:lnTo>
+                <a:lnTo>
+                  <a:pt x="9758783" y="788986"/>
+                </a:lnTo>
+                <a:lnTo>
+                  <a:pt x="9775346" y="797557"/>
+                </a:lnTo>
+                <a:lnTo>
+                  <a:pt x="9791910" y="798121"/>
+                </a:lnTo>
+                <a:lnTo>
+                  <a:pt x="9808472" y="796899"/>
+                </a:lnTo>
+                <a:lnTo>
+                  <a:pt x="9825049" y="798094"/>
+                </a:lnTo>
+                <a:lnTo>
+                  <a:pt x="9841608" y="798686"/>
+                </a:lnTo>
+                <a:lnTo>
+                  <a:pt x="9858174" y="792265"/>
+                </a:lnTo>
+                <a:lnTo>
+                  <a:pt x="9874734" y="783619"/>
+                </a:lnTo>
+                <a:lnTo>
+                  <a:pt x="9891311" y="772820"/>
+                </a:lnTo>
+                <a:lnTo>
+                  <a:pt x="9907871" y="758071"/>
+                </a:lnTo>
+                <a:lnTo>
+                  <a:pt x="9924435" y="748043"/>
+                </a:lnTo>
+                <a:lnTo>
+                  <a:pt x="9940996" y="744849"/>
+                </a:lnTo>
+                <a:lnTo>
+                  <a:pt x="9957571" y="745060"/>
+                </a:lnTo>
+                <a:lnTo>
+                  <a:pt x="9974136" y="750743"/>
+                </a:lnTo>
+                <a:lnTo>
+                  <a:pt x="9990695" y="761718"/>
+                </a:lnTo>
+                <a:lnTo>
+                  <a:pt x="10007260" y="771269"/>
+                </a:lnTo>
+                <a:lnTo>
+                  <a:pt x="10023836" y="778291"/>
+                </a:lnTo>
+                <a:lnTo>
+                  <a:pt x="10040397" y="785107"/>
+                </a:lnTo>
+                <a:lnTo>
+                  <a:pt x="10056957" y="785298"/>
+                </a:lnTo>
+                <a:lnTo>
+                  <a:pt x="10073523" y="781668"/>
+                </a:lnTo>
+                <a:lnTo>
+                  <a:pt x="10090095" y="778743"/>
+                </a:lnTo>
+                <a:lnTo>
+                  <a:pt x="10106660" y="775194"/>
+                </a:lnTo>
+                <a:lnTo>
+                  <a:pt x="10123223" y="774602"/>
+                </a:lnTo>
+                <a:lnTo>
+                  <a:pt x="10139785" y="776708"/>
+                </a:lnTo>
+                <a:lnTo>
+                  <a:pt x="10156360" y="777959"/>
+                </a:lnTo>
+                <a:lnTo>
+                  <a:pt x="10172923" y="776434"/>
+                </a:lnTo>
+                <a:lnTo>
+                  <a:pt x="10189484" y="775138"/>
+                </a:lnTo>
+                <a:lnTo>
+                  <a:pt x="10206044" y="775653"/>
+                </a:lnTo>
+                <a:lnTo>
+                  <a:pt x="10222622" y="782755"/>
+                </a:lnTo>
+                <a:lnTo>
+                  <a:pt x="10239185" y="777622"/>
+                </a:lnTo>
+                <a:lnTo>
+                  <a:pt x="10255747" y="773031"/>
+                </a:lnTo>
+                <a:lnTo>
+                  <a:pt x="10272310" y="773046"/>
+                </a:lnTo>
+                <a:lnTo>
+                  <a:pt x="10288883" y="777323"/>
+                </a:lnTo>
+                <a:lnTo>
+                  <a:pt x="10305447" y="782909"/>
+                </a:lnTo>
+                <a:lnTo>
+                  <a:pt x="10322007" y="787043"/>
+                </a:lnTo>
+                <a:lnTo>
+                  <a:pt x="10338573" y="786847"/>
+                </a:lnTo>
+                <a:lnTo>
+                  <a:pt x="10355148" y="784885"/>
+                </a:lnTo>
+                <a:lnTo>
+                  <a:pt x="10371709" y="781306"/>
+                </a:lnTo>
+                <a:lnTo>
+                  <a:pt x="10388272" y="760040"/>
+                </a:lnTo>
+                <a:lnTo>
+                  <a:pt x="10404835" y="752544"/>
+                </a:lnTo>
+                <a:lnTo>
+                  <a:pt x="10421406" y="752619"/>
+                </a:lnTo>
+                <a:lnTo>
+                  <a:pt x="10437972" y="756944"/>
+                </a:lnTo>
+                <a:lnTo>
+                  <a:pt x="10454535" y="763873"/>
+                </a:lnTo>
+                <a:lnTo>
+                  <a:pt x="10471095" y="767901"/>
+                </a:lnTo>
+                <a:lnTo>
+                  <a:pt x="10487672" y="769395"/>
+                </a:lnTo>
+                <a:lnTo>
+                  <a:pt x="10504235" y="776501"/>
+                </a:lnTo>
+                <a:lnTo>
+                  <a:pt x="10520797" y="787523"/>
+                </a:lnTo>
+                <a:lnTo>
+                  <a:pt x="10537358" y="795410"/>
                 </a:lnTo>
               </a:path>
             </a:pathLst>
@@ -12581,7 +12652,7 @@
         </p:nvSpPr>
         <p:spPr>
           <a:xfrm>
-            <a:off x="822960" y="3246120"/>
+            <a:off x="822960" y="3017520"/>
             <a:ext cx="2743200" cy="274320"/>
           </a:xfrm>
           <a:prstGeom prst="rect">
@@ -12616,7 +12687,7 @@
         </p:nvSpPr>
         <p:spPr>
           <a:xfrm>
-            <a:off x="822960" y="5111496"/>
+            <a:off x="822960" y="4700016"/>
             <a:ext cx="109728" cy="109728"/>
           </a:xfrm>
           <a:prstGeom prst="ellipse">
@@ -12660,7 +12731,7 @@
         </p:nvCxnSpPr>
         <p:spPr>
           <a:xfrm>
-            <a:off x="1005840" y="5166360"/>
+            <a:off x="1005840" y="4754880"/>
             <a:ext cx="2362123" cy="0"/>
           </a:xfrm>
           <a:prstGeom prst="line">
@@ -12695,8 +12766,8 @@
         </p:nvSpPr>
         <p:spPr>
           <a:xfrm>
-            <a:off x="822960" y="5349240"/>
-            <a:ext cx="2362123" cy="640080"/>
+            <a:off x="822960" y="4937760"/>
+            <a:ext cx="2362123" cy="365760"/>
           </a:xfrm>
           <a:prstGeom prst="rect">
             <a:avLst/>
@@ -12709,11 +12780,7 @@
           </a:bodyPr>
           <a:lstStyle/>
           <a:p>
-            <a:pPr algn="l">
-              <a:lnSpc>
-                <a:spcPct val="115000"/>
-              </a:lnSpc>
-            </a:pPr>
+            <a:pPr algn="l"/>
             <a:r>
               <a:rPr sz="1600">
                 <a:solidFill>
@@ -12728,13 +12795,52 @@
       </p:sp>
       <p:sp>
         <p:nvSpPr>
-          <p:cNvPr id="12" name="Oval 11"/>
+          <p:cNvPr id="12" name="TextBox 11"/>
+          <p:cNvSpPr txBox="1"/>
+          <p:nvPr/>
+        </p:nvSpPr>
+        <p:spPr>
+          <a:xfrm>
+            <a:off x="822960" y="5303520"/>
+            <a:ext cx="2316403" cy="822960"/>
+          </a:xfrm>
+          <a:prstGeom prst="rect">
+            <a:avLst/>
+          </a:prstGeom>
+          <a:noFill/>
+        </p:spPr>
+        <p:txBody>
+          <a:bodyPr wrap="square" lIns="0" rIns="0" tIns="0" bIns="0" anchor="t">
+            <a:spAutoFit/>
+          </a:bodyPr>
+          <a:lstStyle/>
+          <a:p>
+            <a:pPr algn="l">
+              <a:lnSpc>
+                <a:spcPct val="120000"/>
+              </a:lnSpc>
+            </a:pPr>
+            <a:r>
+              <a:rPr sz="1200">
+                <a:solidFill>
+                  <a:srgbClr val="9A9894"/>
+                </a:solidFill>
+                <a:latin typeface="Switzer Light"/>
+              </a:rPr>
+              <a:t>The sensor jumps above the laptop's normal background shake.</a:t>
+            </a:r>
+          </a:p>
+        </p:txBody>
+      </p:sp>
+      <p:sp>
+        <p:nvSpPr>
+          <p:cNvPr id="13" name="Oval 12"/>
           <p:cNvSpPr/>
           <p:nvPr/>
         </p:nvSpPr>
         <p:spPr>
           <a:xfrm>
-            <a:off x="3459403" y="5111496"/>
+            <a:off x="3459403" y="4700016"/>
             <a:ext cx="109728" cy="109728"/>
           </a:xfrm>
           <a:prstGeom prst="ellipse">
@@ -12772,13 +12878,13 @@
       </p:sp>
       <p:cxnSp>
         <p:nvCxnSpPr>
-          <p:cNvPr id="13" name="Connector 12"/>
+          <p:cNvPr id="14" name="Connector 13"/>
           <p:cNvCxnSpPr/>
           <p:nvPr/>
         </p:nvCxnSpPr>
         <p:spPr>
           <a:xfrm>
-            <a:off x="3642283" y="5166360"/>
+            <a:off x="3642283" y="4754880"/>
             <a:ext cx="2362124" cy="0"/>
           </a:xfrm>
           <a:prstGeom prst="line">
@@ -12807,14 +12913,14 @@
       </p:cxnSp>
       <p:sp>
         <p:nvSpPr>
-          <p:cNvPr id="14" name="TextBox 13"/>
+          <p:cNvPr id="15" name="TextBox 14"/>
           <p:cNvSpPr txBox="1"/>
           <p:nvPr/>
         </p:nvSpPr>
         <p:spPr>
           <a:xfrm>
-            <a:off x="3459403" y="5349240"/>
-            <a:ext cx="2362123" cy="640080"/>
+            <a:off x="3459403" y="4937760"/>
+            <a:ext cx="2362123" cy="365760"/>
           </a:xfrm>
           <a:prstGeom prst="rect">
             <a:avLst/>
@@ -12827,11 +12933,7 @@
           </a:bodyPr>
           <a:lstStyle/>
           <a:p>
-            <a:pPr algn="l">
-              <a:lnSpc>
-                <a:spcPct val="115000"/>
-              </a:lnSpc>
-            </a:pPr>
+            <a:pPr algn="l"/>
             <a:r>
               <a:rPr sz="1600">
                 <a:solidFill>
@@ -12839,20 +12941,59 @@
                 </a:solidFill>
                 <a:latin typeface="Switzer Light"/>
               </a:rPr>
-              <a:t>Not typing or on the trackpad</a:t>
+              <a:t>Not typing?</a:t>
             </a:r>
           </a:p>
         </p:txBody>
       </p:sp>
       <p:sp>
         <p:nvSpPr>
-          <p:cNvPr id="15" name="Oval 14"/>
+          <p:cNvPr id="16" name="TextBox 15"/>
+          <p:cNvSpPr txBox="1"/>
+          <p:nvPr/>
+        </p:nvSpPr>
+        <p:spPr>
+          <a:xfrm>
+            <a:off x="3459403" y="5303520"/>
+            <a:ext cx="2316403" cy="822960"/>
+          </a:xfrm>
+          <a:prstGeom prst="rect">
+            <a:avLst/>
+          </a:prstGeom>
+          <a:noFill/>
+        </p:spPr>
+        <p:txBody>
+          <a:bodyPr wrap="square" lIns="0" rIns="0" tIns="0" bIns="0" anchor="t">
+            <a:spAutoFit/>
+          </a:bodyPr>
+          <a:lstStyle/>
+          <a:p>
+            <a:pPr algn="l">
+              <a:lnSpc>
+                <a:spcPct val="120000"/>
+              </a:lnSpc>
+            </a:pPr>
+            <a:r>
+              <a:rPr sz="1200">
+                <a:solidFill>
+                  <a:srgbClr val="9A9894"/>
+                </a:solidFill>
+                <a:latin typeface="Switzer Light"/>
+              </a:rPr>
+              <a:t>If a key or the trackpad moved at that moment, it is ignored.</a:t>
+            </a:r>
+          </a:p>
+        </p:txBody>
+      </p:sp>
+      <p:sp>
+        <p:nvSpPr>
+          <p:cNvPr id="17" name="Oval 16"/>
           <p:cNvSpPr/>
           <p:nvPr/>
         </p:nvSpPr>
         <p:spPr>
           <a:xfrm>
-            <a:off x="6095847" y="5111496"/>
+            <a:off x="6095847" y="4700016"/>
             <a:ext cx="109728" cy="109728"/>
           </a:xfrm>
           <a:prstGeom prst="ellipse">
@@ -12890,13 +13031,13 @@
       </p:sp>
       <p:cxnSp>
         <p:nvCxnSpPr>
-          <p:cNvPr id="16" name="Connector 15"/>
+          <p:cNvPr id="18" name="Connector 17"/>
           <p:cNvCxnSpPr/>
           <p:nvPr/>
         </p:nvCxnSpPr>
         <p:spPr>
           <a:xfrm>
-            <a:off x="6278727" y="5166360"/>
+            <a:off x="6278727" y="4754880"/>
             <a:ext cx="2362124" cy="0"/>
           </a:xfrm>
           <a:prstGeom prst="line">
@@ -12925,14 +13066,14 @@
       </p:cxnSp>
       <p:sp>
         <p:nvSpPr>
-          <p:cNvPr id="17" name="TextBox 16"/>
+          <p:cNvPr id="19" name="TextBox 18"/>
           <p:cNvSpPr txBox="1"/>
           <p:nvPr/>
         </p:nvSpPr>
         <p:spPr>
           <a:xfrm>
-            <a:off x="6095847" y="5349240"/>
-            <a:ext cx="2362123" cy="640080"/>
+            <a:off x="6095847" y="4937760"/>
+            <a:ext cx="2362123" cy="365760"/>
           </a:xfrm>
           <a:prstGeom prst="rect">
             <a:avLst/>
@@ -12945,11 +13086,7 @@
           </a:bodyPr>
           <a:lstStyle/>
           <a:p>
-            <a:pPr algn="l">
-              <a:lnSpc>
-                <a:spcPct val="115000"/>
-              </a:lnSpc>
-            </a:pPr>
+            <a:pPr algn="l"/>
             <a:r>
               <a:rPr sz="1600">
                 <a:solidFill>
@@ -12957,20 +13094,59 @@
                 </a:solidFill>
                 <a:latin typeface="Switzer Light"/>
               </a:rPr>
-              <a:t>Two models vote on the spot</a:t>
+              <a:t>Which spot?</a:t>
             </a:r>
           </a:p>
         </p:txBody>
       </p:sp>
       <p:sp>
         <p:nvSpPr>
-          <p:cNvPr id="18" name="Oval 17"/>
+          <p:cNvPr id="20" name="TextBox 19"/>
+          <p:cNvSpPr txBox="1"/>
+          <p:nvPr/>
+        </p:nvSpPr>
+        <p:spPr>
+          <a:xfrm>
+            <a:off x="6095847" y="5303520"/>
+            <a:ext cx="2316403" cy="822960"/>
+          </a:xfrm>
+          <a:prstGeom prst="rect">
+            <a:avLst/>
+          </a:prstGeom>
+          <a:noFill/>
+        </p:spPr>
+        <p:txBody>
+          <a:bodyPr wrap="square" lIns="0" rIns="0" tIns="0" bIns="0" anchor="t">
+            <a:spAutoFit/>
+          </a:bodyPr>
+          <a:lstStyle/>
+          <a:p>
+            <a:pPr algn="l">
+              <a:lnSpc>
+                <a:spcPct val="120000"/>
+              </a:lnSpc>
+            </a:pPr>
+            <a:r>
+              <a:rPr sz="1200">
+                <a:solidFill>
+                  <a:srgbClr val="9A9894"/>
+                </a:solidFill>
+                <a:latin typeface="Switzer Light"/>
+              </a:rPr>
+              <a:t>33 measurements of the bump. Two small models compare it with the taps you gave during setup.</a:t>
+            </a:r>
+          </a:p>
+        </p:txBody>
+      </p:sp>
+      <p:sp>
+        <p:nvSpPr>
+          <p:cNvPr id="21" name="Oval 20"/>
           <p:cNvSpPr/>
           <p:nvPr/>
         </p:nvSpPr>
         <p:spPr>
           <a:xfrm>
-            <a:off x="8732291" y="5111496"/>
+            <a:off x="8732291" y="4700016"/>
             <a:ext cx="109728" cy="109728"/>
           </a:xfrm>
           <a:prstGeom prst="ellipse">
@@ -13008,14 +13184,14 @@
       </p:sp>
       <p:sp>
         <p:nvSpPr>
-          <p:cNvPr id="19" name="TextBox 18"/>
+          <p:cNvPr id="22" name="TextBox 21"/>
           <p:cNvSpPr txBox="1"/>
           <p:nvPr/>
         </p:nvSpPr>
         <p:spPr>
           <a:xfrm>
-            <a:off x="8732291" y="5349240"/>
-            <a:ext cx="2362123" cy="640080"/>
+            <a:off x="8732291" y="4937760"/>
+            <a:ext cx="2362123" cy="365760"/>
           </a:xfrm>
           <a:prstGeom prst="rect">
             <a:avLst/>
@@ -13028,11 +13204,7 @@
           </a:bodyPr>
           <a:lstStyle/>
           <a:p>
-            <a:pPr algn="l">
-              <a:lnSpc>
-                <a:spcPct val="115000"/>
-              </a:lnSpc>
-            </a:pPr>
+            <a:pPr algn="l"/>
             <a:r>
               <a:rPr sz="1600">
                 <a:solidFill>
@@ -13047,14 +13219,14 @@
       </p:sp>
       <p:sp>
         <p:nvSpPr>
-          <p:cNvPr id="20" name="TextBox 19"/>
+          <p:cNvPr id="23" name="TextBox 22"/>
           <p:cNvSpPr txBox="1"/>
           <p:nvPr/>
         </p:nvSpPr>
         <p:spPr>
           <a:xfrm>
-            <a:off x="822960" y="6263640"/>
-            <a:ext cx="10545775" cy="365760"/>
+            <a:off x="8732291" y="5303520"/>
+            <a:ext cx="2316403" cy="822960"/>
           </a:xfrm>
           <a:prstGeom prst="rect">
             <a:avLst/>
@@ -13067,15 +13239,54 @@
           </a:bodyPr>
           <a:lstStyle/>
           <a:p>
+            <a:pPr algn="l">
+              <a:lnSpc>
+                <a:spcPct val="120000"/>
+              </a:lnSpc>
+            </a:pPr>
+            <a:r>
+              <a:rPr sz="1200">
+                <a:solidFill>
+                  <a:srgbClr val="9A9894"/>
+                </a:solidFill>
+                <a:latin typeface="Switzer Light"/>
+              </a:rPr>
+              <a:t>If it does not look like your taps, nothing fires. It also learns desk and lap separately.</a:t>
+            </a:r>
+          </a:p>
+        </p:txBody>
+      </p:sp>
+      <p:sp>
+        <p:nvSpPr>
+          <p:cNvPr id="24" name="TextBox 23"/>
+          <p:cNvSpPr txBox="1"/>
+          <p:nvPr/>
+        </p:nvSpPr>
+        <p:spPr>
+          <a:xfrm>
+            <a:off x="822960" y="6355080"/>
+            <a:ext cx="10545775" cy="365760"/>
+          </a:xfrm>
+          <a:prstGeom prst="rect">
+            <a:avLst/>
+          </a:prstGeom>
+          <a:noFill/>
+        </p:spPr>
+        <p:txBody>
+          <a:bodyPr wrap="square" lIns="0" rIns="0" tIns="0" bIns="0" anchor="t">
+            <a:spAutoFit/>
+          </a:bodyPr>
+          <a:lstStyle/>
+          <a:p>
             <a:pPr algn="l"/>
             <a:r>
-              <a:rPr sz="1300">
+              <a:rPr sz="1200">
                 <a:solidFill>
                   <a:srgbClr val="5E5C59"/>
                 </a:solidFill>
                 <a:latin typeface="Switzer Light"/>
               </a:rPr>
-              <a:t>Real sensor data, 800 readings a second. 33 measurements per tap. All on the laptop.</a:t>
+              <a:t>Real sensor data, 800 readings a second. Everything runs on the laptop; nothing is sent anywhere.</a:t>
             </a:r>
           </a:p>
         </p:txBody>
@@ -13088,127 +13299,6 @@
   <p:transition spd="slow">
     <p:fade/>
   </p:transition>
-  <p:timing>
-    <p:tnLst>
-      <p:par>
-        <p:cTn id="1" dur="indefinite" restart="never" nodeType="tmRoot">
-          <p:childTnLst>
-            <p:seq concurrent="1" nextAc="seek">
-              <p:cTn id="2" dur="indefinite" nodeType="mainSeq">
-                <p:childTnLst>
-                  <p:par>
-                    <p:cTn id="3" fill="hold">
-                      <p:stCondLst>
-                        <p:cond delay="indefinite"/>
-                        <p:cond evt="onBegin" delay="0">
-                          <p:tn val="2"/>
-                        </p:cond>
-                      </p:stCondLst>
-                      <p:childTnLst>
-                        <p:par>
-                          <p:cTn id="4" fill="hold">
-                            <p:stCondLst>
-                              <p:cond delay="0"/>
-                            </p:stCondLst>
-                            <p:childTnLst>
-                              <p:par>
-                                <p:cTn id="5" presetID="22" presetClass="entr" presetSubtype="8" fill="hold" nodeType="withEffect">
-                                  <p:stCondLst>
-                                    <p:cond delay="400"/>
-                                  </p:stCondLst>
-                                  <p:childTnLst>
-                                    <p:set>
-                                      <p:cBhvr>
-                                        <p:cTn id="6" dur="1" fill="hold">
-                                          <p:stCondLst>
-                                            <p:cond delay="0"/>
-                                          </p:stCondLst>
-                                        </p:cTn>
-                                        <p:tgtEl>
-                                          <p:spTgt spid="4"/>
-                                        </p:tgtEl>
-                                        <p:attrNameLst>
-                                          <p:attrName>style.visibility</p:attrName>
-                                        </p:attrNameLst>
-                                      </p:cBhvr>
-                                      <p:to>
-                                        <p:strVal val="visible"/>
-                                      </p:to>
-                                    </p:set>
-                                    <p:animEffect transition="in" filter="wipe(left)">
-                                      <p:cBhvr>
-                                        <p:cTn id="7" dur="1400" decel="100000"/>
-                                        <p:tgtEl>
-                                          <p:spTgt spid="4"/>
-                                        </p:tgtEl>
-                                      </p:cBhvr>
-                                    </p:animEffect>
-                                  </p:childTnLst>
-                                </p:cTn>
-                              </p:par>
-                              <p:par>
-                                <p:cTn id="8" presetID="22" presetClass="entr" presetSubtype="8" fill="hold" nodeType="withEffect">
-                                  <p:stCondLst>
-                                    <p:cond delay="400"/>
-                                  </p:stCondLst>
-                                  <p:childTnLst>
-                                    <p:set>
-                                      <p:cBhvr>
-                                        <p:cTn id="9" dur="1" fill="hold">
-                                          <p:stCondLst>
-                                            <p:cond delay="0"/>
-                                          </p:stCondLst>
-                                        </p:cTn>
-                                        <p:tgtEl>
-                                          <p:spTgt spid="7"/>
-                                        </p:tgtEl>
-                                        <p:attrNameLst>
-                                          <p:attrName>style.visibility</p:attrName>
-                                        </p:attrNameLst>
-                                      </p:cBhvr>
-                                      <p:to>
-                                        <p:strVal val="visible"/>
-                                      </p:to>
-                                    </p:set>
-                                    <p:animEffect transition="in" filter="wipe(left)">
-                                      <p:cBhvr>
-                                        <p:cTn id="10" dur="1400" decel="100000"/>
-                                        <p:tgtEl>
-                                          <p:spTgt spid="7"/>
-                                        </p:tgtEl>
-                                      </p:cBhvr>
-                                    </p:animEffect>
-                                  </p:childTnLst>
-                                </p:cTn>
-                              </p:par>
-                            </p:childTnLst>
-                          </p:cTn>
-                        </p:par>
-                      </p:childTnLst>
-                    </p:cTn>
-                  </p:par>
-                </p:childTnLst>
-              </p:cTn>
-              <p:prevCondLst>
-                <p:cond evt="onPrev" delay="0">
-                  <p:tgtEl>
-                    <p:sldTgt/>
-                  </p:tgtEl>
-                </p:cond>
-              </p:prevCondLst>
-              <p:nextCondLst>
-                <p:cond evt="onNext" delay="0">
-                  <p:tgtEl>
-                    <p:sldTgt/>
-                  </p:tgtEl>
-                </p:cond>
-              </p:nextCondLst>
-            </p:seq>
-          </p:childTnLst>
-        </p:cTn>
-      </p:par>
-    </p:tnLst>
-  </p:timing>
 </p:sld>
 </file>
 
@@ -15862,21 +15952,56 @@
                 </a:solidFill>
                 <a:latin typeface="Switzer Extralight"/>
               </a:rPr>
-              <a:t>Free to try. Pay once to unlock everything.</a:t>
+              <a:t>Who it's for.</a:t>
+            </a:r>
+          </a:p>
+        </p:txBody>
+      </p:sp>
+      <p:sp>
+        <p:nvSpPr>
+          <p:cNvPr id="3" name="TextBox 2"/>
+          <p:cNvSpPr txBox="1"/>
+          <p:nvPr/>
+        </p:nvSpPr>
+        <p:spPr>
+          <a:xfrm>
+            <a:off x="822960" y="1600200"/>
+            <a:ext cx="10058400" cy="457200"/>
+          </a:xfrm>
+          <a:prstGeom prst="rect">
+            <a:avLst/>
+          </a:prstGeom>
+          <a:noFill/>
+        </p:spPr>
+        <p:txBody>
+          <a:bodyPr wrap="square" lIns="0" rIns="0" tIns="0" bIns="0" anchor="t">
+            <a:spAutoFit/>
+          </a:bodyPr>
+          <a:lstStyle/>
+          <a:p>
+            <a:pPr algn="l"/>
+            <a:r>
+              <a:rPr sz="1600">
+                <a:solidFill>
+                  <a:srgbClr val="9A9894"/>
+                </a:solidFill>
+                <a:latin typeface="Switzer Light"/>
+              </a:rPr>
+              <a:t>Anyone who lives on a MacBook and repeats the same few actions all day.</a:t>
             </a:r>
           </a:p>
         </p:txBody>
       </p:sp>
       <p:cxnSp>
         <p:nvCxnSpPr>
-          <p:cNvPr id="3" name="Connector 2"/>
+          <p:cNvPr id="4" name="Connector 3"/>
           <p:cNvCxnSpPr/>
           <p:nvPr/>
         </p:nvCxnSpPr>
         <p:spPr>
           <a:xfrm>
-            <a:off x="822960" y="2560320"/>
-            <a:ext cx="3058058" cy="0"/>
+            <a:off x="822960" y="3017520"/>
+            <a:ext cx="2316403" cy="0"/>
           </a:xfrm>
           <a:prstGeom prst="line">
             <a:avLst/>
@@ -15904,14 +16029,14 @@
       </p:cxnSp>
       <p:sp>
         <p:nvSpPr>
-          <p:cNvPr id="4" name="TextBox 3"/>
+          <p:cNvPr id="5" name="TextBox 4"/>
           <p:cNvSpPr txBox="1"/>
           <p:nvPr/>
         </p:nvSpPr>
         <p:spPr>
           <a:xfrm>
-            <a:off x="822960" y="2743200"/>
-            <a:ext cx="2743200" cy="274320"/>
+            <a:off x="822960" y="3200400"/>
+            <a:ext cx="2362123" cy="822960"/>
           </a:xfrm>
           <a:prstGeom prst="rect">
             <a:avLst/>
@@ -15924,50 +16049,19 @@
           </a:bodyPr>
           <a:lstStyle/>
           <a:p>
-            <a:pPr algn="l"/>
+            <a:pPr algn="l">
+              <a:lnSpc>
+                <a:spcPct val="105000"/>
+              </a:lnSpc>
+            </a:pPr>
             <a:r>
-              <a:rPr sz="1000">
-                <a:solidFill>
-                  <a:srgbClr val="9A9894"/>
-                </a:solidFill>
-                <a:latin typeface="Fragment Mono"/>
-              </a:rPr>
-              <a:t>FREE</a:t>
-            </a:r>
-          </a:p>
-        </p:txBody>
-      </p:sp>
-      <p:sp>
-        <p:nvSpPr>
-          <p:cNvPr id="5" name="TextBox 4"/>
-          <p:cNvSpPr txBox="1"/>
-          <p:nvPr/>
-        </p:nvSpPr>
-        <p:spPr>
-          <a:xfrm>
-            <a:off x="822960" y="3063240"/>
-            <a:ext cx="3515258" cy="1463040"/>
-          </a:xfrm>
-          <a:prstGeom prst="rect">
-            <a:avLst/>
-          </a:prstGeom>
-          <a:noFill/>
-        </p:spPr>
-        <p:txBody>
-          <a:bodyPr wrap="square" lIns="0" rIns="0" tIns="0" bIns="0" anchor="t">
-            <a:spAutoFit/>
-          </a:bodyPr>
-          <a:lstStyle/>
-          <a:p>
-            <a:pPr algn="l"/>
-            <a:r>
-              <a:rPr sz="9600">
+              <a:rPr sz="2400">
                 <a:solidFill>
                   <a:srgbClr val="F2F0EC"/>
                 </a:solidFill>
                 <a:latin typeface="Switzer Extralight"/>
               </a:rPr>
-              <a:t>$0</a:t>
+              <a:t>Spreadsheet people</a:t>
             </a:r>
           </a:p>
         </p:txBody>
@@ -15980,8 +16074,8 @@
         </p:nvSpPr>
         <p:spPr>
           <a:xfrm>
-            <a:off x="822960" y="4572000"/>
-            <a:ext cx="3149498" cy="457200"/>
+            <a:off x="822960" y="4114800"/>
+            <a:ext cx="2270683" cy="914400"/>
           </a:xfrm>
           <a:prstGeom prst="rect">
             <a:avLst/>
@@ -15994,15 +16088,19 @@
           </a:bodyPr>
           <a:lstStyle/>
           <a:p>
-            <a:pPr algn="l"/>
+            <a:pPr algn="l">
+              <a:lnSpc>
+                <a:spcPct val="120000"/>
+              </a:lnSpc>
+            </a:pPr>
             <a:r>
-              <a:rPr sz="1800">
+              <a:rPr sz="1500">
                 <a:solidFill>
                   <a:srgbClr val="9A9894"/>
                 </a:solidFill>
                 <a:latin typeface="Switzer Light"/>
               </a:rPr>
-              <a:t>two palm buttons</a:t>
+              <a:t>Run a macro or AutoSum with a palm tap.</a:t>
             </a:r>
           </a:p>
         </p:txBody>
@@ -16015,15 +16113,15 @@
         </p:nvCxnSpPr>
         <p:spPr>
           <a:xfrm>
-            <a:off x="4338218" y="2560320"/>
-            <a:ext cx="3058058" cy="0"/>
+            <a:off x="3459403" y="3017520"/>
+            <a:ext cx="2316403" cy="0"/>
           </a:xfrm>
           <a:prstGeom prst="line">
             <a:avLst/>
           </a:prstGeom>
-          <a:ln w="12700">
+          <a:ln w="9525">
             <a:solidFill>
-              <a:srgbClr val="F2F0EC"/>
+              <a:srgbClr val="3A3937"/>
             </a:solidFill>
           </a:ln>
         </p:spPr>
@@ -16050,8 +16148,8 @@
         </p:nvSpPr>
         <p:spPr>
           <a:xfrm>
-            <a:off x="4338218" y="2743200"/>
-            <a:ext cx="2743200" cy="274320"/>
+            <a:off x="3459403" y="3200400"/>
+            <a:ext cx="2362123" cy="822960"/>
           </a:xfrm>
           <a:prstGeom prst="rect">
             <a:avLst/>
@@ -16064,64 +16162,33 @@
           </a:bodyPr>
           <a:lstStyle/>
           <a:p>
-            <a:pPr algn="l"/>
+            <a:pPr algn="l">
+              <a:lnSpc>
+                <a:spcPct val="105000"/>
+              </a:lnSpc>
+            </a:pPr>
             <a:r>
-              <a:rPr sz="1000">
-                <a:solidFill>
-                  <a:srgbClr val="9A9894"/>
-                </a:solidFill>
-                <a:latin typeface="Fragment Mono"/>
-              </a:rPr>
-              <a:t>PRO</a:t>
-            </a:r>
-          </a:p>
-        </p:txBody>
-      </p:sp>
-      <p:sp>
-        <p:nvSpPr>
-          <p:cNvPr id="9" name="TextBox 8"/>
-          <p:cNvSpPr txBox="1"/>
-          <p:nvPr/>
-        </p:nvSpPr>
-        <p:spPr>
-          <a:xfrm>
-            <a:off x="4338218" y="3063240"/>
-            <a:ext cx="3515258" cy="1463040"/>
-          </a:xfrm>
-          <a:prstGeom prst="rect">
-            <a:avLst/>
-          </a:prstGeom>
-          <a:noFill/>
-        </p:spPr>
-        <p:txBody>
-          <a:bodyPr wrap="square" lIns="0" rIns="0" tIns="0" bIns="0" anchor="t">
-            <a:spAutoFit/>
-          </a:bodyPr>
-          <a:lstStyle/>
-          <a:p>
-            <a:pPr algn="l"/>
-            <a:r>
-              <a:rPr sz="9600">
+              <a:rPr sz="2400">
                 <a:solidFill>
                   <a:srgbClr val="F2F0EC"/>
                 </a:solidFill>
                 <a:latin typeface="Switzer Extralight"/>
               </a:rPr>
-              <a:t>$29</a:t>
+              <a:t>Designers</a:t>
             </a:r>
           </a:p>
         </p:txBody>
       </p:sp>
       <p:sp>
         <p:nvSpPr>
-          <p:cNvPr id="10" name="TextBox 9"/>
+          <p:cNvPr id="9" name="TextBox 8"/>
           <p:cNvSpPr txBox="1"/>
           <p:nvPr/>
         </p:nvSpPr>
         <p:spPr>
           <a:xfrm>
-            <a:off x="4338218" y="4572000"/>
-            <a:ext cx="3149498" cy="457200"/>
+            <a:off x="3459403" y="4114800"/>
+            <a:ext cx="2270683" cy="914400"/>
           </a:xfrm>
           <a:prstGeom prst="rect">
             <a:avLst/>
@@ -16134,29 +16201,33 @@
           </a:bodyPr>
           <a:lstStyle/>
           <a:p>
-            <a:pPr algn="l"/>
+            <a:pPr algn="l">
+              <a:lnSpc>
+                <a:spcPct val="120000"/>
+              </a:lnSpc>
+            </a:pPr>
             <a:r>
-              <a:rPr sz="1800">
+              <a:rPr sz="1500">
                 <a:solidFill>
                   <a:srgbClr val="9A9894"/>
                 </a:solidFill>
                 <a:latin typeface="Switzer Light"/>
               </a:rPr>
-              <a:t>once, everything</a:t>
+              <a:t>Undo and switch tools without leaving the canvas.</a:t>
             </a:r>
           </a:p>
         </p:txBody>
       </p:sp>
       <p:cxnSp>
         <p:nvCxnSpPr>
-          <p:cNvPr id="11" name="Connector 10"/>
+          <p:cNvPr id="10" name="Connector 9"/>
           <p:cNvCxnSpPr/>
           <p:nvPr/>
         </p:nvCxnSpPr>
         <p:spPr>
           <a:xfrm>
-            <a:off x="7853476" y="2560320"/>
-            <a:ext cx="3058058" cy="0"/>
+            <a:off x="6095847" y="3017520"/>
+            <a:ext cx="2316403" cy="0"/>
           </a:xfrm>
           <a:prstGeom prst="line">
             <a:avLst/>
@@ -16184,14 +16255,14 @@
       </p:cxnSp>
       <p:sp>
         <p:nvSpPr>
-          <p:cNvPr id="12" name="TextBox 11"/>
+          <p:cNvPr id="11" name="TextBox 10"/>
           <p:cNvSpPr txBox="1"/>
           <p:nvPr/>
         </p:nvSpPr>
         <p:spPr>
           <a:xfrm>
-            <a:off x="7853476" y="2743200"/>
-            <a:ext cx="2743200" cy="274320"/>
+            <a:off x="6095847" y="3200400"/>
+            <a:ext cx="2362123" cy="822960"/>
           </a:xfrm>
           <a:prstGeom prst="rect">
             <a:avLst/>
@@ -16204,64 +16275,33 @@
           </a:bodyPr>
           <a:lstStyle/>
           <a:p>
-            <a:pPr algn="l"/>
+            <a:pPr algn="l">
+              <a:lnSpc>
+                <a:spcPct val="105000"/>
+              </a:lnSpc>
+            </a:pPr>
             <a:r>
-              <a:rPr sz="1000">
-                <a:solidFill>
-                  <a:srgbClr val="9A9894"/>
-                </a:solidFill>
-                <a:latin typeface="Fragment Mono"/>
-              </a:rPr>
-              <a:t>TEAMS</a:t>
-            </a:r>
-          </a:p>
-        </p:txBody>
-      </p:sp>
-      <p:sp>
-        <p:nvSpPr>
-          <p:cNvPr id="13" name="TextBox 12"/>
-          <p:cNvSpPr txBox="1"/>
-          <p:nvPr/>
-        </p:nvSpPr>
-        <p:spPr>
-          <a:xfrm>
-            <a:off x="7853476" y="3063240"/>
-            <a:ext cx="3515258" cy="1463040"/>
-          </a:xfrm>
-          <a:prstGeom prst="rect">
-            <a:avLst/>
-          </a:prstGeom>
-          <a:noFill/>
-        </p:spPr>
-        <p:txBody>
-          <a:bodyPr wrap="square" lIns="0" rIns="0" tIns="0" bIns="0" anchor="t">
-            <a:spAutoFit/>
-          </a:bodyPr>
-          <a:lstStyle/>
-          <a:p>
-            <a:pPr algn="l"/>
-            <a:r>
-              <a:rPr sz="9600">
+              <a:rPr sz="2400">
                 <a:solidFill>
                   <a:srgbClr val="F2F0EC"/>
                 </a:solidFill>
                 <a:latin typeface="Switzer Extralight"/>
               </a:rPr>
-              <a:t>$49</a:t>
+              <a:t>Developers</a:t>
             </a:r>
           </a:p>
         </p:txBody>
       </p:sp>
       <p:sp>
         <p:nvSpPr>
-          <p:cNvPr id="14" name="TextBox 13"/>
+          <p:cNvPr id="12" name="TextBox 11"/>
           <p:cNvSpPr txBox="1"/>
           <p:nvPr/>
         </p:nvSpPr>
         <p:spPr>
           <a:xfrm>
-            <a:off x="7853476" y="4572000"/>
-            <a:ext cx="3149498" cy="457200"/>
+            <a:off x="6095847" y="4114800"/>
+            <a:ext cx="2270683" cy="914400"/>
           </a:xfrm>
           <a:prstGeom prst="rect">
             <a:avLst/>
@@ -16274,22 +16314,139 @@
           </a:bodyPr>
           <a:lstStyle/>
           <a:p>
-            <a:pPr algn="l"/>
+            <a:pPr algn="l">
+              <a:lnSpc>
+                <a:spcPct val="120000"/>
+              </a:lnSpc>
+            </a:pPr>
             <a:r>
-              <a:rPr sz="1800">
+              <a:rPr sz="1500">
                 <a:solidFill>
                   <a:srgbClr val="9A9894"/>
                 </a:solidFill>
                 <a:latin typeface="Switzer Light"/>
               </a:rPr>
-              <a:t>per seat, per year</a:t>
+              <a:t>Build, run and jump between windows.</a:t>
             </a:r>
           </a:p>
         </p:txBody>
       </p:sp>
+      <p:cxnSp>
+        <p:nvCxnSpPr>
+          <p:cNvPr id="13" name="Connector 12"/>
+          <p:cNvCxnSpPr/>
+          <p:nvPr/>
+        </p:nvCxnSpPr>
+        <p:spPr>
+          <a:xfrm>
+            <a:off x="8732291" y="3017520"/>
+            <a:ext cx="2316403" cy="0"/>
+          </a:xfrm>
+          <a:prstGeom prst="line">
+            <a:avLst/>
+          </a:prstGeom>
+          <a:ln w="9525">
+            <a:solidFill>
+              <a:srgbClr val="3A3937"/>
+            </a:solidFill>
+          </a:ln>
+        </p:spPr>
+        <p:style>
+          <a:lnRef idx="2">
+            <a:schemeClr val="accent1"/>
+          </a:lnRef>
+          <a:fillRef idx="0">
+            <a:schemeClr val="accent1"/>
+          </a:fillRef>
+          <a:effectRef idx="1">
+            <a:schemeClr val="accent1"/>
+          </a:effectRef>
+          <a:fontRef idx="minor">
+            <a:schemeClr val="tx1"/>
+          </a:fontRef>
+        </p:style>
+      </p:cxnSp>
+      <p:sp>
+        <p:nvSpPr>
+          <p:cNvPr id="14" name="TextBox 13"/>
+          <p:cNvSpPr txBox="1"/>
+          <p:nvPr/>
+        </p:nvSpPr>
+        <p:spPr>
+          <a:xfrm>
+            <a:off x="8732291" y="3200400"/>
+            <a:ext cx="2362123" cy="822960"/>
+          </a:xfrm>
+          <a:prstGeom prst="rect">
+            <a:avLst/>
+          </a:prstGeom>
+          <a:noFill/>
+        </p:spPr>
+        <p:txBody>
+          <a:bodyPr wrap="square" lIns="0" rIns="0" tIns="0" bIns="0" anchor="t">
+            <a:spAutoFit/>
+          </a:bodyPr>
+          <a:lstStyle/>
+          <a:p>
+            <a:pPr algn="l">
+              <a:lnSpc>
+                <a:spcPct val="105000"/>
+              </a:lnSpc>
+            </a:pPr>
+            <a:r>
+              <a:rPr sz="2400">
+                <a:solidFill>
+                  <a:srgbClr val="F2F0EC"/>
+                </a:solidFill>
+                <a:latin typeface="Switzer Extralight"/>
+              </a:rPr>
+              <a:t>Anyone on calls</a:t>
+            </a:r>
+          </a:p>
+        </p:txBody>
+      </p:sp>
       <p:sp>
         <p:nvSpPr>
           <p:cNvPr id="15" name="TextBox 14"/>
+          <p:cNvSpPr txBox="1"/>
+          <p:nvPr/>
+        </p:nvSpPr>
+        <p:spPr>
+          <a:xfrm>
+            <a:off x="8732291" y="4114800"/>
+            <a:ext cx="2270683" cy="914400"/>
+          </a:xfrm>
+          <a:prstGeom prst="rect">
+            <a:avLst/>
+          </a:prstGeom>
+          <a:noFill/>
+        </p:spPr>
+        <p:txBody>
+          <a:bodyPr wrap="square" lIns="0" rIns="0" tIns="0" bIns="0" anchor="t">
+            <a:spAutoFit/>
+          </a:bodyPr>
+          <a:lstStyle/>
+          <a:p>
+            <a:pPr algn="l">
+              <a:lnSpc>
+                <a:spcPct val="120000"/>
+              </a:lnSpc>
+            </a:pPr>
+            <a:r>
+              <a:rPr sz="1500">
+                <a:solidFill>
+                  <a:srgbClr val="9A9894"/>
+                </a:solidFill>
+                <a:latin typeface="Switzer Light"/>
+              </a:rPr>
+              <a:t>Mute with a tap they can find without looking.</a:t>
+            </a:r>
+          </a:p>
+        </p:txBody>
+      </p:sp>
+      <p:sp>
+        <p:nvSpPr>
+          <p:cNvPr id="16" name="TextBox 15"/>
           <p:cNvSpPr txBox="1"/>
           <p:nvPr/>
         </p:nvSpPr>
@@ -16317,7 +16474,7 @@
                 </a:solidFill>
                 <a:latin typeface="Switzer Light"/>
               </a:rPr>
-              <a:t>Every Apple silicon MacBook already has the sensor. Free during the beta.</a:t>
+              <a:t>Works on the MacBook they already carry: desk, couch, train.</a:t>
             </a:r>
           </a:p>
         </p:txBody>
@@ -16334,6 +16491,525 @@
 </file>
 
 <file path=ppt/slides/slide8.xml><?xml version="1.0" encoding="utf-8"?>
+<p:sld xmlns:a="http://schemas.openxmlformats.org/drawingml/2006/main" xmlns:p="http://schemas.openxmlformats.org/presentationml/2006/main" xmlns:r="http://schemas.openxmlformats.org/officeDocument/2006/relationships">
+  <p:cSld>
+    <p:bg>
+      <p:bgPr>
+        <a:solidFill>
+          <a:srgbClr val="0B0B0C"/>
+        </a:solidFill>
+        <a:effectLst/>
+      </p:bgPr>
+    </p:bg>
+    <p:spTree>
+      <p:nvGrpSpPr>
+        <p:cNvPr id="1" name=""/>
+        <p:cNvGrpSpPr/>
+        <p:nvPr/>
+      </p:nvGrpSpPr>
+      <p:grpSpPr/>
+      <p:sp>
+        <p:nvSpPr>
+          <p:cNvPr id="2" name="TextBox 1"/>
+          <p:cNvSpPr txBox="1"/>
+          <p:nvPr/>
+        </p:nvSpPr>
+        <p:spPr>
+          <a:xfrm>
+            <a:off x="822960" y="822960"/>
+            <a:ext cx="10515600" cy="914400"/>
+          </a:xfrm>
+          <a:prstGeom prst="rect">
+            <a:avLst/>
+          </a:prstGeom>
+          <a:noFill/>
+        </p:spPr>
+        <p:txBody>
+          <a:bodyPr wrap="square" lIns="0" rIns="0" tIns="0" bIns="0" anchor="t">
+            <a:spAutoFit/>
+          </a:bodyPr>
+          <a:lstStyle/>
+          <a:p>
+            <a:pPr algn="l"/>
+            <a:r>
+              <a:rPr sz="4000">
+                <a:solidFill>
+                  <a:srgbClr val="F2F0EC"/>
+                </a:solidFill>
+                <a:latin typeface="Switzer Extralight"/>
+              </a:rPr>
+              <a:t>Free to try. Pay once to unlock everything.</a:t>
+            </a:r>
+          </a:p>
+        </p:txBody>
+      </p:sp>
+      <p:cxnSp>
+        <p:nvCxnSpPr>
+          <p:cNvPr id="3" name="Connector 2"/>
+          <p:cNvCxnSpPr/>
+          <p:nvPr/>
+        </p:nvCxnSpPr>
+        <p:spPr>
+          <a:xfrm>
+            <a:off x="822960" y="2560320"/>
+            <a:ext cx="3058058" cy="0"/>
+          </a:xfrm>
+          <a:prstGeom prst="line">
+            <a:avLst/>
+          </a:prstGeom>
+          <a:ln w="9525">
+            <a:solidFill>
+              <a:srgbClr val="3A3937"/>
+            </a:solidFill>
+          </a:ln>
+        </p:spPr>
+        <p:style>
+          <a:lnRef idx="2">
+            <a:schemeClr val="accent1"/>
+          </a:lnRef>
+          <a:fillRef idx="0">
+            <a:schemeClr val="accent1"/>
+          </a:fillRef>
+          <a:effectRef idx="1">
+            <a:schemeClr val="accent1"/>
+          </a:effectRef>
+          <a:fontRef idx="minor">
+            <a:schemeClr val="tx1"/>
+          </a:fontRef>
+        </p:style>
+      </p:cxnSp>
+      <p:sp>
+        <p:nvSpPr>
+          <p:cNvPr id="4" name="TextBox 3"/>
+          <p:cNvSpPr txBox="1"/>
+          <p:nvPr/>
+        </p:nvSpPr>
+        <p:spPr>
+          <a:xfrm>
+            <a:off x="822960" y="2743200"/>
+            <a:ext cx="2743200" cy="274320"/>
+          </a:xfrm>
+          <a:prstGeom prst="rect">
+            <a:avLst/>
+          </a:prstGeom>
+          <a:noFill/>
+        </p:spPr>
+        <p:txBody>
+          <a:bodyPr wrap="square" lIns="0" rIns="0" tIns="0" bIns="0" anchor="t">
+            <a:spAutoFit/>
+          </a:bodyPr>
+          <a:lstStyle/>
+          <a:p>
+            <a:pPr algn="l"/>
+            <a:r>
+              <a:rPr sz="1000">
+                <a:solidFill>
+                  <a:srgbClr val="9A9894"/>
+                </a:solidFill>
+                <a:latin typeface="Fragment Mono"/>
+              </a:rPr>
+              <a:t>FREE</a:t>
+            </a:r>
+          </a:p>
+        </p:txBody>
+      </p:sp>
+      <p:sp>
+        <p:nvSpPr>
+          <p:cNvPr id="5" name="TextBox 4"/>
+          <p:cNvSpPr txBox="1"/>
+          <p:nvPr/>
+        </p:nvSpPr>
+        <p:spPr>
+          <a:xfrm>
+            <a:off x="822960" y="3063240"/>
+            <a:ext cx="3515258" cy="1463040"/>
+          </a:xfrm>
+          <a:prstGeom prst="rect">
+            <a:avLst/>
+          </a:prstGeom>
+          <a:noFill/>
+        </p:spPr>
+        <p:txBody>
+          <a:bodyPr wrap="square" lIns="0" rIns="0" tIns="0" bIns="0" anchor="t">
+            <a:spAutoFit/>
+          </a:bodyPr>
+          <a:lstStyle/>
+          <a:p>
+            <a:pPr algn="l"/>
+            <a:r>
+              <a:rPr sz="9600">
+                <a:solidFill>
+                  <a:srgbClr val="F2F0EC"/>
+                </a:solidFill>
+                <a:latin typeface="Switzer Extralight"/>
+              </a:rPr>
+              <a:t>$0</a:t>
+            </a:r>
+          </a:p>
+        </p:txBody>
+      </p:sp>
+      <p:sp>
+        <p:nvSpPr>
+          <p:cNvPr id="6" name="TextBox 5"/>
+          <p:cNvSpPr txBox="1"/>
+          <p:nvPr/>
+        </p:nvSpPr>
+        <p:spPr>
+          <a:xfrm>
+            <a:off x="822960" y="4572000"/>
+            <a:ext cx="3149498" cy="457200"/>
+          </a:xfrm>
+          <a:prstGeom prst="rect">
+            <a:avLst/>
+          </a:prstGeom>
+          <a:noFill/>
+        </p:spPr>
+        <p:txBody>
+          <a:bodyPr wrap="square" lIns="0" rIns="0" tIns="0" bIns="0" anchor="t">
+            <a:spAutoFit/>
+          </a:bodyPr>
+          <a:lstStyle/>
+          <a:p>
+            <a:pPr algn="l"/>
+            <a:r>
+              <a:rPr sz="1800">
+                <a:solidFill>
+                  <a:srgbClr val="9A9894"/>
+                </a:solidFill>
+                <a:latin typeface="Switzer Light"/>
+              </a:rPr>
+              <a:t>two palm buttons</a:t>
+            </a:r>
+          </a:p>
+        </p:txBody>
+      </p:sp>
+      <p:cxnSp>
+        <p:nvCxnSpPr>
+          <p:cNvPr id="7" name="Connector 6"/>
+          <p:cNvCxnSpPr/>
+          <p:nvPr/>
+        </p:nvCxnSpPr>
+        <p:spPr>
+          <a:xfrm>
+            <a:off x="4338218" y="2560320"/>
+            <a:ext cx="3058058" cy="0"/>
+          </a:xfrm>
+          <a:prstGeom prst="line">
+            <a:avLst/>
+          </a:prstGeom>
+          <a:ln w="12700">
+            <a:solidFill>
+              <a:srgbClr val="F2F0EC"/>
+            </a:solidFill>
+          </a:ln>
+        </p:spPr>
+        <p:style>
+          <a:lnRef idx="2">
+            <a:schemeClr val="accent1"/>
+          </a:lnRef>
+          <a:fillRef idx="0">
+            <a:schemeClr val="accent1"/>
+          </a:fillRef>
+          <a:effectRef idx="1">
+            <a:schemeClr val="accent1"/>
+          </a:effectRef>
+          <a:fontRef idx="minor">
+            <a:schemeClr val="tx1"/>
+          </a:fontRef>
+        </p:style>
+      </p:cxnSp>
+      <p:sp>
+        <p:nvSpPr>
+          <p:cNvPr id="8" name="TextBox 7"/>
+          <p:cNvSpPr txBox="1"/>
+          <p:nvPr/>
+        </p:nvSpPr>
+        <p:spPr>
+          <a:xfrm>
+            <a:off x="4338218" y="2743200"/>
+            <a:ext cx="2743200" cy="274320"/>
+          </a:xfrm>
+          <a:prstGeom prst="rect">
+            <a:avLst/>
+          </a:prstGeom>
+          <a:noFill/>
+        </p:spPr>
+        <p:txBody>
+          <a:bodyPr wrap="square" lIns="0" rIns="0" tIns="0" bIns="0" anchor="t">
+            <a:spAutoFit/>
+          </a:bodyPr>
+          <a:lstStyle/>
+          <a:p>
+            <a:pPr algn="l"/>
+            <a:r>
+              <a:rPr sz="1000">
+                <a:solidFill>
+                  <a:srgbClr val="9A9894"/>
+                </a:solidFill>
+                <a:latin typeface="Fragment Mono"/>
+              </a:rPr>
+              <a:t>PRO</a:t>
+            </a:r>
+          </a:p>
+        </p:txBody>
+      </p:sp>
+      <p:sp>
+        <p:nvSpPr>
+          <p:cNvPr id="9" name="TextBox 8"/>
+          <p:cNvSpPr txBox="1"/>
+          <p:nvPr/>
+        </p:nvSpPr>
+        <p:spPr>
+          <a:xfrm>
+            <a:off x="4338218" y="3063240"/>
+            <a:ext cx="3515258" cy="1463040"/>
+          </a:xfrm>
+          <a:prstGeom prst="rect">
+            <a:avLst/>
+          </a:prstGeom>
+          <a:noFill/>
+        </p:spPr>
+        <p:txBody>
+          <a:bodyPr wrap="square" lIns="0" rIns="0" tIns="0" bIns="0" anchor="t">
+            <a:spAutoFit/>
+          </a:bodyPr>
+          <a:lstStyle/>
+          <a:p>
+            <a:pPr algn="l"/>
+            <a:r>
+              <a:rPr sz="9600">
+                <a:solidFill>
+                  <a:srgbClr val="F2F0EC"/>
+                </a:solidFill>
+                <a:latin typeface="Switzer Extralight"/>
+              </a:rPr>
+              <a:t>$29</a:t>
+            </a:r>
+          </a:p>
+        </p:txBody>
+      </p:sp>
+      <p:sp>
+        <p:nvSpPr>
+          <p:cNvPr id="10" name="TextBox 9"/>
+          <p:cNvSpPr txBox="1"/>
+          <p:nvPr/>
+        </p:nvSpPr>
+        <p:spPr>
+          <a:xfrm>
+            <a:off x="4338218" y="4572000"/>
+            <a:ext cx="3149498" cy="457200"/>
+          </a:xfrm>
+          <a:prstGeom prst="rect">
+            <a:avLst/>
+          </a:prstGeom>
+          <a:noFill/>
+        </p:spPr>
+        <p:txBody>
+          <a:bodyPr wrap="square" lIns="0" rIns="0" tIns="0" bIns="0" anchor="t">
+            <a:spAutoFit/>
+          </a:bodyPr>
+          <a:lstStyle/>
+          <a:p>
+            <a:pPr algn="l"/>
+            <a:r>
+              <a:rPr sz="1800">
+                <a:solidFill>
+                  <a:srgbClr val="9A9894"/>
+                </a:solidFill>
+                <a:latin typeface="Switzer Light"/>
+              </a:rPr>
+              <a:t>once, everything</a:t>
+            </a:r>
+          </a:p>
+        </p:txBody>
+      </p:sp>
+      <p:cxnSp>
+        <p:nvCxnSpPr>
+          <p:cNvPr id="11" name="Connector 10"/>
+          <p:cNvCxnSpPr/>
+          <p:nvPr/>
+        </p:nvCxnSpPr>
+        <p:spPr>
+          <a:xfrm>
+            <a:off x="7853476" y="2560320"/>
+            <a:ext cx="3058058" cy="0"/>
+          </a:xfrm>
+          <a:prstGeom prst="line">
+            <a:avLst/>
+          </a:prstGeom>
+          <a:ln w="9525">
+            <a:solidFill>
+              <a:srgbClr val="3A3937"/>
+            </a:solidFill>
+          </a:ln>
+        </p:spPr>
+        <p:style>
+          <a:lnRef idx="2">
+            <a:schemeClr val="accent1"/>
+          </a:lnRef>
+          <a:fillRef idx="0">
+            <a:schemeClr val="accent1"/>
+          </a:fillRef>
+          <a:effectRef idx="1">
+            <a:schemeClr val="accent1"/>
+          </a:effectRef>
+          <a:fontRef idx="minor">
+            <a:schemeClr val="tx1"/>
+          </a:fontRef>
+        </p:style>
+      </p:cxnSp>
+      <p:sp>
+        <p:nvSpPr>
+          <p:cNvPr id="12" name="TextBox 11"/>
+          <p:cNvSpPr txBox="1"/>
+          <p:nvPr/>
+        </p:nvSpPr>
+        <p:spPr>
+          <a:xfrm>
+            <a:off x="7853476" y="2743200"/>
+            <a:ext cx="2743200" cy="274320"/>
+          </a:xfrm>
+          <a:prstGeom prst="rect">
+            <a:avLst/>
+          </a:prstGeom>
+          <a:noFill/>
+        </p:spPr>
+        <p:txBody>
+          <a:bodyPr wrap="square" lIns="0" rIns="0" tIns="0" bIns="0" anchor="t">
+            <a:spAutoFit/>
+          </a:bodyPr>
+          <a:lstStyle/>
+          <a:p>
+            <a:pPr algn="l"/>
+            <a:r>
+              <a:rPr sz="1000">
+                <a:solidFill>
+                  <a:srgbClr val="9A9894"/>
+                </a:solidFill>
+                <a:latin typeface="Fragment Mono"/>
+              </a:rPr>
+              <a:t>TEAMS</a:t>
+            </a:r>
+          </a:p>
+        </p:txBody>
+      </p:sp>
+      <p:sp>
+        <p:nvSpPr>
+          <p:cNvPr id="13" name="TextBox 12"/>
+          <p:cNvSpPr txBox="1"/>
+          <p:nvPr/>
+        </p:nvSpPr>
+        <p:spPr>
+          <a:xfrm>
+            <a:off x="7853476" y="3063240"/>
+            <a:ext cx="3515258" cy="1463040"/>
+          </a:xfrm>
+          <a:prstGeom prst="rect">
+            <a:avLst/>
+          </a:prstGeom>
+          <a:noFill/>
+        </p:spPr>
+        <p:txBody>
+          <a:bodyPr wrap="square" lIns="0" rIns="0" tIns="0" bIns="0" anchor="t">
+            <a:spAutoFit/>
+          </a:bodyPr>
+          <a:lstStyle/>
+          <a:p>
+            <a:pPr algn="l"/>
+            <a:r>
+              <a:rPr sz="9600">
+                <a:solidFill>
+                  <a:srgbClr val="F2F0EC"/>
+                </a:solidFill>
+                <a:latin typeface="Switzer Extralight"/>
+              </a:rPr>
+              <a:t>$49</a:t>
+            </a:r>
+          </a:p>
+        </p:txBody>
+      </p:sp>
+      <p:sp>
+        <p:nvSpPr>
+          <p:cNvPr id="14" name="TextBox 13"/>
+          <p:cNvSpPr txBox="1"/>
+          <p:nvPr/>
+        </p:nvSpPr>
+        <p:spPr>
+          <a:xfrm>
+            <a:off x="7853476" y="4572000"/>
+            <a:ext cx="3149498" cy="457200"/>
+          </a:xfrm>
+          <a:prstGeom prst="rect">
+            <a:avLst/>
+          </a:prstGeom>
+          <a:noFill/>
+        </p:spPr>
+        <p:txBody>
+          <a:bodyPr wrap="square" lIns="0" rIns="0" tIns="0" bIns="0" anchor="t">
+            <a:spAutoFit/>
+          </a:bodyPr>
+          <a:lstStyle/>
+          <a:p>
+            <a:pPr algn="l"/>
+            <a:r>
+              <a:rPr sz="1800">
+                <a:solidFill>
+                  <a:srgbClr val="9A9894"/>
+                </a:solidFill>
+                <a:latin typeface="Switzer Light"/>
+              </a:rPr>
+              <a:t>per seat, per year</a:t>
+            </a:r>
+          </a:p>
+        </p:txBody>
+      </p:sp>
+      <p:sp>
+        <p:nvSpPr>
+          <p:cNvPr id="15" name="TextBox 14"/>
+          <p:cNvSpPr txBox="1"/>
+          <p:nvPr/>
+        </p:nvSpPr>
+        <p:spPr>
+          <a:xfrm>
+            <a:off x="822960" y="6126480"/>
+            <a:ext cx="10545775" cy="365760"/>
+          </a:xfrm>
+          <a:prstGeom prst="rect">
+            <a:avLst/>
+          </a:prstGeom>
+          <a:noFill/>
+        </p:spPr>
+        <p:txBody>
+          <a:bodyPr wrap="square" lIns="0" rIns="0" tIns="0" bIns="0" anchor="t">
+            <a:spAutoFit/>
+          </a:bodyPr>
+          <a:lstStyle/>
+          <a:p>
+            <a:pPr algn="l"/>
+            <a:r>
+              <a:rPr sz="1300">
+                <a:solidFill>
+                  <a:srgbClr val="5E5C59"/>
+                </a:solidFill>
+                <a:latin typeface="Switzer Light"/>
+              </a:rPr>
+              <a:t>Every Apple silicon MacBook already has the sensor. Free during the beta.</a:t>
+            </a:r>
+          </a:p>
+        </p:txBody>
+      </p:sp>
+    </p:spTree>
+  </p:cSld>
+  <p:clrMapOvr>
+    <a:masterClrMapping/>
+  </p:clrMapOvr>
+  <p:transition spd="slow">
+    <p:fade/>
+  </p:transition>
+</p:sld>
+</file>
+
+<file path=ppt/slides/slide9.xml><?xml version="1.0" encoding="utf-8"?>
 <p:sld xmlns:a="http://schemas.openxmlformats.org/drawingml/2006/main" xmlns:p="http://schemas.openxmlformats.org/presentationml/2006/main" xmlns:r="http://schemas.openxmlformats.org/officeDocument/2006/relationships">
   <p:cSld>
     <p:bg>
